--- a/Claude outputs/HospitiumRIS_Client_Pitch.pptx
+++ b/Claude outputs/HospitiumRIS_Client_Pitch.pptx
@@ -25,11 +25,9 @@
     <p:sldId id="273" r:id="rId19"/>
     <p:sldId id="274" r:id="rId20"/>
     <p:sldId id="275" r:id="rId21"/>
-    <p:sldId id="276" r:id="rId22"/>
-    <p:sldId id="277" r:id="rId23"/>
   </p:sldIdLst>
   <p:notesMasterIdLst>
-    <p:notesMasterId r:id="rId24"/>
+    <p:notesMasterId r:id="rId22"/>
   </p:notesMasterIdLst>
   <p:sldSz cx="12192000" cy="6858000"/>
   <p:notesSz cx="6858000" cy="12192000"/>
@@ -128,13 +126,13 @@
   <p:extLst>
     <p:ext uri="{521415D9-36F7-43E2-AB2F-B90AF26B5E84}">
       <p14:sectionLst xmlns:p14="http://schemas.microsoft.com/office/powerpoint/2010/main">
-        <p14:section name="Opening" id="{689ac6ff-233d-b7fd-854f-a55e67ea5dd8}">
+        <p14:section name="Opening" id="{3e8dcd03-3d2b-4d0f-caeb-ecc9e9bf9645}">
           <p14:sldIdLst>
             <p14:sldId id="256"/>
             <p14:sldId id="257"/>
           </p14:sldIdLst>
         </p14:section>
-        <p14:section name="Why it matters" id="{7d19df26-8fee-3e99-196b-cf5c4614727e}">
+        <p14:section name="Why it matters" id="{0d504d43-b6c8-3f89-28c0-13a6de16dc9a}">
           <p14:sldIdLst>
             <p14:sldId id="258"/>
             <p14:sldId id="259"/>
@@ -142,7 +140,7 @@
             <p14:sldId id="261"/>
           </p14:sldIdLst>
         </p14:section>
-        <p14:section name="Product tour" id="{371dc5c3-9df6-c6c4-c3fc-312fd4209ff5}">
+        <p14:section name="Product tour" id="{fe41c191-62d4-7202-fcdc-ad1c0898de59}">
           <p14:sldIdLst>
             <p14:sldId id="262"/>
             <p14:sldId id="263"/>
@@ -152,22 +150,20 @@
             <p14:sldId id="267"/>
           </p14:sldIdLst>
         </p14:section>
-        <p14:section name="AI integration" id="{d195dbd7-3e7d-6eb9-3c58-b6ab6ce1d66a}">
+        <p14:section name="AI integration" id="{9e803200-be6d-62e2-b017-e6a00a95045e}">
           <p14:sldIdLst>
             <p14:sldId id="268"/>
             <p14:sldId id="269"/>
             <p14:sldId id="270"/>
             <p14:sldId id="271"/>
+          </p14:sldIdLst>
+        </p14:section>
+        <p14:section name="Trust &amp; next steps" id="{0efc9288-8ee8-8b5e-e8c8-60100a6fdf87}">
+          <p14:sldIdLst>
             <p14:sldId id="272"/>
             <p14:sldId id="273"/>
-          </p14:sldIdLst>
-        </p14:section>
-        <p14:section name="Trust &amp; next steps" id="{e95d7435-5556-341a-5939-a85f1851aea6}">
-          <p14:sldIdLst>
             <p14:sldId id="274"/>
             <p14:sldId id="275"/>
-            <p14:sldId id="276"/>
-            <p14:sldId id="277"/>
           </p14:sldIdLst>
         </p14:section>
       </p14:sectionLst>
@@ -1190,7 +1186,7 @@
           <a:p>
             <a:r>
               <a:rPr lang="en-US" dirty="0"/>
-              <a:t>Health institutions will ask how AI handles their data. Explain the flow: HospitiumRIS sends only what each task needs — for summaries, a publication title and abstract; for dashboards, aggregated metrics — never patient records. The institution supplies its own API keys and can choose Google Gemini or OpenAI, or disable AI. Outputs are labelled and advisory: people make every decision. If the model is unavailable, rule-based insights keep the platform working. Confirm specifics against your data-protection policy before committing to them in writing.</a:t>
+              <a:t>This is the leadership view. Trial intelligence shows enrolment against targets, the mix of trials by phase, success rates, how often trials lead to publications, and where funding comes from. These are the numbers boards, ministries and funders ask for, available on demand and exportable. (Figures shown are demo data.)</a:t>
             </a:r>
             <a:endParaRPr lang="en-US" dirty="0"/>
           </a:p>
@@ -1278,7 +1274,7 @@
           <a:p>
             <a:r>
               <a:rPr lang="en-US" dirty="0"/>
-              <a:t>Be clear about what is live and what is planned. Everything in the first column is in the product today. The Next and Later columns are the direction of travel — a writing assistant in the editor, pre-screening proposals against funder criteria, matching reviewers and grant opportunities, and eventually letting leadership ask plain-language questions of their research data. Invite the prospect to influence priorities as a pilot partner. Adjust these columns to match the current product roadmap before presenting.</a:t>
+              <a:t>Address the technical and procurement questions early. HospitiumRIS is built on persistent identifiers (ORCID for people, Crossref for publications, DataCite for datasets), so the institution's data stays interoperable. Access is role-based, institutional email domains are verified, and activity is logged for audit. It can be hosted for the client or deployed on their own infrastructure with Docker, and supports multiple institutions under one central administration.</a:t>
             </a:r>
             <a:endParaRPr lang="en-US" dirty="0"/>
           </a:p>
@@ -1366,7 +1362,7 @@
           <a:p>
             <a:r>
               <a:rPr lang="en-US" dirty="0"/>
-              <a:t>This is the leadership view. Trial intelligence shows enrolment against targets, the mix of trials by phase, success rates, how often trials lead to publications, and where funding comes from. These are the numbers boards, ministries and funders ask for, available on demand and exportable. (Figures shown are demo data.)</a:t>
+              <a:t>Walk through the rows the prospect cares about most rather than reading every line. The theme is the same in each row: work that today depends on manual effort and individual memory becomes a shared, live system. This is where the return on investment comes from — less administrative time, faster approvals, and better funder reporting.</a:t>
             </a:r>
             <a:endParaRPr lang="en-US" dirty="0"/>
           </a:p>
@@ -1454,7 +1450,7 @@
           <a:p>
             <a:r>
               <a:rPr lang="en-US" dirty="0"/>
-              <a:t>Address the technical and procurement questions early. HospitiumRIS is built on persistent identifiers (ORCID for people, Crossref for publications, DataCite for datasets), so the institution's data stays interoperable. Access is role-based, institutional email domains are verified, and activity is logged for audit. It can be hosted for the client or deployed on their own infrastructure with Docker, and supports multiple institutions under one central administration.</a:t>
+              <a:t>Walk through the five phases. Discover: we map their current workflows and forms. Configure: roles, review pipelines and verified domains. Migrate: publications are imported automatically from PubMed, Crossref and OpenAlex, and active proposals and approvals are brought across. Train: short role-based sessions. Go live: launch with support and review adoption together. Adjust timeframes and what is included to match your commercial offer.</a:t>
             </a:r>
             <a:endParaRPr lang="en-US" dirty="0"/>
           </a:p>
@@ -1630,7 +1626,7 @@
           <a:p>
             <a:r>
               <a:rPr lang="en-US" dirty="0"/>
-              <a:t>Walk through the rows the prospect cares about most rather than reading every line. The theme is the same in each row: work that today depends on manual effort and individual memory becomes a shared, live system. This is where the return on investment comes from — less administrative time, faster approvals, and better funder reporting.</a:t>
+              <a:t>Close with a clear ask. Propose a tailored demo using the prospect's own workflows, then a pilot with one department or research unit, then institution-wide rollout. Agree on the pilot scope and a date for the demo before leaving the meeting. Add your own contact details and any commercial terms before sending this deck.</a:t>
             </a:r>
             <a:endParaRPr lang="en-US" dirty="0"/>
           </a:p>
@@ -1654,182 +1650,6 @@
             <a:fld id="{F7021451-1387-4CA6-816F-3879F97B5CBC}" type="slidenum">
               <a:rPr lang="en-US"/>
               <a:t>20</a:t>
-            </a:fld>
-            <a:endParaRPr lang="en-US"/>
-          </a:p>
-        </p:txBody>
-      </p:sp>
-    </p:spTree>
-    <p:extLst>
-      <p:ext uri="{BB962C8B-B14F-4D97-AF65-F5344CB8AC3E}">
-        <p14:creationId xmlns:p14="http://schemas.microsoft.com/office/powerpoint/2010/main" val="1024086991"/>
-      </p:ext>
-    </p:extLst>
-  </p:cSld>
-  <p:clrMapOvr>
-    <a:masterClrMapping/>
-  </p:clrMapOvr>
-</p:notes>
-</file>
-
-<file path=ppt/notesSlides/notesSlide21.xml><?xml version="1.0" encoding="utf-8"?>
-<p:notes xmlns:a="http://schemas.openxmlformats.org/drawingml/2006/main" xmlns:r="http://schemas.openxmlformats.org/officeDocument/2006/relationships" xmlns:p="http://schemas.openxmlformats.org/presentationml/2006/main">
-  <p:cSld>
-    <p:spTree>
-      <p:nvGrpSpPr>
-        <p:cNvPr id="1" name=""/>
-        <p:cNvGrpSpPr/>
-        <p:nvPr/>
-      </p:nvGrpSpPr>
-      <p:grpSpPr>
-        <a:xfrm>
-          <a:off x="0" y="0"/>
-          <a:ext cx="0" cy="0"/>
-          <a:chOff x="0" y="0"/>
-          <a:chExt cx="0" cy="0"/>
-        </a:xfrm>
-      </p:grpSpPr>
-      <p:sp>
-        <p:nvSpPr>
-          <p:cNvPr id="2" name="Slide Image Placeholder 1"/>
-          <p:cNvSpPr>
-            <a:spLocks noGrp="1" noRot="1" noChangeAspect="1"/>
-          </p:cNvSpPr>
-          <p:nvPr>
-            <p:ph type="sldImg"/>
-          </p:nvPr>
-        </p:nvSpPr>
-        <p:spPr/>
-      </p:sp>
-      <p:sp>
-        <p:nvSpPr>
-          <p:cNvPr id="3" name="Notes Placeholder 2"/>
-          <p:cNvSpPr>
-            <a:spLocks noGrp="1"/>
-          </p:cNvSpPr>
-          <p:nvPr>
-            <p:ph type="body" idx="1"/>
-          </p:nvPr>
-        </p:nvSpPr>
-        <p:spPr/>
-        <p:txBody>
-          <a:bodyPr/>
-          <a:lstStyle/>
-          <a:p>
-            <a:r>
-              <a:rPr lang="en-US" dirty="0"/>
-              <a:t>Walk through the five phases. Discover: we map their current workflows and forms. Configure: roles, review pipelines and verified domains. Migrate: publications are imported automatically from PubMed, Crossref and OpenAlex, and active proposals and approvals are brought across. Train: short role-based sessions. Go live: launch with support and review adoption together. Adjust timeframes and what is included to match your commercial offer.</a:t>
-            </a:r>
-            <a:endParaRPr lang="en-US" dirty="0"/>
-          </a:p>
-        </p:txBody>
-      </p:sp>
-      <p:sp>
-        <p:nvSpPr>
-          <p:cNvPr id="4" name="Slide Number Placeholder 3"/>
-          <p:cNvSpPr>
-            <a:spLocks noGrp="1"/>
-          </p:cNvSpPr>
-          <p:nvPr>
-            <p:ph type="sldNum" sz="quarter" idx="10"/>
-          </p:nvPr>
-        </p:nvSpPr>
-        <p:spPr/>
-        <p:txBody>
-          <a:bodyPr/>
-          <a:lstStyle/>
-          <a:p>
-            <a:fld id="{F7021451-1387-4CA6-816F-3879F97B5CBC}" type="slidenum">
-              <a:rPr lang="en-US"/>
-              <a:t>21</a:t>
-            </a:fld>
-            <a:endParaRPr lang="en-US"/>
-          </a:p>
-        </p:txBody>
-      </p:sp>
-    </p:spTree>
-    <p:extLst>
-      <p:ext uri="{BB962C8B-B14F-4D97-AF65-F5344CB8AC3E}">
-        <p14:creationId xmlns:p14="http://schemas.microsoft.com/office/powerpoint/2010/main" val="1024086991"/>
-      </p:ext>
-    </p:extLst>
-  </p:cSld>
-  <p:clrMapOvr>
-    <a:masterClrMapping/>
-  </p:clrMapOvr>
-</p:notes>
-</file>
-
-<file path=ppt/notesSlides/notesSlide22.xml><?xml version="1.0" encoding="utf-8"?>
-<p:notes xmlns:a="http://schemas.openxmlformats.org/drawingml/2006/main" xmlns:r="http://schemas.openxmlformats.org/officeDocument/2006/relationships" xmlns:p="http://schemas.openxmlformats.org/presentationml/2006/main">
-  <p:cSld>
-    <p:spTree>
-      <p:nvGrpSpPr>
-        <p:cNvPr id="1" name=""/>
-        <p:cNvGrpSpPr/>
-        <p:nvPr/>
-      </p:nvGrpSpPr>
-      <p:grpSpPr>
-        <a:xfrm>
-          <a:off x="0" y="0"/>
-          <a:ext cx="0" cy="0"/>
-          <a:chOff x="0" y="0"/>
-          <a:chExt cx="0" cy="0"/>
-        </a:xfrm>
-      </p:grpSpPr>
-      <p:sp>
-        <p:nvSpPr>
-          <p:cNvPr id="2" name="Slide Image Placeholder 1"/>
-          <p:cNvSpPr>
-            <a:spLocks noGrp="1" noRot="1" noChangeAspect="1"/>
-          </p:cNvSpPr>
-          <p:nvPr>
-            <p:ph type="sldImg"/>
-          </p:nvPr>
-        </p:nvSpPr>
-        <p:spPr/>
-      </p:sp>
-      <p:sp>
-        <p:nvSpPr>
-          <p:cNvPr id="3" name="Notes Placeholder 2"/>
-          <p:cNvSpPr>
-            <a:spLocks noGrp="1"/>
-          </p:cNvSpPr>
-          <p:nvPr>
-            <p:ph type="body" idx="1"/>
-          </p:nvPr>
-        </p:nvSpPr>
-        <p:spPr/>
-        <p:txBody>
-          <a:bodyPr/>
-          <a:lstStyle/>
-          <a:p>
-            <a:r>
-              <a:rPr lang="en-US" dirty="0"/>
-              <a:t>Close with a clear ask. Propose a tailored demo using the prospect's own workflows, then a pilot with one department or research unit, then institution-wide rollout. Agree on the pilot scope and a date for the demo before leaving the meeting. Add your own contact details and any commercial terms before sending this deck.</a:t>
-            </a:r>
-            <a:endParaRPr lang="en-US" dirty="0"/>
-          </a:p>
-        </p:txBody>
-      </p:sp>
-      <p:sp>
-        <p:nvSpPr>
-          <p:cNvPr id="4" name="Slide Number Placeholder 3"/>
-          <p:cNvSpPr>
-            <a:spLocks noGrp="1"/>
-          </p:cNvSpPr>
-          <p:nvPr>
-            <p:ph type="sldNum" sz="quarter" idx="10"/>
-          </p:nvPr>
-        </p:nvSpPr>
-        <p:spPr/>
-        <p:txBody>
-          <a:bodyPr/>
-          <a:lstStyle/>
-          <a:p>
-            <a:fld id="{F7021451-1387-4CA6-816F-3879F97B5CBC}" type="slidenum">
-              <a:rPr lang="en-US"/>
-              <a:t>22</a:t>
             </a:fld>
             <a:endParaRPr lang="en-US"/>
           </a:p>
@@ -2070,7 +1890,7 @@
           <a:p>
             <a:r>
               <a:rPr lang="en-US" dirty="0"/>
-              <a:t>Tailor this slide to the room. For a university, lead with the research office. For a hospital, lead with clinical trials and ethics. For a foundation, lead with grants and impact. Emphasise that all four roles work on the same data, which is what removes duplicate entry and reporting effort.</a:t>
+              <a:t>HospitiumRIS is built for the full spectrum of health research institutions, from small research units to national referral hospitals. Point to the two or three types that match the prospect: a university teaching hospital will care about running research alongside clinical care; an ethics review board about online applications and approval tracking; a health ministry about a national view of research activity and compliance. Every type works on the same shared research record, which removes duplicate entry and reporting effort.</a:t>
             </a:r>
             <a:endParaRPr lang="en-US" dirty="0"/>
           </a:p>
@@ -8000,7 +7820,7 @@
                   <a:schemeClr val="tx2"/>
                 </a:solidFill>
               </a:rPr>
-              <a:t>Responsible AI, designed for health research</a:t>
+              <a:t>Institutional intelligence for leadership and funders</a:t>
             </a:r>
             <a:endParaRPr lang="en-US" sz="3200" dirty="0"/>
           </a:p>
@@ -8008,58 +7828,22 @@
       </p:sp>
       <p:sp>
         <p:nvSpPr>
-          <p:cNvPr id="3" name="Text 1"/>
-          <p:cNvSpPr txBox="1"/>
-          <p:nvPr/>
-        </p:nvSpPr>
-        <p:spPr>
-          <a:xfrm>
-            <a:off x="548640" y="1143000"/>
-            <a:ext cx="11064240" cy="457200"/>
-          </a:xfrm>
-          <a:prstGeom prst="rect">
-            <a:avLst/>
-          </a:prstGeom>
-          <a:noFill/>
-          <a:ln/>
-        </p:spPr>
-        <p:txBody>
-          <a:bodyPr wrap="square" lIns="0" tIns="0" rIns="0" bIns="0" rtlCol="0" anchor="ctr"/>
-          <a:lstStyle/>
-          <a:p>
-            <a:pPr indent="0" marL="0">
-              <a:buNone/>
-            </a:pPr>
-            <a:r>
-              <a:rPr lang="en-US" sz="1600" dirty="0">
-                <a:solidFill>
-                  <a:schemeClr val="tx1"/>
-                </a:solidFill>
-              </a:rPr>
-              <a:t>How a request flows through the AI layer, and the safeguards around it.</a:t>
-            </a:r>
-            <a:endParaRPr lang="en-US" sz="1600" dirty="0"/>
-          </a:p>
-        </p:txBody>
-      </p:sp>
-      <p:sp>
-        <p:nvSpPr>
-          <p:cNvPr id="4" name="Flow 1"/>
+          <p:cNvPr id="3" name="Trial intelligence frame"/>
           <p:cNvSpPr/>
           <p:nvPr/>
         </p:nvSpPr>
         <p:spPr>
           <a:xfrm>
-            <a:off x="548640" y="1783080"/>
-            <a:ext cx="2514600" cy="2148840"/>
+            <a:off x="548640" y="1371600"/>
+            <a:ext cx="7315200" cy="4540803"/>
           </a:xfrm>
           <a:prstGeom prst="roundRect">
             <a:avLst>
-              <a:gd name="adj" fmla="val 4255"/>
+              <a:gd name="adj" fmla="val 1611"/>
             </a:avLst>
           </a:prstGeom>
           <a:solidFill>
-            <a:srgbClr val="F6F4FB"/>
+            <a:srgbClr val="ECEAF2"/>
           </a:solidFill>
           <a:ln w="9525">
             <a:solidFill>
@@ -8067,36 +7851,93 @@
             </a:solidFill>
             <a:prstDash val="solid"/>
           </a:ln>
-        </p:spPr>
-      </p:sp>
-      <p:sp>
-        <p:nvSpPr>
-          <p:cNvPr id="5" name="Shape 3"/>
+          <a:effectLst>
+            <a:outerShdw sx="100000" sy="100000" kx="0" ky="0" algn="bl" rotWithShape="0" blurRad="152400" dist="50800" dir="5400000">
+              <a:srgbClr val="000000">
+                <a:alpha val="18000"/>
+              </a:srgbClr>
+            </a:outerShdw>
+          </a:effectLst>
+        </p:spPr>
+      </p:sp>
+      <p:sp>
+        <p:nvSpPr>
+          <p:cNvPr id="4" name="Shape 2"/>
           <p:cNvSpPr/>
           <p:nvPr/>
         </p:nvSpPr>
         <p:spPr>
           <a:xfrm>
-            <a:off x="777240" y="2011680"/>
-            <a:ext cx="548640" cy="548640"/>
+            <a:off x="676656" y="1444752"/>
+            <a:ext cx="91440" cy="91440"/>
           </a:xfrm>
           <a:prstGeom prst="ellipse">
             <a:avLst/>
           </a:prstGeom>
           <a:solidFill>
-            <a:srgbClr val="7E5BB5"/>
+            <a:srgbClr val="E86B6B"/>
           </a:solidFill>
           <a:ln w="12700">
             <a:solidFill>
-              <a:srgbClr val="7E5BB5"/>
+              <a:srgbClr val="E86B6B"/>
             </a:solidFill>
             <a:prstDash val="solid"/>
           </a:ln>
         </p:spPr>
       </p:sp>
+      <p:sp>
+        <p:nvSpPr>
+          <p:cNvPr id="5" name="Shape 3"/>
+          <p:cNvSpPr/>
+          <p:nvPr/>
+        </p:nvSpPr>
+        <p:spPr>
+          <a:xfrm>
+            <a:off x="822960" y="1444752"/>
+            <a:ext cx="91440" cy="91440"/>
+          </a:xfrm>
+          <a:prstGeom prst="ellipse">
+            <a:avLst/>
+          </a:prstGeom>
+          <a:solidFill>
+            <a:srgbClr val="F2C14E"/>
+          </a:solidFill>
+          <a:ln w="12700">
+            <a:solidFill>
+              <a:srgbClr val="F2C14E"/>
+            </a:solidFill>
+            <a:prstDash val="solid"/>
+          </a:ln>
+        </p:spPr>
+      </p:sp>
+      <p:sp>
+        <p:nvSpPr>
+          <p:cNvPr id="6" name="Shape 4"/>
+          <p:cNvSpPr/>
+          <p:nvPr/>
+        </p:nvSpPr>
+        <p:spPr>
+          <a:xfrm>
+            <a:off x="969264" y="1444752"/>
+            <a:ext cx="91440" cy="91440"/>
+          </a:xfrm>
+          <a:prstGeom prst="ellipse">
+            <a:avLst/>
+          </a:prstGeom>
+          <a:solidFill>
+            <a:srgbClr val="5DBB7A"/>
+          </a:solidFill>
+          <a:ln w="12700">
+            <a:solidFill>
+              <a:srgbClr val="5DBB7A"/>
+            </a:solidFill>
+            <a:prstDash val="solid"/>
+          </a:ln>
+        </p:spPr>
+      </p:sp>
       <p:pic>
         <p:nvPicPr>
-          <p:cNvPr id="6" name="Image 0" descr="preencoded.png">    </p:cNvPr>
+          <p:cNvPr id="7" name="Trial intelligence screenshot" descr="/home/claude/deck/img/ai_trialintel.png">    </p:cNvPr>
           <p:cNvPicPr>
             <a:picLocks noChangeAspect="1"/>
           </p:cNvPicPr>
@@ -8110,50 +7951,14 @@
         </p:blipFill>
         <p:spPr>
           <a:xfrm>
-            <a:off x="908914" y="2143354"/>
-            <a:ext cx="285293" cy="285293"/>
+            <a:off x="576072" y="1609344"/>
+            <a:ext cx="7260336" cy="4270786"/>
           </a:xfrm>
           <a:prstGeom prst="rect">
             <a:avLst/>
           </a:prstGeom>
         </p:spPr>
       </p:pic>
-      <p:sp>
-        <p:nvSpPr>
-          <p:cNvPr id="7" name="Text 4"/>
-          <p:cNvSpPr txBox="1"/>
-          <p:nvPr/>
-        </p:nvSpPr>
-        <p:spPr>
-          <a:xfrm>
-            <a:off x="777240" y="2697480"/>
-            <a:ext cx="2057400" cy="365760"/>
-          </a:xfrm>
-          <a:prstGeom prst="rect">
-            <a:avLst/>
-          </a:prstGeom>
-          <a:noFill/>
-          <a:ln/>
-        </p:spPr>
-        <p:txBody>
-          <a:bodyPr wrap="square" lIns="0" tIns="0" rIns="0" bIns="0" rtlCol="0" anchor="ctr"/>
-          <a:lstStyle/>
-          <a:p>
-            <a:pPr indent="0" marL="0">
-              <a:buNone/>
-            </a:pPr>
-            <a:r>
-              <a:rPr lang="en-US" sz="1500" b="1" dirty="0">
-                <a:solidFill>
-                  <a:srgbClr val="1C1B3A"/>
-                </a:solidFill>
-              </a:rPr>
-              <a:t>Your research record</a:t>
-            </a:r>
-            <a:endParaRPr lang="en-US" sz="1500" dirty="0"/>
-          </a:p>
-        </p:txBody>
-      </p:sp>
       <p:sp>
         <p:nvSpPr>
           <p:cNvPr id="8" name="Text 5"/>
@@ -8162,8 +7967,8 @@
         </p:nvSpPr>
         <p:spPr>
           <a:xfrm>
-            <a:off x="777240" y="3090672"/>
-            <a:ext cx="2057400" cy="777240"/>
+            <a:off x="8229600" y="1417320"/>
+            <a:ext cx="3429000" cy="822960"/>
           </a:xfrm>
           <a:prstGeom prst="rect">
             <a:avLst/>
@@ -8179,542 +7984,26 @@
               <a:buNone/>
             </a:pPr>
             <a:r>
-              <a:rPr lang="en-US" sz="1250" dirty="0">
-                <a:solidFill>
-                  <a:srgbClr val="22213A"/>
-                </a:solidFill>
-              </a:rPr>
-              <a:t>Only what the task needs: a title and abstract, or aggregated dashboard metrics</a:t>
-            </a:r>
-            <a:endParaRPr lang="en-US" sz="1250" dirty="0"/>
-          </a:p>
-        </p:txBody>
-      </p:sp>
-      <p:pic>
-        <p:nvPicPr>
-          <p:cNvPr id="9" name="Image 1" descr="preencoded.png">    </p:cNvPr>
-          <p:cNvPicPr>
-            <a:picLocks noChangeAspect="1"/>
-          </p:cNvPicPr>
-          <p:nvPr/>
-        </p:nvPicPr>
-        <p:blipFill>
-          <a:blip r:embed="rId2"/>
-          <a:stretch>
-            <a:fillRect/>
-          </a:stretch>
-        </p:blipFill>
-        <p:spPr>
-          <a:xfrm>
-            <a:off x="3127248" y="2697480"/>
-            <a:ext cx="210312" cy="274320"/>
-          </a:xfrm>
-          <a:prstGeom prst="rect">
-            <a:avLst/>
-          </a:prstGeom>
-        </p:spPr>
-      </p:pic>
-      <p:sp>
-        <p:nvSpPr>
-          <p:cNvPr id="10" name="Flow 2"/>
+              <a:rPr lang="en-US" sz="1600" b="1" dirty="0">
+                <a:solidFill>
+                  <a:srgbClr val="7E5BB5"/>
+                </a:solidFill>
+              </a:rPr>
+              <a:t>Portfolio-level views that answer board and funder questions.</a:t>
+            </a:r>
+            <a:endParaRPr lang="en-US" sz="1600" dirty="0"/>
+          </a:p>
+        </p:txBody>
+      </p:sp>
+      <p:sp>
+        <p:nvSpPr>
+          <p:cNvPr id="9" name="Shape 6"/>
           <p:cNvSpPr/>
           <p:nvPr/>
         </p:nvSpPr>
         <p:spPr>
           <a:xfrm>
-            <a:off x="3401568" y="1783080"/>
-            <a:ext cx="2514600" cy="2148840"/>
-          </a:xfrm>
-          <a:prstGeom prst="roundRect">
-            <a:avLst>
-              <a:gd name="adj" fmla="val 4255"/>
-            </a:avLst>
-          </a:prstGeom>
-          <a:solidFill>
-            <a:srgbClr val="1C1B3A"/>
-          </a:solidFill>
-          <a:ln w="9525">
-            <a:solidFill>
-              <a:srgbClr val="1C1B3A"/>
-            </a:solidFill>
-            <a:prstDash val="solid"/>
-          </a:ln>
-        </p:spPr>
-      </p:sp>
-      <p:sp>
-        <p:nvSpPr>
-          <p:cNvPr id="11" name="Shape 7"/>
-          <p:cNvSpPr/>
-          <p:nvPr/>
-        </p:nvSpPr>
-        <p:spPr>
-          <a:xfrm>
-            <a:off x="3630168" y="2011680"/>
-            <a:ext cx="548640" cy="548640"/>
-          </a:xfrm>
-          <a:prstGeom prst="ellipse">
-            <a:avLst/>
-          </a:prstGeom>
-          <a:solidFill>
-            <a:srgbClr val="2A9DC0"/>
-          </a:solidFill>
-          <a:ln w="12700">
-            <a:solidFill>
-              <a:srgbClr val="2A9DC0"/>
-            </a:solidFill>
-            <a:prstDash val="solid"/>
-          </a:ln>
-        </p:spPr>
-      </p:sp>
-      <p:pic>
-        <p:nvPicPr>
-          <p:cNvPr id="12" name="Image 2" descr="preencoded.png">    </p:cNvPr>
-          <p:cNvPicPr>
-            <a:picLocks noChangeAspect="1"/>
-          </p:cNvPicPr>
-          <p:nvPr/>
-        </p:nvPicPr>
-        <p:blipFill>
-          <a:blip r:embed="rId3"/>
-          <a:stretch>
-            <a:fillRect/>
-          </a:stretch>
-        </p:blipFill>
-        <p:spPr>
-          <a:xfrm>
-            <a:off x="3761842" y="2143354"/>
-            <a:ext cx="285293" cy="285293"/>
-          </a:xfrm>
-          <a:prstGeom prst="rect">
-            <a:avLst/>
-          </a:prstGeom>
-        </p:spPr>
-      </p:pic>
-      <p:sp>
-        <p:nvSpPr>
-          <p:cNvPr id="13" name="Text 8"/>
-          <p:cNvSpPr txBox="1"/>
-          <p:nvPr/>
-        </p:nvSpPr>
-        <p:spPr>
-          <a:xfrm>
-            <a:off x="3630168" y="2697480"/>
-            <a:ext cx="2057400" cy="365760"/>
-          </a:xfrm>
-          <a:prstGeom prst="rect">
-            <a:avLst/>
-          </a:prstGeom>
-          <a:noFill/>
-          <a:ln/>
-        </p:spPr>
-        <p:txBody>
-          <a:bodyPr wrap="square" lIns="0" tIns="0" rIns="0" bIns="0" rtlCol="0" anchor="ctr"/>
-          <a:lstStyle/>
-          <a:p>
-            <a:pPr indent="0" marL="0">
-              <a:buNone/>
-            </a:pPr>
-            <a:r>
-              <a:rPr lang="en-US" sz="1500" b="1" dirty="0">
-                <a:solidFill>
-                  <a:srgbClr val="FFFFFF"/>
-                </a:solidFill>
-              </a:rPr>
-              <a:t>HospitiumRIS AI layer</a:t>
-            </a:r>
-            <a:endParaRPr lang="en-US" sz="1500" dirty="0"/>
-          </a:p>
-        </p:txBody>
-      </p:sp>
-      <p:sp>
-        <p:nvSpPr>
-          <p:cNvPr id="14" name="Text 9"/>
-          <p:cNvSpPr txBox="1"/>
-          <p:nvPr/>
-        </p:nvSpPr>
-        <p:spPr>
-          <a:xfrm>
-            <a:off x="3630168" y="3090672"/>
-            <a:ext cx="2057400" cy="777240"/>
-          </a:xfrm>
-          <a:prstGeom prst="rect">
-            <a:avLst/>
-          </a:prstGeom>
-          <a:noFill/>
-          <a:ln/>
-        </p:spPr>
-        <p:txBody>
-          <a:bodyPr wrap="square" lIns="0" tIns="0" rIns="0" bIns="0" rtlCol="0" anchor="t"/>
-          <a:lstStyle/>
-          <a:p>
-            <a:pPr indent="0" marL="0">
-              <a:buNone/>
-            </a:pPr>
-            <a:r>
-              <a:rPr lang="en-US" sz="1250" dirty="0">
-                <a:solidFill>
-                  <a:srgbClr val="E4E1F3"/>
-                </a:solidFill>
-              </a:rPr>
-              <a:t>Purpose-built prompts, structured output, model choice per institution</a:t>
-            </a:r>
-            <a:endParaRPr lang="en-US" sz="1250" dirty="0"/>
-          </a:p>
-        </p:txBody>
-      </p:sp>
-      <p:pic>
-        <p:nvPicPr>
-          <p:cNvPr id="15" name="Image 3" descr="preencoded.png">    </p:cNvPr>
-          <p:cNvPicPr>
-            <a:picLocks noChangeAspect="1"/>
-          </p:cNvPicPr>
-          <p:nvPr/>
-        </p:nvPicPr>
-        <p:blipFill>
-          <a:blip r:embed="rId4"/>
-          <a:stretch>
-            <a:fillRect/>
-          </a:stretch>
-        </p:blipFill>
-        <p:spPr>
-          <a:xfrm>
-            <a:off x="5980176" y="2697480"/>
-            <a:ext cx="210312" cy="274320"/>
-          </a:xfrm>
-          <a:prstGeom prst="rect">
-            <a:avLst/>
-          </a:prstGeom>
-        </p:spPr>
-      </p:pic>
-      <p:sp>
-        <p:nvSpPr>
-          <p:cNvPr id="16" name="Flow 3"/>
-          <p:cNvSpPr/>
-          <p:nvPr/>
-        </p:nvSpPr>
-        <p:spPr>
-          <a:xfrm>
-            <a:off x="6254496" y="1783080"/>
-            <a:ext cx="2514600" cy="2148840"/>
-          </a:xfrm>
-          <a:prstGeom prst="roundRect">
-            <a:avLst>
-              <a:gd name="adj" fmla="val 4255"/>
-            </a:avLst>
-          </a:prstGeom>
-          <a:solidFill>
-            <a:srgbClr val="F6F4FB"/>
-          </a:solidFill>
-          <a:ln w="9525">
-            <a:solidFill>
-              <a:srgbClr val="DDD8EC"/>
-            </a:solidFill>
-            <a:prstDash val="solid"/>
-          </a:ln>
-        </p:spPr>
-      </p:sp>
-      <p:sp>
-        <p:nvSpPr>
-          <p:cNvPr id="17" name="Shape 11"/>
-          <p:cNvSpPr/>
-          <p:nvPr/>
-        </p:nvSpPr>
-        <p:spPr>
-          <a:xfrm>
-            <a:off x="6483096" y="2011680"/>
-            <a:ext cx="548640" cy="548640"/>
-          </a:xfrm>
-          <a:prstGeom prst="ellipse">
-            <a:avLst/>
-          </a:prstGeom>
-          <a:solidFill>
-            <a:srgbClr val="7E5BB5"/>
-          </a:solidFill>
-          <a:ln w="12700">
-            <a:solidFill>
-              <a:srgbClr val="7E5BB5"/>
-            </a:solidFill>
-            <a:prstDash val="solid"/>
-          </a:ln>
-        </p:spPr>
-      </p:sp>
-      <p:pic>
-        <p:nvPicPr>
-          <p:cNvPr id="18" name="Image 4" descr="preencoded.png">    </p:cNvPr>
-          <p:cNvPicPr>
-            <a:picLocks noChangeAspect="1"/>
-          </p:cNvPicPr>
-          <p:nvPr/>
-        </p:nvPicPr>
-        <p:blipFill>
-          <a:blip r:embed="rId5"/>
-          <a:stretch>
-            <a:fillRect/>
-          </a:stretch>
-        </p:blipFill>
-        <p:spPr>
-          <a:xfrm>
-            <a:off x="6614770" y="2143354"/>
-            <a:ext cx="285293" cy="285293"/>
-          </a:xfrm>
-          <a:prstGeom prst="rect">
-            <a:avLst/>
-          </a:prstGeom>
-        </p:spPr>
-      </p:pic>
-      <p:sp>
-        <p:nvSpPr>
-          <p:cNvPr id="19" name="Text 12"/>
-          <p:cNvSpPr txBox="1"/>
-          <p:nvPr/>
-        </p:nvSpPr>
-        <p:spPr>
-          <a:xfrm>
-            <a:off x="6483096" y="2697480"/>
-            <a:ext cx="2057400" cy="365760"/>
-          </a:xfrm>
-          <a:prstGeom prst="rect">
-            <a:avLst/>
-          </a:prstGeom>
-          <a:noFill/>
-          <a:ln/>
-        </p:spPr>
-        <p:txBody>
-          <a:bodyPr wrap="square" lIns="0" tIns="0" rIns="0" bIns="0" rtlCol="0" anchor="ctr"/>
-          <a:lstStyle/>
-          <a:p>
-            <a:pPr indent="0" marL="0">
-              <a:buNone/>
-            </a:pPr>
-            <a:r>
-              <a:rPr lang="en-US" sz="1500" b="1" dirty="0">
-                <a:solidFill>
-                  <a:srgbClr val="1C1B3A"/>
-                </a:solidFill>
-              </a:rPr>
-              <a:t>AI model</a:t>
-            </a:r>
-            <a:endParaRPr lang="en-US" sz="1500" dirty="0"/>
-          </a:p>
-        </p:txBody>
-      </p:sp>
-      <p:sp>
-        <p:nvSpPr>
-          <p:cNvPr id="20" name="Text 13"/>
-          <p:cNvSpPr txBox="1"/>
-          <p:nvPr/>
-        </p:nvSpPr>
-        <p:spPr>
-          <a:xfrm>
-            <a:off x="6483096" y="3090672"/>
-            <a:ext cx="2057400" cy="777240"/>
-          </a:xfrm>
-          <a:prstGeom prst="rect">
-            <a:avLst/>
-          </a:prstGeom>
-          <a:noFill/>
-          <a:ln/>
-        </p:spPr>
-        <p:txBody>
-          <a:bodyPr wrap="square" lIns="0" tIns="0" rIns="0" bIns="0" rtlCol="0" anchor="t"/>
-          <a:lstStyle/>
-          <a:p>
-            <a:pPr indent="0" marL="0">
-              <a:buNone/>
-            </a:pPr>
-            <a:r>
-              <a:rPr lang="en-US" sz="1250" dirty="0">
-                <a:solidFill>
-                  <a:srgbClr val="22213A"/>
-                </a:solidFill>
-              </a:rPr>
-              <a:t>Google Gemini or OpenAI, using the institution's own API keys</a:t>
-            </a:r>
-            <a:endParaRPr lang="en-US" sz="1250" dirty="0"/>
-          </a:p>
-        </p:txBody>
-      </p:sp>
-      <p:pic>
-        <p:nvPicPr>
-          <p:cNvPr id="21" name="Image 5" descr="preencoded.png">    </p:cNvPr>
-          <p:cNvPicPr>
-            <a:picLocks noChangeAspect="1"/>
-          </p:cNvPicPr>
-          <p:nvPr/>
-        </p:nvPicPr>
-        <p:blipFill>
-          <a:blip r:embed="rId6"/>
-          <a:stretch>
-            <a:fillRect/>
-          </a:stretch>
-        </p:blipFill>
-        <p:spPr>
-          <a:xfrm>
-            <a:off x="8833104" y="2697480"/>
-            <a:ext cx="210312" cy="274320"/>
-          </a:xfrm>
-          <a:prstGeom prst="rect">
-            <a:avLst/>
-          </a:prstGeom>
-        </p:spPr>
-      </p:pic>
-      <p:sp>
-        <p:nvSpPr>
-          <p:cNvPr id="22" name="Flow 4"/>
-          <p:cNvSpPr/>
-          <p:nvPr/>
-        </p:nvSpPr>
-        <p:spPr>
-          <a:xfrm>
-            <a:off x="9107424" y="1783080"/>
-            <a:ext cx="2514600" cy="2148840"/>
-          </a:xfrm>
-          <a:prstGeom prst="roundRect">
-            <a:avLst>
-              <a:gd name="adj" fmla="val 4255"/>
-            </a:avLst>
-          </a:prstGeom>
-          <a:solidFill>
-            <a:srgbClr val="F6F4FB"/>
-          </a:solidFill>
-          <a:ln w="9525">
-            <a:solidFill>
-              <a:srgbClr val="DDD8EC"/>
-            </a:solidFill>
-            <a:prstDash val="solid"/>
-          </a:ln>
-        </p:spPr>
-      </p:sp>
-      <p:sp>
-        <p:nvSpPr>
-          <p:cNvPr id="23" name="Shape 15"/>
-          <p:cNvSpPr/>
-          <p:nvPr/>
-        </p:nvSpPr>
-        <p:spPr>
-          <a:xfrm>
-            <a:off x="9336024" y="2011680"/>
-            <a:ext cx="548640" cy="548640"/>
-          </a:xfrm>
-          <a:prstGeom prst="ellipse">
-            <a:avLst/>
-          </a:prstGeom>
-          <a:solidFill>
-            <a:srgbClr val="7E5BB5"/>
-          </a:solidFill>
-          <a:ln w="12700">
-            <a:solidFill>
-              <a:srgbClr val="7E5BB5"/>
-            </a:solidFill>
-            <a:prstDash val="solid"/>
-          </a:ln>
-        </p:spPr>
-      </p:sp>
-      <p:pic>
-        <p:nvPicPr>
-          <p:cNvPr id="24" name="Image 6" descr="preencoded.png">    </p:cNvPr>
-          <p:cNvPicPr>
-            <a:picLocks noChangeAspect="1"/>
-          </p:cNvPicPr>
-          <p:nvPr/>
-        </p:nvPicPr>
-        <p:blipFill>
-          <a:blip r:embed="rId7"/>
-          <a:stretch>
-            <a:fillRect/>
-          </a:stretch>
-        </p:blipFill>
-        <p:spPr>
-          <a:xfrm>
-            <a:off x="9467698" y="2143354"/>
-            <a:ext cx="285293" cy="285293"/>
-          </a:xfrm>
-          <a:prstGeom prst="rect">
-            <a:avLst/>
-          </a:prstGeom>
-        </p:spPr>
-      </p:pic>
-      <p:sp>
-        <p:nvSpPr>
-          <p:cNvPr id="25" name="Text 16"/>
-          <p:cNvSpPr txBox="1"/>
-          <p:nvPr/>
-        </p:nvSpPr>
-        <p:spPr>
-          <a:xfrm>
-            <a:off x="9336024" y="2697480"/>
-            <a:ext cx="2057400" cy="365760"/>
-          </a:xfrm>
-          <a:prstGeom prst="rect">
-            <a:avLst/>
-          </a:prstGeom>
-          <a:noFill/>
-          <a:ln/>
-        </p:spPr>
-        <p:txBody>
-          <a:bodyPr wrap="square" lIns="0" tIns="0" rIns="0" bIns="0" rtlCol="0" anchor="ctr"/>
-          <a:lstStyle/>
-          <a:p>
-            <a:pPr indent="0" marL="0">
-              <a:buNone/>
-            </a:pPr>
-            <a:r>
-              <a:rPr lang="en-US" sz="1500" b="1" dirty="0">
-                <a:solidFill>
-                  <a:srgbClr val="1C1B3A"/>
-                </a:solidFill>
-              </a:rPr>
-              <a:t>People decide</a:t>
-            </a:r>
-            <a:endParaRPr lang="en-US" sz="1500" dirty="0"/>
-          </a:p>
-        </p:txBody>
-      </p:sp>
-      <p:sp>
-        <p:nvSpPr>
-          <p:cNvPr id="26" name="Text 17"/>
-          <p:cNvSpPr txBox="1"/>
-          <p:nvPr/>
-        </p:nvSpPr>
-        <p:spPr>
-          <a:xfrm>
-            <a:off x="9336024" y="3090672"/>
-            <a:ext cx="2057400" cy="777240"/>
-          </a:xfrm>
-          <a:prstGeom prst="rect">
-            <a:avLst/>
-          </a:prstGeom>
-          <a:noFill/>
-          <a:ln/>
-        </p:spPr>
-        <p:txBody>
-          <a:bodyPr wrap="square" lIns="0" tIns="0" rIns="0" bIns="0" rtlCol="0" anchor="t"/>
-          <a:lstStyle/>
-          <a:p>
-            <a:pPr indent="0" marL="0">
-              <a:buNone/>
-            </a:pPr>
-            <a:r>
-              <a:rPr lang="en-US" sz="1250" dirty="0">
-                <a:solidFill>
-                  <a:srgbClr val="22213A"/>
-                </a:solidFill>
-              </a:rPr>
-              <a:t>Output is labelled as AI-generated; reviewers and researchers stay in control</a:t>
-            </a:r>
-            <a:endParaRPr lang="en-US" sz="1250" dirty="0"/>
-          </a:p>
-        </p:txBody>
-      </p:sp>
-      <p:sp>
-        <p:nvSpPr>
-          <p:cNvPr id="27" name="Shape 18"/>
-          <p:cNvSpPr/>
-          <p:nvPr/>
-        </p:nvSpPr>
-        <p:spPr>
-          <a:xfrm>
-            <a:off x="548640" y="4251960"/>
+            <a:off x="8229600" y="2286000"/>
             <a:ext cx="457200" cy="457200"/>
           </a:xfrm>
           <a:prstGeom prst="ellipse">
@@ -8733,21 +8022,21 @@
       </p:sp>
       <p:pic>
         <p:nvPicPr>
-          <p:cNvPr id="28" name="Image 7" descr="preencoded.png">    </p:cNvPr>
+          <p:cNvPr id="10" name="Image 1" descr="preencoded.png">    </p:cNvPr>
           <p:cNvPicPr>
             <a:picLocks noChangeAspect="1"/>
           </p:cNvPicPr>
           <p:nvPr/>
         </p:nvPicPr>
         <p:blipFill>
-          <a:blip r:embed="rId8"/>
+          <a:blip r:embed="rId2"/>
           <a:stretch>
             <a:fillRect/>
           </a:stretch>
         </p:blipFill>
         <p:spPr>
           <a:xfrm>
-            <a:off x="658368" y="4361688"/>
+            <a:off x="8339328" y="2395728"/>
             <a:ext cx="237744" cy="237744"/>
           </a:xfrm>
           <a:prstGeom prst="rect">
@@ -8757,14 +8046,14 @@
       </p:pic>
       <p:sp>
         <p:nvSpPr>
-          <p:cNvPr id="29" name="Text 19"/>
+          <p:cNvPr id="11" name="Text 7"/>
           <p:cNvSpPr txBox="1"/>
           <p:nvPr/>
         </p:nvSpPr>
         <p:spPr>
           <a:xfrm>
-            <a:off x="1143000" y="4224528"/>
-            <a:ext cx="4846320" cy="301752"/>
+            <a:off x="8823960" y="2267712"/>
+            <a:ext cx="2834640" cy="320040"/>
           </a:xfrm>
           <a:prstGeom prst="rect">
             <a:avLst/>
@@ -8785,7 +8074,7 @@
                   <a:schemeClr val="tx2"/>
                 </a:solidFill>
               </a:rPr>
-              <a:t>No patient records sent</a:t>
+              <a:t>Trial intelligence</a:t>
             </a:r>
             <a:endParaRPr lang="en-US" sz="1500" dirty="0"/>
           </a:p>
@@ -8793,14 +8082,14 @@
       </p:sp>
       <p:sp>
         <p:nvSpPr>
-          <p:cNvPr id="30" name="Text 20"/>
+          <p:cNvPr id="12" name="Text 8"/>
           <p:cNvSpPr txBox="1"/>
           <p:nvPr/>
         </p:nvSpPr>
         <p:spPr>
           <a:xfrm>
-            <a:off x="1143000" y="4526280"/>
-            <a:ext cx="4846320" cy="457200"/>
+            <a:off x="8823960" y="2587752"/>
+            <a:ext cx="2834640" cy="640080"/>
           </a:xfrm>
           <a:prstGeom prst="rect">
             <a:avLst/>
@@ -8821,7 +8110,7 @@
                   <a:schemeClr val="tx1"/>
                 </a:solidFill>
               </a:rPr>
-              <a:t>AI features work on publication text and summary statistics, not clinical data.</a:t>
+              <a:t>Enrolment against target, trials by phase and success rate.</a:t>
             </a:r>
             <a:endParaRPr lang="en-US" sz="1300" dirty="0"/>
           </a:p>
@@ -8829,13 +8118,13 @@
       </p:sp>
       <p:sp>
         <p:nvSpPr>
-          <p:cNvPr id="31" name="Shape 21"/>
+          <p:cNvPr id="13" name="Shape 9"/>
           <p:cNvSpPr/>
           <p:nvPr/>
         </p:nvSpPr>
         <p:spPr>
           <a:xfrm>
-            <a:off x="6172200" y="4251960"/>
+            <a:off x="8229600" y="3273552"/>
             <a:ext cx="457200" cy="457200"/>
           </a:xfrm>
           <a:prstGeom prst="ellipse">
@@ -8854,21 +8143,21 @@
       </p:sp>
       <p:pic>
         <p:nvPicPr>
-          <p:cNvPr id="32" name="Image 8" descr="preencoded.png">    </p:cNvPr>
+          <p:cNvPr id="14" name="Image 2" descr="preencoded.png">    </p:cNvPr>
           <p:cNvPicPr>
             <a:picLocks noChangeAspect="1"/>
           </p:cNvPicPr>
           <p:nvPr/>
         </p:nvPicPr>
         <p:blipFill>
-          <a:blip r:embed="rId9"/>
+          <a:blip r:embed="rId3"/>
           <a:stretch>
             <a:fillRect/>
           </a:stretch>
         </p:blipFill>
         <p:spPr>
           <a:xfrm>
-            <a:off x="6281928" y="4361688"/>
+            <a:off x="8339328" y="3383280"/>
             <a:ext cx="237744" cy="237744"/>
           </a:xfrm>
           <a:prstGeom prst="rect">
@@ -8878,14 +8167,14 @@
       </p:pic>
       <p:sp>
         <p:nvSpPr>
-          <p:cNvPr id="33" name="Text 22"/>
+          <p:cNvPr id="15" name="Text 10"/>
           <p:cNvSpPr txBox="1"/>
           <p:nvPr/>
         </p:nvSpPr>
         <p:spPr>
           <a:xfrm>
-            <a:off x="6766560" y="4224528"/>
-            <a:ext cx="4846320" cy="301752"/>
+            <a:off x="8823960" y="3255264"/>
+            <a:ext cx="2834640" cy="320040"/>
           </a:xfrm>
           <a:prstGeom prst="rect">
             <a:avLst/>
@@ -8906,7 +8195,7 @@
                   <a:schemeClr val="tx2"/>
                 </a:solidFill>
               </a:rPr>
-              <a:t>Institution in control</a:t>
+              <a:t>Trial-to-publication rate</a:t>
             </a:r>
             <a:endParaRPr lang="en-US" sz="1500" dirty="0"/>
           </a:p>
@@ -8914,14 +8203,14 @@
       </p:sp>
       <p:sp>
         <p:nvSpPr>
-          <p:cNvPr id="34" name="Text 23"/>
+          <p:cNvPr id="16" name="Text 11"/>
           <p:cNvSpPr txBox="1"/>
           <p:nvPr/>
         </p:nvSpPr>
         <p:spPr>
           <a:xfrm>
-            <a:off x="6766560" y="4526280"/>
-            <a:ext cx="4846320" cy="457200"/>
+            <a:off x="8823960" y="3575304"/>
+            <a:ext cx="2834640" cy="640080"/>
           </a:xfrm>
           <a:prstGeom prst="rect">
             <a:avLst/>
@@ -8942,7 +8231,7 @@
                   <a:schemeClr val="tx1"/>
                 </a:solidFill>
               </a:rPr>
-              <a:t>Bring your own keys, choose the provider, or switch AI off entirely.</a:t>
+              <a:t>See which studies turn into published evidence.</a:t>
             </a:r>
             <a:endParaRPr lang="en-US" sz="1300" dirty="0"/>
           </a:p>
@@ -8950,13 +8239,13 @@
       </p:sp>
       <p:sp>
         <p:nvSpPr>
-          <p:cNvPr id="35" name="Shape 24"/>
+          <p:cNvPr id="17" name="Shape 12"/>
           <p:cNvSpPr/>
           <p:nvPr/>
         </p:nvSpPr>
         <p:spPr>
           <a:xfrm>
-            <a:off x="548640" y="5166360"/>
+            <a:off x="8229600" y="4261104"/>
             <a:ext cx="457200" cy="457200"/>
           </a:xfrm>
           <a:prstGeom prst="ellipse">
@@ -8975,21 +8264,21 @@
       </p:sp>
       <p:pic>
         <p:nvPicPr>
-          <p:cNvPr id="36" name="Image 9" descr="preencoded.png">    </p:cNvPr>
+          <p:cNvPr id="18" name="Image 3" descr="preencoded.png">    </p:cNvPr>
           <p:cNvPicPr>
             <a:picLocks noChangeAspect="1"/>
           </p:cNvPicPr>
           <p:nvPr/>
         </p:nvPicPr>
         <p:blipFill>
-          <a:blip r:embed="rId10"/>
+          <a:blip r:embed="rId4"/>
           <a:stretch>
             <a:fillRect/>
           </a:stretch>
         </p:blipFill>
         <p:spPr>
           <a:xfrm>
-            <a:off x="658368" y="5276088"/>
+            <a:off x="8339328" y="4370832"/>
             <a:ext cx="237744" cy="237744"/>
           </a:xfrm>
           <a:prstGeom prst="rect">
@@ -8999,14 +8288,14 @@
       </p:pic>
       <p:sp>
         <p:nvSpPr>
-          <p:cNvPr id="37" name="Text 25"/>
+          <p:cNvPr id="19" name="Text 13"/>
           <p:cNvSpPr txBox="1"/>
           <p:nvPr/>
         </p:nvSpPr>
         <p:spPr>
           <a:xfrm>
-            <a:off x="1143000" y="5138928"/>
-            <a:ext cx="4846320" cy="301752"/>
+            <a:off x="8823960" y="4242816"/>
+            <a:ext cx="2834640" cy="320040"/>
           </a:xfrm>
           <a:prstGeom prst="rect">
             <a:avLst/>
@@ -9027,7 +8316,7 @@
                   <a:schemeClr val="tx2"/>
                 </a:solidFill>
               </a:rPr>
-              <a:t>Graceful fallback</a:t>
+              <a:t>Funding by source</a:t>
             </a:r>
             <a:endParaRPr lang="en-US" sz="1500" dirty="0"/>
           </a:p>
@@ -9035,14 +8324,14 @@
       </p:sp>
       <p:sp>
         <p:nvSpPr>
-          <p:cNvPr id="38" name="Text 26"/>
+          <p:cNvPr id="20" name="Text 14"/>
           <p:cNvSpPr txBox="1"/>
           <p:nvPr/>
         </p:nvSpPr>
         <p:spPr>
           <a:xfrm>
-            <a:off x="1143000" y="5440680"/>
-            <a:ext cx="4846320" cy="457200"/>
+            <a:off x="8823960" y="4562856"/>
+            <a:ext cx="2834640" cy="640080"/>
           </a:xfrm>
           <a:prstGeom prst="rect">
             <a:avLst/>
@@ -9063,7 +8352,7 @@
                   <a:schemeClr val="tx1"/>
                 </a:solidFill>
               </a:rPr>
-              <a:t>Rule-based insights take over if a model is unavailable.</a:t>
+              <a:t>Track where research money comes from and what it delivers.</a:t>
             </a:r>
             <a:endParaRPr lang="en-US" sz="1300" dirty="0"/>
           </a:p>
@@ -9071,13 +8360,13 @@
       </p:sp>
       <p:sp>
         <p:nvSpPr>
-          <p:cNvPr id="39" name="Shape 27"/>
+          <p:cNvPr id="21" name="Shape 15"/>
           <p:cNvSpPr/>
           <p:nvPr/>
         </p:nvSpPr>
         <p:spPr>
           <a:xfrm>
-            <a:off x="6172200" y="5166360"/>
+            <a:off x="8229600" y="5248656"/>
             <a:ext cx="457200" cy="457200"/>
           </a:xfrm>
           <a:prstGeom prst="ellipse">
@@ -9096,21 +8385,21 @@
       </p:sp>
       <p:pic>
         <p:nvPicPr>
-          <p:cNvPr id="40" name="Image 10" descr="preencoded.png">    </p:cNvPr>
+          <p:cNvPr id="22" name="Image 4" descr="preencoded.png">    </p:cNvPr>
           <p:cNvPicPr>
             <a:picLocks noChangeAspect="1"/>
           </p:cNvPicPr>
           <p:nvPr/>
         </p:nvPicPr>
         <p:blipFill>
-          <a:blip r:embed="rId11"/>
+          <a:blip r:embed="rId5"/>
           <a:stretch>
             <a:fillRect/>
           </a:stretch>
         </p:blipFill>
         <p:spPr>
           <a:xfrm>
-            <a:off x="6281928" y="5276088"/>
+            <a:off x="8339328" y="5358384"/>
             <a:ext cx="237744" cy="237744"/>
           </a:xfrm>
           <a:prstGeom prst="rect">
@@ -9120,14 +8409,14 @@
       </p:pic>
       <p:sp>
         <p:nvSpPr>
-          <p:cNvPr id="41" name="Text 28"/>
+          <p:cNvPr id="23" name="Text 16"/>
           <p:cNvSpPr txBox="1"/>
           <p:nvPr/>
         </p:nvSpPr>
         <p:spPr>
           <a:xfrm>
-            <a:off x="6766560" y="5138928"/>
-            <a:ext cx="4846320" cy="301752"/>
+            <a:off x="8823960" y="5230368"/>
+            <a:ext cx="2834640" cy="320040"/>
           </a:xfrm>
           <a:prstGeom prst="rect">
             <a:avLst/>
@@ -9148,7 +8437,7 @@
                   <a:schemeClr val="tx2"/>
                 </a:solidFill>
               </a:rPr>
-              <a:t>Transparent by default</a:t>
+              <a:t>Exportable reports</a:t>
             </a:r>
             <a:endParaRPr lang="en-US" sz="1500" dirty="0"/>
           </a:p>
@@ -9156,14 +8445,14 @@
       </p:sp>
       <p:sp>
         <p:nvSpPr>
-          <p:cNvPr id="42" name="Text 29"/>
+          <p:cNvPr id="24" name="Text 17"/>
           <p:cNvSpPr txBox="1"/>
           <p:nvPr/>
         </p:nvSpPr>
         <p:spPr>
           <a:xfrm>
-            <a:off x="6766560" y="5440680"/>
-            <a:ext cx="4846320" cy="457200"/>
+            <a:off x="8823960" y="5550408"/>
+            <a:ext cx="2834640" cy="640080"/>
           </a:xfrm>
           <a:prstGeom prst="rect">
             <a:avLst/>
@@ -9184,7 +8473,7 @@
                   <a:schemeClr val="tx1"/>
                 </a:solidFill>
               </a:rPr>
-              <a:t>Every AI output is marked, and nothing is changed without a person acting.</a:t>
+              <a:t>Board-ready exports over any time range.</a:t>
             </a:r>
             <a:endParaRPr lang="en-US" sz="1300" dirty="0"/>
           </a:p>
@@ -9292,7 +8581,7 @@
                   <a:schemeClr val="tx2"/>
                 </a:solidFill>
               </a:rPr>
-              <a:t>AI roadmap: from insight to assistance</a:t>
+              <a:t>Connected, secure and ready for your IT team</a:t>
             </a:r>
             <a:endParaRPr lang="en-US" sz="3200" dirty="0"/>
           </a:p>
@@ -9300,58 +8589,22 @@
       </p:sp>
       <p:sp>
         <p:nvSpPr>
-          <p:cNvPr id="3" name="Text 1"/>
-          <p:cNvSpPr txBox="1"/>
-          <p:nvPr/>
-        </p:nvSpPr>
-        <p:spPr>
-          <a:xfrm>
-            <a:off x="548640" y="1143000"/>
-            <a:ext cx="11064240" cy="457200"/>
-          </a:xfrm>
-          <a:prstGeom prst="rect">
-            <a:avLst/>
-          </a:prstGeom>
-          <a:noFill/>
-          <a:ln/>
-        </p:spPr>
-        <p:txBody>
-          <a:bodyPr wrap="square" lIns="0" tIns="0" rIns="0" bIns="0" rtlCol="0" anchor="ctr"/>
-          <a:lstStyle/>
-          <a:p>
-            <a:pPr indent="0" marL="0">
-              <a:buNone/>
-            </a:pPr>
-            <a:r>
-              <a:rPr lang="en-US" sz="1600" dirty="0">
-                <a:solidFill>
-                  <a:schemeClr val="tx1"/>
-                </a:solidFill>
-              </a:rPr>
-              <a:t>Planned capabilities that build on the same research record. Pilot institutions help shape priorities.</a:t>
-            </a:r>
-            <a:endParaRPr lang="en-US" sz="1600" dirty="0"/>
-          </a:p>
-        </p:txBody>
-      </p:sp>
-      <p:sp>
-        <p:nvSpPr>
-          <p:cNvPr id="4" name="Roadmap LIVE TODAY"/>
+          <p:cNvPr id="3" name="Column Integrations"/>
           <p:cNvSpPr/>
           <p:nvPr/>
         </p:nvSpPr>
         <p:spPr>
           <a:xfrm>
-            <a:off x="548640" y="1737360"/>
-            <a:ext cx="3566160" cy="3429000"/>
+            <a:off x="548640" y="1463040"/>
+            <a:ext cx="3566160" cy="4023360"/>
           </a:xfrm>
           <a:prstGeom prst="roundRect">
             <a:avLst>
-              <a:gd name="adj" fmla="val 2667"/>
+              <a:gd name="adj" fmla="val 2564"/>
             </a:avLst>
           </a:prstGeom>
           <a:solidFill>
-            <a:srgbClr val="EFEAF8"/>
+            <a:srgbClr val="F6F4FB"/>
           </a:solidFill>
           <a:ln w="9525">
             <a:solidFill>
@@ -9363,19 +8616,17 @@
       </p:sp>
       <p:sp>
         <p:nvSpPr>
-          <p:cNvPr id="5" name="Shape 3"/>
+          <p:cNvPr id="4" name="Shape 2"/>
           <p:cNvSpPr/>
           <p:nvPr/>
         </p:nvSpPr>
         <p:spPr>
           <a:xfrm>
-            <a:off x="777240" y="1965960"/>
-            <a:ext cx="1463040" cy="384048"/>
-          </a:xfrm>
-          <a:prstGeom prst="roundRect">
-            <a:avLst>
-              <a:gd name="adj" fmla="val 50000"/>
-            </a:avLst>
+            <a:off x="822960" y="1691640"/>
+            <a:ext cx="685800" cy="685800"/>
+          </a:xfrm>
+          <a:prstGeom prst="ellipse">
+            <a:avLst/>
           </a:prstGeom>
           <a:solidFill>
             <a:srgbClr val="7E5BB5"/>
@@ -9388,16 +8639,40 @@
           </a:ln>
         </p:spPr>
       </p:sp>
-      <p:sp>
-        <p:nvSpPr>
-          <p:cNvPr id="6" name="Text 4"/>
+      <p:pic>
+        <p:nvPicPr>
+          <p:cNvPr id="5" name="Image 0" descr="preencoded.png">    </p:cNvPr>
+          <p:cNvPicPr>
+            <a:picLocks noChangeAspect="1"/>
+          </p:cNvPicPr>
+          <p:nvPr/>
+        </p:nvPicPr>
+        <p:blipFill>
+          <a:blip r:embed="rId1"/>
+          <a:stretch>
+            <a:fillRect/>
+          </a:stretch>
+        </p:blipFill>
+        <p:spPr>
+          <a:xfrm>
+            <a:off x="987552" y="1856232"/>
+            <a:ext cx="356616" cy="356616"/>
+          </a:xfrm>
+          <a:prstGeom prst="rect">
+            <a:avLst/>
+          </a:prstGeom>
+        </p:spPr>
+      </p:pic>
+      <p:sp>
+        <p:nvSpPr>
+          <p:cNvPr id="6" name="Text 3"/>
           <p:cNvSpPr txBox="1"/>
           <p:nvPr/>
         </p:nvSpPr>
         <p:spPr>
           <a:xfrm>
-            <a:off x="777240" y="1965960"/>
-            <a:ext cx="1463040" cy="384048"/>
+            <a:off x="1645920" y="1783080"/>
+            <a:ext cx="2286000" cy="457200"/>
           </a:xfrm>
           <a:prstGeom prst="rect">
             <a:avLst/>
@@ -9409,31 +8684,31 @@
           <a:bodyPr wrap="square" lIns="0" tIns="0" rIns="0" bIns="0" rtlCol="0" anchor="ctr"/>
           <a:lstStyle/>
           <a:p>
-            <a:pPr algn="ctr" indent="0" marL="0">
-              <a:buNone/>
-            </a:pPr>
-            <a:r>
-              <a:rPr lang="en-US" sz="1200" b="1" spc="100" kern="0" dirty="0">
-                <a:solidFill>
-                  <a:srgbClr val="FFFFFF"/>
-                </a:solidFill>
-              </a:rPr>
-              <a:t>LIVE TODAY</a:t>
-            </a:r>
-            <a:endParaRPr lang="en-US" sz="1200" dirty="0"/>
-          </a:p>
-        </p:txBody>
-      </p:sp>
-      <p:sp>
-        <p:nvSpPr>
-          <p:cNvPr id="7" name="Text 5"/>
+            <a:pPr indent="0" marL="0">
+              <a:buNone/>
+            </a:pPr>
+            <a:r>
+              <a:rPr lang="en-US" sz="1800" b="1" dirty="0">
+                <a:solidFill>
+                  <a:schemeClr val="tx2"/>
+                </a:solidFill>
+              </a:rPr>
+              <a:t>Integrations</a:t>
+            </a:r>
+            <a:endParaRPr lang="en-US" sz="1800" dirty="0"/>
+          </a:p>
+        </p:txBody>
+      </p:sp>
+      <p:sp>
+        <p:nvSpPr>
+          <p:cNvPr id="7" name="Text 4"/>
           <p:cNvSpPr txBox="1"/>
           <p:nvPr/>
         </p:nvSpPr>
         <p:spPr>
           <a:xfrm>
-            <a:off x="777240" y="2606040"/>
-            <a:ext cx="3108960" cy="2468880"/>
+            <a:off x="822960" y="2606040"/>
+            <a:ext cx="3063240" cy="3200400"/>
           </a:xfrm>
           <a:prstGeom prst="rect">
             <a:avLst/>
@@ -9447,7 +8722,7 @@
           <a:p>
             <a:pPr marL="342900" indent="-342900">
               <a:spcAft>
-                <a:spcPts val="1000"/>
+                <a:spcPts val="800"/>
               </a:spcAft>
               <a:buSzPct val="100000"/>
               <a:buChar char="•"/>
@@ -9458,14 +8733,14 @@
                   <a:schemeClr val="tx1"/>
                 </a:solidFill>
               </a:rPr>
-              <a:t>Publication summaries and keywords</a:t>
+              <a:t>ORCID sign-in and profiles</a:t>
             </a:r>
             <a:endParaRPr lang="en-US" sz="1400" dirty="0"/>
           </a:p>
           <a:p>
             <a:pPr marL="342900" indent="-342900">
               <a:spcAft>
-                <a:spcPts val="1000"/>
+                <a:spcPts val="800"/>
               </a:spcAft>
               <a:buSzPct val="100000"/>
               <a:buChar char="•"/>
@@ -9476,14 +8751,14 @@
                   <a:schemeClr val="tx1"/>
                 </a:solidFill>
               </a:rPr>
-              <a:t>Impact, compliance and project insights</a:t>
+              <a:t>Crossref and DataCite identifiers</a:t>
             </a:r>
             <a:endParaRPr lang="en-US" sz="1400" dirty="0"/>
           </a:p>
           <a:p>
             <a:pPr marL="342900" indent="-342900">
               <a:spcAft>
-                <a:spcPts val="1000"/>
+                <a:spcPts val="800"/>
               </a:spcAft>
               <a:buSzPct val="100000"/>
               <a:buChar char="•"/>
@@ -9494,14 +8769,14 @@
                   <a:schemeClr val="tx1"/>
                 </a:solidFill>
               </a:rPr>
-              <a:t>Image integrity detection</a:t>
+              <a:t>PubMed, OpenAlex, Research4Life</a:t>
             </a:r>
             <a:endParaRPr lang="en-US" sz="1400" dirty="0"/>
           </a:p>
           <a:p>
             <a:pPr marL="342900" indent="-342900">
               <a:spcAft>
-                <a:spcPts val="1000"/>
+                <a:spcPts val="800"/>
               </a:spcAft>
               <a:buSzPct val="100000"/>
               <a:buChar char="•"/>
@@ -9512,26 +8787,80 @@
                   <a:schemeClr val="tx1"/>
                 </a:solidFill>
               </a:rPr>
-              <a:t>Automated pre-review checks</a:t>
+              <a:t>Zotero, Mendeley, EndNote, BibTeX</a:t>
             </a:r>
             <a:endParaRPr lang="en-US" sz="1400" dirty="0"/>
           </a:p>
-        </p:txBody>
-      </p:sp>
-      <p:sp>
-        <p:nvSpPr>
-          <p:cNvPr id="8" name="Roadmap NEXT"/>
+          <a:p>
+            <a:pPr marL="342900" indent="-342900">
+              <a:spcAft>
+                <a:spcPts val="800"/>
+              </a:spcAft>
+              <a:buSzPct val="100000"/>
+              <a:buChar char="•"/>
+            </a:pPr>
+            <a:r>
+              <a:rPr lang="en-US" sz="1400" dirty="0">
+                <a:solidFill>
+                  <a:schemeClr val="tx1"/>
+                </a:solidFill>
+              </a:rPr>
+              <a:t>ClinicalTrials.gov, PACTR, WHO ICTRP</a:t>
+            </a:r>
+            <a:endParaRPr lang="en-US" sz="1400" dirty="0"/>
+          </a:p>
+          <a:p>
+            <a:pPr marL="342900" indent="-342900">
+              <a:spcAft>
+                <a:spcPts val="800"/>
+              </a:spcAft>
+              <a:buSzPct val="100000"/>
+              <a:buChar char="•"/>
+            </a:pPr>
+            <a:r>
+              <a:rPr lang="en-US" sz="1400" dirty="0">
+                <a:solidFill>
+                  <a:schemeClr val="tx1"/>
+                </a:solidFill>
+              </a:rPr>
+              <a:t>Google Gemini and OpenAI for AI features</a:t>
+            </a:r>
+            <a:endParaRPr lang="en-US" sz="1400" dirty="0"/>
+          </a:p>
+          <a:p>
+            <a:pPr marL="342900" indent="-342900">
+              <a:spcAft>
+                <a:spcPts val="800"/>
+              </a:spcAft>
+              <a:buSzPct val="100000"/>
+              <a:buChar char="•"/>
+            </a:pPr>
+            <a:r>
+              <a:rPr lang="en-US" sz="1400" dirty="0">
+                <a:solidFill>
+                  <a:schemeClr val="tx1"/>
+                </a:solidFill>
+              </a:rPr>
+              <a:t>ImaChek image integrity analysis</a:t>
+            </a:r>
+            <a:endParaRPr lang="en-US" sz="1400" dirty="0"/>
+          </a:p>
+        </p:txBody>
+      </p:sp>
+      <p:sp>
+        <p:nvSpPr>
+          <p:cNvPr id="8" name="Column Security &amp; governance"/>
           <p:cNvSpPr/>
           <p:nvPr/>
         </p:nvSpPr>
         <p:spPr>
           <a:xfrm>
-            <a:off x="4297680" y="1737360"/>
-            <a:ext cx="3566160" cy="3429000"/>
+            <a:off x="4297680" y="1463040"/>
+            <a:ext cx="3566160" cy="4023360"/>
           </a:xfrm>
           <a:prstGeom prst="roundRect">
             <a:avLst>
-              <a:gd name="adj" fmla="val 2667"/>
+              <a:gd name="adj" fmla="val 2564"/>
             </a:avLst>
           </a:prstGeom>
           <a:solidFill>
@@ -9547,19 +8876,17 @@
       </p:sp>
       <p:sp>
         <p:nvSpPr>
-          <p:cNvPr id="9" name="Shape 7"/>
+          <p:cNvPr id="9" name="Shape 6"/>
           <p:cNvSpPr/>
           <p:nvPr/>
         </p:nvSpPr>
         <p:spPr>
           <a:xfrm>
-            <a:off x="4526280" y="1965960"/>
-            <a:ext cx="1463040" cy="384048"/>
-          </a:xfrm>
-          <a:prstGeom prst="roundRect">
-            <a:avLst>
-              <a:gd name="adj" fmla="val 50000"/>
-            </a:avLst>
+            <a:off x="4572000" y="1691640"/>
+            <a:ext cx="685800" cy="685800"/>
+          </a:xfrm>
+          <a:prstGeom prst="ellipse">
+            <a:avLst/>
           </a:prstGeom>
           <a:solidFill>
             <a:srgbClr val="2A9DC0"/>
@@ -9572,16 +8899,40 @@
           </a:ln>
         </p:spPr>
       </p:sp>
-      <p:sp>
-        <p:nvSpPr>
-          <p:cNvPr id="10" name="Text 8"/>
+      <p:pic>
+        <p:nvPicPr>
+          <p:cNvPr id="10" name="Image 1" descr="preencoded.png">    </p:cNvPr>
+          <p:cNvPicPr>
+            <a:picLocks noChangeAspect="1"/>
+          </p:cNvPicPr>
+          <p:nvPr/>
+        </p:nvPicPr>
+        <p:blipFill>
+          <a:blip r:embed="rId2"/>
+          <a:stretch>
+            <a:fillRect/>
+          </a:stretch>
+        </p:blipFill>
+        <p:spPr>
+          <a:xfrm>
+            <a:off x="4736592" y="1856232"/>
+            <a:ext cx="356616" cy="356616"/>
+          </a:xfrm>
+          <a:prstGeom prst="rect">
+            <a:avLst/>
+          </a:prstGeom>
+        </p:spPr>
+      </p:pic>
+      <p:sp>
+        <p:nvSpPr>
+          <p:cNvPr id="11" name="Text 7"/>
           <p:cNvSpPr txBox="1"/>
           <p:nvPr/>
         </p:nvSpPr>
         <p:spPr>
           <a:xfrm>
-            <a:off x="4526280" y="1965960"/>
-            <a:ext cx="1463040" cy="384048"/>
+            <a:off x="5394960" y="1783080"/>
+            <a:ext cx="2286000" cy="457200"/>
           </a:xfrm>
           <a:prstGeom prst="rect">
             <a:avLst/>
@@ -9593,31 +8944,31 @@
           <a:bodyPr wrap="square" lIns="0" tIns="0" rIns="0" bIns="0" rtlCol="0" anchor="ctr"/>
           <a:lstStyle/>
           <a:p>
-            <a:pPr algn="ctr" indent="0" marL="0">
-              <a:buNone/>
-            </a:pPr>
-            <a:r>
-              <a:rPr lang="en-US" sz="1200" b="1" spc="100" kern="0" dirty="0">
-                <a:solidFill>
-                  <a:srgbClr val="FFFFFF"/>
-                </a:solidFill>
-              </a:rPr>
-              <a:t>NEXT</a:t>
-            </a:r>
-            <a:endParaRPr lang="en-US" sz="1200" dirty="0"/>
-          </a:p>
-        </p:txBody>
-      </p:sp>
-      <p:sp>
-        <p:nvSpPr>
-          <p:cNvPr id="11" name="Text 9"/>
+            <a:pPr indent="0" marL="0">
+              <a:buNone/>
+            </a:pPr>
+            <a:r>
+              <a:rPr lang="en-US" sz="1800" b="1" dirty="0">
+                <a:solidFill>
+                  <a:schemeClr val="tx2"/>
+                </a:solidFill>
+              </a:rPr>
+              <a:t>Security &amp; governance</a:t>
+            </a:r>
+            <a:endParaRPr lang="en-US" sz="1800" dirty="0"/>
+          </a:p>
+        </p:txBody>
+      </p:sp>
+      <p:sp>
+        <p:nvSpPr>
+          <p:cNvPr id="12" name="Text 8"/>
           <p:cNvSpPr txBox="1"/>
           <p:nvPr/>
         </p:nvSpPr>
         <p:spPr>
           <a:xfrm>
-            <a:off x="4526280" y="2606040"/>
-            <a:ext cx="3108960" cy="2468880"/>
+            <a:off x="4572000" y="2606040"/>
+            <a:ext cx="3063240" cy="3200400"/>
           </a:xfrm>
           <a:prstGeom prst="rect">
             <a:avLst/>
@@ -9631,7 +8982,7 @@
           <a:p>
             <a:pPr marL="342900" indent="-342900">
               <a:spcAft>
-                <a:spcPts val="1000"/>
+                <a:spcPts val="800"/>
               </a:spcAft>
               <a:buSzPct val="100000"/>
               <a:buChar char="•"/>
@@ -9642,14 +8993,14 @@
                   <a:schemeClr val="tx1"/>
                 </a:solidFill>
               </a:rPr>
-              <a:t>Writing assistant in the manuscript editor</a:t>
+              <a:t>Role-based access for every user type</a:t>
             </a:r>
             <a:endParaRPr lang="en-US" sz="1400" dirty="0"/>
           </a:p>
           <a:p>
             <a:pPr marL="342900" indent="-342900">
               <a:spcAft>
-                <a:spcPts val="1000"/>
+                <a:spcPts val="800"/>
               </a:spcAft>
               <a:buSzPct val="100000"/>
               <a:buChar char="•"/>
@@ -9660,14 +9011,14 @@
                   <a:schemeClr val="tx1"/>
                 </a:solidFill>
               </a:rPr>
-              <a:t>Proposal pre-screening against funder criteria</a:t>
+              <a:t>Institution-verified email domains</a:t>
             </a:r>
             <a:endParaRPr lang="en-US" sz="1400" dirty="0"/>
           </a:p>
           <a:p>
             <a:pPr marL="342900" indent="-342900">
               <a:spcAft>
-                <a:spcPts val="1000"/>
+                <a:spcPts val="800"/>
               </a:spcAft>
               <a:buSzPct val="100000"/>
               <a:buChar char="•"/>
@@ -9678,14 +9029,14 @@
                   <a:schemeClr val="tx1"/>
                 </a:solidFill>
               </a:rPr>
-              <a:t>Reviewer matching by expertise and conflicts</a:t>
+              <a:t>Audit trails and activity logs</a:t>
             </a:r>
             <a:endParaRPr lang="en-US" sz="1400" dirty="0"/>
           </a:p>
           <a:p>
             <a:pPr marL="342900" indent="-342900">
               <a:spcAft>
-                <a:spcPts val="1000"/>
+                <a:spcPts val="800"/>
               </a:spcAft>
               <a:buSzPct val="100000"/>
               <a:buChar char="•"/>
@@ -9696,26 +9047,44 @@
                   <a:schemeClr val="tx1"/>
                 </a:solidFill>
               </a:rPr>
-              <a:t>Grant opportunity matching for researchers</a:t>
+              <a:t>Admin consoles for security, users and data</a:t>
             </a:r>
             <a:endParaRPr lang="en-US" sz="1400" dirty="0"/>
           </a:p>
-        </p:txBody>
-      </p:sp>
-      <p:sp>
-        <p:nvSpPr>
-          <p:cNvPr id="12" name="Roadmap LATER"/>
+          <a:p>
+            <a:pPr marL="342900" indent="-342900">
+              <a:spcAft>
+                <a:spcPts val="800"/>
+              </a:spcAft>
+              <a:buSzPct val="100000"/>
+              <a:buChar char="•"/>
+            </a:pPr>
+            <a:r>
+              <a:rPr lang="en-US" sz="1400" dirty="0">
+                <a:solidFill>
+                  <a:schemeClr val="tx1"/>
+                </a:solidFill>
+              </a:rPr>
+              <a:t>Ethics and data-protection workflows</a:t>
+            </a:r>
+            <a:endParaRPr lang="en-US" sz="1400" dirty="0"/>
+          </a:p>
+        </p:txBody>
+      </p:sp>
+      <p:sp>
+        <p:nvSpPr>
+          <p:cNvPr id="13" name="Column Deployment &amp; access"/>
           <p:cNvSpPr/>
           <p:nvPr/>
         </p:nvSpPr>
         <p:spPr>
           <a:xfrm>
-            <a:off x="8046720" y="1737360"/>
-            <a:ext cx="3566160" cy="3429000"/>
+            <a:off x="8046720" y="1463040"/>
+            <a:ext cx="3566160" cy="4023360"/>
           </a:xfrm>
           <a:prstGeom prst="roundRect">
             <a:avLst>
-              <a:gd name="adj" fmla="val 2667"/>
+              <a:gd name="adj" fmla="val 2564"/>
             </a:avLst>
           </a:prstGeom>
           <a:solidFill>
@@ -9731,231 +9100,47 @@
       </p:sp>
       <p:sp>
         <p:nvSpPr>
-          <p:cNvPr id="13" name="Shape 11"/>
+          <p:cNvPr id="14" name="Shape 10"/>
           <p:cNvSpPr/>
           <p:nvPr/>
         </p:nvSpPr>
         <p:spPr>
           <a:xfrm>
-            <a:off x="8275320" y="1965960"/>
-            <a:ext cx="1463040" cy="384048"/>
-          </a:xfrm>
-          <a:prstGeom prst="roundRect">
-            <a:avLst>
-              <a:gd name="adj" fmla="val 50000"/>
-            </a:avLst>
+            <a:off x="8321040" y="1691640"/>
+            <a:ext cx="685800" cy="685800"/>
+          </a:xfrm>
+          <a:prstGeom prst="ellipse">
+            <a:avLst/>
           </a:prstGeom>
           <a:solidFill>
-            <a:srgbClr val="C2508F"/>
+            <a:srgbClr val="7E5BB5"/>
           </a:solidFill>
           <a:ln w="12700">
             <a:solidFill>
-              <a:srgbClr val="C2508F"/>
+              <a:srgbClr val="7E5BB5"/>
             </a:solidFill>
             <a:prstDash val="solid"/>
           </a:ln>
         </p:spPr>
       </p:sp>
-      <p:sp>
-        <p:nvSpPr>
-          <p:cNvPr id="14" name="Text 12"/>
-          <p:cNvSpPr txBox="1"/>
-          <p:nvPr/>
-        </p:nvSpPr>
-        <p:spPr>
-          <a:xfrm>
-            <a:off x="8275320" y="1965960"/>
-            <a:ext cx="1463040" cy="384048"/>
-          </a:xfrm>
-          <a:prstGeom prst="rect">
-            <a:avLst/>
-          </a:prstGeom>
-          <a:noFill/>
-          <a:ln/>
-        </p:spPr>
-        <p:txBody>
-          <a:bodyPr wrap="square" lIns="0" tIns="0" rIns="0" bIns="0" rtlCol="0" anchor="ctr"/>
-          <a:lstStyle/>
-          <a:p>
-            <a:pPr algn="ctr" indent="0" marL="0">
-              <a:buNone/>
-            </a:pPr>
-            <a:r>
-              <a:rPr lang="en-US" sz="1200" b="1" spc="100" kern="0" dirty="0">
-                <a:solidFill>
-                  <a:srgbClr val="FFFFFF"/>
-                </a:solidFill>
-              </a:rPr>
-              <a:t>LATER</a:t>
-            </a:r>
-            <a:endParaRPr lang="en-US" sz="1200" dirty="0"/>
-          </a:p>
-        </p:txBody>
-      </p:sp>
-      <p:sp>
-        <p:nvSpPr>
-          <p:cNvPr id="15" name="Text 13"/>
-          <p:cNvSpPr txBox="1"/>
-          <p:nvPr/>
-        </p:nvSpPr>
-        <p:spPr>
-          <a:xfrm>
-            <a:off x="8275320" y="2606040"/>
-            <a:ext cx="3108960" cy="2468880"/>
-          </a:xfrm>
-          <a:prstGeom prst="rect">
-            <a:avLst/>
-          </a:prstGeom>
-          <a:noFill/>
-          <a:ln/>
-        </p:spPr>
-        <p:txBody>
-          <a:bodyPr wrap="square" lIns="0" tIns="0" rIns="0" bIns="0" rtlCol="0" anchor="t"/>
-          <a:lstStyle/>
-          <a:p>
-            <a:pPr marL="342900" indent="-342900">
-              <a:spcAft>
-                <a:spcPts val="1000"/>
-              </a:spcAft>
-              <a:buSzPct val="100000"/>
-              <a:buChar char="•"/>
-            </a:pPr>
-            <a:r>
-              <a:rPr lang="en-US" sz="1400" dirty="0">
-                <a:solidFill>
-                  <a:schemeClr val="tx1"/>
-                </a:solidFill>
-              </a:rPr>
-              <a:t>Clinical trial eligibility pre-screening support</a:t>
-            </a:r>
-            <a:endParaRPr lang="en-US" sz="1400" dirty="0"/>
-          </a:p>
-          <a:p>
-            <a:pPr marL="342900" indent="-342900">
-              <a:spcAft>
-                <a:spcPts val="1000"/>
-              </a:spcAft>
-              <a:buSzPct val="100000"/>
-              <a:buChar char="•"/>
-            </a:pPr>
-            <a:r>
-              <a:rPr lang="en-US" sz="1400" dirty="0">
-                <a:solidFill>
-                  <a:schemeClr val="tx1"/>
-                </a:solidFill>
-              </a:rPr>
-              <a:t>Ask-your-data: plain-language questions over institutional research</a:t>
-            </a:r>
-            <a:endParaRPr lang="en-US" sz="1400" dirty="0"/>
-          </a:p>
-          <a:p>
-            <a:pPr marL="342900" indent="-342900">
-              <a:spcAft>
-                <a:spcPts val="1000"/>
-              </a:spcAft>
-              <a:buSzPct val="100000"/>
-              <a:buChar char="•"/>
-            </a:pPr>
-            <a:r>
-              <a:rPr lang="en-US" sz="1400" dirty="0">
-                <a:solidFill>
-                  <a:schemeClr val="tx1"/>
-                </a:solidFill>
-              </a:rPr>
-              <a:t>Automated funder and board report drafts</a:t>
-            </a:r>
-            <a:endParaRPr lang="en-US" sz="1400" dirty="0"/>
-          </a:p>
-          <a:p>
-            <a:pPr marL="342900" indent="-342900">
-              <a:spcAft>
-                <a:spcPts val="1000"/>
-              </a:spcAft>
-              <a:buSzPct val="100000"/>
-              <a:buChar char="•"/>
-            </a:pPr>
-            <a:r>
-              <a:rPr lang="en-US" sz="1400" dirty="0">
-                <a:solidFill>
-                  <a:schemeClr val="tx1"/>
-                </a:solidFill>
-              </a:rPr>
-              <a:t>Research trend and gap detection across departments</a:t>
-            </a:r>
-            <a:endParaRPr lang="en-US" sz="1400" dirty="0"/>
-          </a:p>
-        </p:txBody>
-      </p:sp>
-      <p:sp>
-        <p:nvSpPr>
-          <p:cNvPr id="16" name="Pilot partner callout"/>
-          <p:cNvSpPr/>
-          <p:nvPr/>
-        </p:nvSpPr>
-        <p:spPr>
-          <a:xfrm>
-            <a:off x="548640" y="5394960"/>
-            <a:ext cx="11064240" cy="731520"/>
-          </a:xfrm>
-          <a:prstGeom prst="roundRect">
-            <a:avLst>
-              <a:gd name="adj" fmla="val 12500"/>
-            </a:avLst>
-          </a:prstGeom>
-          <a:solidFill>
-            <a:srgbClr val="1C1B3A"/>
-          </a:solidFill>
-          <a:ln w="12700">
-            <a:solidFill>
-              <a:srgbClr val="1C1B3A"/>
-            </a:solidFill>
-            <a:prstDash val="solid"/>
-          </a:ln>
-        </p:spPr>
-      </p:sp>
-      <p:sp>
-        <p:nvSpPr>
-          <p:cNvPr id="17" name="Shape 15"/>
-          <p:cNvSpPr/>
-          <p:nvPr/>
-        </p:nvSpPr>
-        <p:spPr>
-          <a:xfrm>
-            <a:off x="731520" y="5486400"/>
-            <a:ext cx="548640" cy="548640"/>
-          </a:xfrm>
-          <a:prstGeom prst="ellipse">
-            <a:avLst/>
-          </a:prstGeom>
-          <a:solidFill>
-            <a:srgbClr val="2A9DC0"/>
-          </a:solidFill>
-          <a:ln w="12700">
-            <a:solidFill>
-              <a:srgbClr val="2A9DC0"/>
-            </a:solidFill>
-            <a:prstDash val="solid"/>
-          </a:ln>
-        </p:spPr>
-      </p:sp>
       <p:pic>
         <p:nvPicPr>
-          <p:cNvPr id="18" name="Image 0" descr="preencoded.png">    </p:cNvPr>
+          <p:cNvPr id="15" name="Image 2" descr="preencoded.png">    </p:cNvPr>
           <p:cNvPicPr>
             <a:picLocks noChangeAspect="1"/>
           </p:cNvPicPr>
           <p:nvPr/>
         </p:nvPicPr>
         <p:blipFill>
-          <a:blip r:embed="rId1"/>
+          <a:blip r:embed="rId3"/>
           <a:stretch>
             <a:fillRect/>
           </a:stretch>
         </p:blipFill>
         <p:spPr>
           <a:xfrm>
-            <a:off x="863194" y="5618074"/>
-            <a:ext cx="285293" cy="285293"/>
+            <a:off x="8485632" y="1856232"/>
+            <a:ext cx="356616" cy="356616"/>
           </a:xfrm>
           <a:prstGeom prst="rect">
             <a:avLst/>
@@ -9964,14 +9149,14 @@
       </p:pic>
       <p:sp>
         <p:nvSpPr>
-          <p:cNvPr id="19" name="Text 16"/>
+          <p:cNvPr id="16" name="Text 11"/>
           <p:cNvSpPr txBox="1"/>
           <p:nvPr/>
         </p:nvSpPr>
         <p:spPr>
           <a:xfrm>
-            <a:off x="1463040" y="5394960"/>
-            <a:ext cx="9966960" cy="731520"/>
+            <a:off x="9144000" y="1783080"/>
+            <a:ext cx="2286000" cy="457200"/>
           </a:xfrm>
           <a:prstGeom prst="rect">
             <a:avLst/>
@@ -9987,25 +9172,126 @@
               <a:buNone/>
             </a:pPr>
             <a:r>
-              <a:rPr lang="en-US" sz="1600" b="1" dirty="0">
-                <a:solidFill>
-                  <a:srgbClr val="9FD8EA"/>
-                </a:solidFill>
-              </a:rPr>
-              <a:t>Become a pilot partner: </a:t>
-            </a:r>
-            <a:pPr indent="0" marL="0">
-              <a:buNone/>
-            </a:pPr>
-            <a:r>
-              <a:rPr lang="en-US" sz="1600" dirty="0">
-                <a:solidFill>
-                  <a:srgbClr val="FFFFFF"/>
-                </a:solidFill>
-              </a:rPr>
-              <a:t>help decide which AI capabilities ship next for health research in your region.</a:t>
-            </a:r>
-            <a:endParaRPr lang="en-US" sz="1600" dirty="0"/>
+              <a:rPr lang="en-US" sz="1800" b="1" dirty="0">
+                <a:solidFill>
+                  <a:schemeClr val="tx2"/>
+                </a:solidFill>
+              </a:rPr>
+              <a:t>Deployment &amp; access</a:t>
+            </a:r>
+            <a:endParaRPr lang="en-US" sz="1800" dirty="0"/>
+          </a:p>
+        </p:txBody>
+      </p:sp>
+      <p:sp>
+        <p:nvSpPr>
+          <p:cNvPr id="17" name="Text 12"/>
+          <p:cNvSpPr txBox="1"/>
+          <p:nvPr/>
+        </p:nvSpPr>
+        <p:spPr>
+          <a:xfrm>
+            <a:off x="8321040" y="2606040"/>
+            <a:ext cx="3063240" cy="3200400"/>
+          </a:xfrm>
+          <a:prstGeom prst="rect">
+            <a:avLst/>
+          </a:prstGeom>
+          <a:noFill/>
+          <a:ln/>
+        </p:spPr>
+        <p:txBody>
+          <a:bodyPr wrap="square" lIns="0" tIns="0" rIns="0" bIns="0" rtlCol="0" anchor="t"/>
+          <a:lstStyle/>
+          <a:p>
+            <a:pPr marL="342900" indent="-342900">
+              <a:spcAft>
+                <a:spcPts val="800"/>
+              </a:spcAft>
+              <a:buSzPct val="100000"/>
+              <a:buChar char="•"/>
+            </a:pPr>
+            <a:r>
+              <a:rPr lang="en-US" sz="1400" dirty="0">
+                <a:solidFill>
+                  <a:schemeClr val="tx1"/>
+                </a:solidFill>
+              </a:rPr>
+              <a:t>Hosted, or on your own servers via Docker</a:t>
+            </a:r>
+            <a:endParaRPr lang="en-US" sz="1400" dirty="0"/>
+          </a:p>
+          <a:p>
+            <a:pPr marL="342900" indent="-342900">
+              <a:spcAft>
+                <a:spcPts val="800"/>
+              </a:spcAft>
+              <a:buSzPct val="100000"/>
+              <a:buChar char="•"/>
+            </a:pPr>
+            <a:r>
+              <a:rPr lang="en-US" sz="1400" dirty="0">
+                <a:solidFill>
+                  <a:schemeClr val="tx1"/>
+                </a:solidFill>
+              </a:rPr>
+              <a:t>Multi-institution setup with central admin</a:t>
+            </a:r>
+            <a:endParaRPr lang="en-US" sz="1400" dirty="0"/>
+          </a:p>
+          <a:p>
+            <a:pPr marL="342900" indent="-342900">
+              <a:spcAft>
+                <a:spcPts val="800"/>
+              </a:spcAft>
+              <a:buSzPct val="100000"/>
+              <a:buChar char="•"/>
+            </a:pPr>
+            <a:r>
+              <a:rPr lang="en-US" sz="1400" dirty="0">
+                <a:solidFill>
+                  <a:schemeClr val="tx1"/>
+                </a:solidFill>
+              </a:rPr>
+              <a:t>19 interface languages</a:t>
+            </a:r>
+            <a:endParaRPr lang="en-US" sz="1400" dirty="0"/>
+          </a:p>
+          <a:p>
+            <a:pPr marL="342900" indent="-342900">
+              <a:spcAft>
+                <a:spcPts val="800"/>
+              </a:spcAft>
+              <a:buSzPct val="100000"/>
+              <a:buChar char="•"/>
+            </a:pPr>
+            <a:r>
+              <a:rPr lang="en-US" sz="1400" dirty="0">
+                <a:solidFill>
+                  <a:schemeClr val="tx1"/>
+                </a:solidFill>
+              </a:rPr>
+              <a:t>Light and dark modes, adjustable text size</a:t>
+            </a:r>
+            <a:endParaRPr lang="en-US" sz="1400" dirty="0"/>
+          </a:p>
+          <a:p>
+            <a:pPr marL="342900" indent="-342900">
+              <a:spcAft>
+                <a:spcPts val="800"/>
+              </a:spcAft>
+              <a:buSzPct val="100000"/>
+              <a:buChar char="•"/>
+            </a:pPr>
+            <a:r>
+              <a:rPr lang="en-US" sz="1400" dirty="0">
+                <a:solidFill>
+                  <a:schemeClr val="tx1"/>
+                </a:solidFill>
+              </a:rPr>
+              <a:t>Open, interoperable PID-based design</a:t>
+            </a:r>
+            <a:endParaRPr lang="en-US" sz="1400" dirty="0"/>
           </a:p>
         </p:txBody>
       </p:sp>
@@ -10111,2519 +9397,6 @@
                   <a:schemeClr val="tx2"/>
                 </a:solidFill>
               </a:rPr>
-              <a:t>Institutional intelligence for leadership and funders</a:t>
-            </a:r>
-            <a:endParaRPr lang="en-US" sz="3200" dirty="0"/>
-          </a:p>
-        </p:txBody>
-      </p:sp>
-      <p:sp>
-        <p:nvSpPr>
-          <p:cNvPr id="3" name="Trial intelligence frame"/>
-          <p:cNvSpPr/>
-          <p:nvPr/>
-        </p:nvSpPr>
-        <p:spPr>
-          <a:xfrm>
-            <a:off x="548640" y="1371600"/>
-            <a:ext cx="7315200" cy="4540803"/>
-          </a:xfrm>
-          <a:prstGeom prst="roundRect">
-            <a:avLst>
-              <a:gd name="adj" fmla="val 1611"/>
-            </a:avLst>
-          </a:prstGeom>
-          <a:solidFill>
-            <a:srgbClr val="ECEAF2"/>
-          </a:solidFill>
-          <a:ln w="9525">
-            <a:solidFill>
-              <a:srgbClr val="DDD8EC"/>
-            </a:solidFill>
-            <a:prstDash val="solid"/>
-          </a:ln>
-          <a:effectLst>
-            <a:outerShdw sx="100000" sy="100000" kx="0" ky="0" algn="bl" rotWithShape="0" blurRad="152400" dist="50800" dir="5400000">
-              <a:srgbClr val="000000">
-                <a:alpha val="18000"/>
-              </a:srgbClr>
-            </a:outerShdw>
-          </a:effectLst>
-        </p:spPr>
-      </p:sp>
-      <p:sp>
-        <p:nvSpPr>
-          <p:cNvPr id="4" name="Shape 2"/>
-          <p:cNvSpPr/>
-          <p:nvPr/>
-        </p:nvSpPr>
-        <p:spPr>
-          <a:xfrm>
-            <a:off x="676656" y="1444752"/>
-            <a:ext cx="91440" cy="91440"/>
-          </a:xfrm>
-          <a:prstGeom prst="ellipse">
-            <a:avLst/>
-          </a:prstGeom>
-          <a:solidFill>
-            <a:srgbClr val="E86B6B"/>
-          </a:solidFill>
-          <a:ln w="12700">
-            <a:solidFill>
-              <a:srgbClr val="E86B6B"/>
-            </a:solidFill>
-            <a:prstDash val="solid"/>
-          </a:ln>
-        </p:spPr>
-      </p:sp>
-      <p:sp>
-        <p:nvSpPr>
-          <p:cNvPr id="5" name="Shape 3"/>
-          <p:cNvSpPr/>
-          <p:nvPr/>
-        </p:nvSpPr>
-        <p:spPr>
-          <a:xfrm>
-            <a:off x="822960" y="1444752"/>
-            <a:ext cx="91440" cy="91440"/>
-          </a:xfrm>
-          <a:prstGeom prst="ellipse">
-            <a:avLst/>
-          </a:prstGeom>
-          <a:solidFill>
-            <a:srgbClr val="F2C14E"/>
-          </a:solidFill>
-          <a:ln w="12700">
-            <a:solidFill>
-              <a:srgbClr val="F2C14E"/>
-            </a:solidFill>
-            <a:prstDash val="solid"/>
-          </a:ln>
-        </p:spPr>
-      </p:sp>
-      <p:sp>
-        <p:nvSpPr>
-          <p:cNvPr id="6" name="Shape 4"/>
-          <p:cNvSpPr/>
-          <p:nvPr/>
-        </p:nvSpPr>
-        <p:spPr>
-          <a:xfrm>
-            <a:off x="969264" y="1444752"/>
-            <a:ext cx="91440" cy="91440"/>
-          </a:xfrm>
-          <a:prstGeom prst="ellipse">
-            <a:avLst/>
-          </a:prstGeom>
-          <a:solidFill>
-            <a:srgbClr val="5DBB7A"/>
-          </a:solidFill>
-          <a:ln w="12700">
-            <a:solidFill>
-              <a:srgbClr val="5DBB7A"/>
-            </a:solidFill>
-            <a:prstDash val="solid"/>
-          </a:ln>
-        </p:spPr>
-      </p:sp>
-      <p:pic>
-        <p:nvPicPr>
-          <p:cNvPr id="7" name="Trial intelligence screenshot" descr="/home/claude/deck/img/ai_trialintel.png">    </p:cNvPr>
-          <p:cNvPicPr>
-            <a:picLocks noChangeAspect="1"/>
-          </p:cNvPicPr>
-          <p:nvPr/>
-        </p:nvPicPr>
-        <p:blipFill>
-          <a:blip r:embed="rId1"/>
-          <a:stretch>
-            <a:fillRect/>
-          </a:stretch>
-        </p:blipFill>
-        <p:spPr>
-          <a:xfrm>
-            <a:off x="576072" y="1609344"/>
-            <a:ext cx="7260336" cy="4270786"/>
-          </a:xfrm>
-          <a:prstGeom prst="rect">
-            <a:avLst/>
-          </a:prstGeom>
-        </p:spPr>
-      </p:pic>
-      <p:sp>
-        <p:nvSpPr>
-          <p:cNvPr id="8" name="Text 5"/>
-          <p:cNvSpPr txBox="1"/>
-          <p:nvPr/>
-        </p:nvSpPr>
-        <p:spPr>
-          <a:xfrm>
-            <a:off x="8229600" y="1417320"/>
-            <a:ext cx="3429000" cy="822960"/>
-          </a:xfrm>
-          <a:prstGeom prst="rect">
-            <a:avLst/>
-          </a:prstGeom>
-          <a:noFill/>
-          <a:ln/>
-        </p:spPr>
-        <p:txBody>
-          <a:bodyPr wrap="square" lIns="0" tIns="0" rIns="0" bIns="0" rtlCol="0" anchor="t"/>
-          <a:lstStyle/>
-          <a:p>
-            <a:pPr indent="0" marL="0">
-              <a:buNone/>
-            </a:pPr>
-            <a:r>
-              <a:rPr lang="en-US" sz="1600" b="1" dirty="0">
-                <a:solidFill>
-                  <a:srgbClr val="7E5BB5"/>
-                </a:solidFill>
-              </a:rPr>
-              <a:t>Portfolio-level views that answer board and funder questions.</a:t>
-            </a:r>
-            <a:endParaRPr lang="en-US" sz="1600" dirty="0"/>
-          </a:p>
-        </p:txBody>
-      </p:sp>
-      <p:sp>
-        <p:nvSpPr>
-          <p:cNvPr id="9" name="Shape 6"/>
-          <p:cNvSpPr/>
-          <p:nvPr/>
-        </p:nvSpPr>
-        <p:spPr>
-          <a:xfrm>
-            <a:off x="8229600" y="2286000"/>
-            <a:ext cx="457200" cy="457200"/>
-          </a:xfrm>
-          <a:prstGeom prst="ellipse">
-            <a:avLst/>
-          </a:prstGeom>
-          <a:solidFill>
-            <a:srgbClr val="EFEAF8"/>
-          </a:solidFill>
-          <a:ln w="12700">
-            <a:solidFill>
-              <a:srgbClr val="EFEAF8"/>
-            </a:solidFill>
-            <a:prstDash val="solid"/>
-          </a:ln>
-        </p:spPr>
-      </p:sp>
-      <p:pic>
-        <p:nvPicPr>
-          <p:cNvPr id="10" name="Image 1" descr="preencoded.png">    </p:cNvPr>
-          <p:cNvPicPr>
-            <a:picLocks noChangeAspect="1"/>
-          </p:cNvPicPr>
-          <p:nvPr/>
-        </p:nvPicPr>
-        <p:blipFill>
-          <a:blip r:embed="rId2"/>
-          <a:stretch>
-            <a:fillRect/>
-          </a:stretch>
-        </p:blipFill>
-        <p:spPr>
-          <a:xfrm>
-            <a:off x="8339328" y="2395728"/>
-            <a:ext cx="237744" cy="237744"/>
-          </a:xfrm>
-          <a:prstGeom prst="rect">
-            <a:avLst/>
-          </a:prstGeom>
-        </p:spPr>
-      </p:pic>
-      <p:sp>
-        <p:nvSpPr>
-          <p:cNvPr id="11" name="Text 7"/>
-          <p:cNvSpPr txBox="1"/>
-          <p:nvPr/>
-        </p:nvSpPr>
-        <p:spPr>
-          <a:xfrm>
-            <a:off x="8823960" y="2267712"/>
-            <a:ext cx="2834640" cy="320040"/>
-          </a:xfrm>
-          <a:prstGeom prst="rect">
-            <a:avLst/>
-          </a:prstGeom>
-          <a:noFill/>
-          <a:ln/>
-        </p:spPr>
-        <p:txBody>
-          <a:bodyPr wrap="square" lIns="0" tIns="0" rIns="0" bIns="0" rtlCol="0" anchor="ctr"/>
-          <a:lstStyle/>
-          <a:p>
-            <a:pPr indent="0" marL="0">
-              <a:buNone/>
-            </a:pPr>
-            <a:r>
-              <a:rPr lang="en-US" sz="1500" b="1" dirty="0">
-                <a:solidFill>
-                  <a:schemeClr val="tx2"/>
-                </a:solidFill>
-              </a:rPr>
-              <a:t>Trial intelligence</a:t>
-            </a:r>
-            <a:endParaRPr lang="en-US" sz="1500" dirty="0"/>
-          </a:p>
-        </p:txBody>
-      </p:sp>
-      <p:sp>
-        <p:nvSpPr>
-          <p:cNvPr id="12" name="Text 8"/>
-          <p:cNvSpPr txBox="1"/>
-          <p:nvPr/>
-        </p:nvSpPr>
-        <p:spPr>
-          <a:xfrm>
-            <a:off x="8823960" y="2587752"/>
-            <a:ext cx="2834640" cy="640080"/>
-          </a:xfrm>
-          <a:prstGeom prst="rect">
-            <a:avLst/>
-          </a:prstGeom>
-          <a:noFill/>
-          <a:ln/>
-        </p:spPr>
-        <p:txBody>
-          <a:bodyPr wrap="square" lIns="0" tIns="0" rIns="0" bIns="0" rtlCol="0" anchor="t"/>
-          <a:lstStyle/>
-          <a:p>
-            <a:pPr indent="0" marL="0">
-              <a:buNone/>
-            </a:pPr>
-            <a:r>
-              <a:rPr lang="en-US" sz="1300" dirty="0">
-                <a:solidFill>
-                  <a:schemeClr val="tx1"/>
-                </a:solidFill>
-              </a:rPr>
-              <a:t>Enrolment against target, trials by phase and success rate.</a:t>
-            </a:r>
-            <a:endParaRPr lang="en-US" sz="1300" dirty="0"/>
-          </a:p>
-        </p:txBody>
-      </p:sp>
-      <p:sp>
-        <p:nvSpPr>
-          <p:cNvPr id="13" name="Shape 9"/>
-          <p:cNvSpPr/>
-          <p:nvPr/>
-        </p:nvSpPr>
-        <p:spPr>
-          <a:xfrm>
-            <a:off x="8229600" y="3273552"/>
-            <a:ext cx="457200" cy="457200"/>
-          </a:xfrm>
-          <a:prstGeom prst="ellipse">
-            <a:avLst/>
-          </a:prstGeom>
-          <a:solidFill>
-            <a:srgbClr val="EFEAF8"/>
-          </a:solidFill>
-          <a:ln w="12700">
-            <a:solidFill>
-              <a:srgbClr val="EFEAF8"/>
-            </a:solidFill>
-            <a:prstDash val="solid"/>
-          </a:ln>
-        </p:spPr>
-      </p:sp>
-      <p:pic>
-        <p:nvPicPr>
-          <p:cNvPr id="14" name="Image 2" descr="preencoded.png">    </p:cNvPr>
-          <p:cNvPicPr>
-            <a:picLocks noChangeAspect="1"/>
-          </p:cNvPicPr>
-          <p:nvPr/>
-        </p:nvPicPr>
-        <p:blipFill>
-          <a:blip r:embed="rId3"/>
-          <a:stretch>
-            <a:fillRect/>
-          </a:stretch>
-        </p:blipFill>
-        <p:spPr>
-          <a:xfrm>
-            <a:off x="8339328" y="3383280"/>
-            <a:ext cx="237744" cy="237744"/>
-          </a:xfrm>
-          <a:prstGeom prst="rect">
-            <a:avLst/>
-          </a:prstGeom>
-        </p:spPr>
-      </p:pic>
-      <p:sp>
-        <p:nvSpPr>
-          <p:cNvPr id="15" name="Text 10"/>
-          <p:cNvSpPr txBox="1"/>
-          <p:nvPr/>
-        </p:nvSpPr>
-        <p:spPr>
-          <a:xfrm>
-            <a:off x="8823960" y="3255264"/>
-            <a:ext cx="2834640" cy="320040"/>
-          </a:xfrm>
-          <a:prstGeom prst="rect">
-            <a:avLst/>
-          </a:prstGeom>
-          <a:noFill/>
-          <a:ln/>
-        </p:spPr>
-        <p:txBody>
-          <a:bodyPr wrap="square" lIns="0" tIns="0" rIns="0" bIns="0" rtlCol="0" anchor="ctr"/>
-          <a:lstStyle/>
-          <a:p>
-            <a:pPr indent="0" marL="0">
-              <a:buNone/>
-            </a:pPr>
-            <a:r>
-              <a:rPr lang="en-US" sz="1500" b="1" dirty="0">
-                <a:solidFill>
-                  <a:schemeClr val="tx2"/>
-                </a:solidFill>
-              </a:rPr>
-              <a:t>Trial-to-publication rate</a:t>
-            </a:r>
-            <a:endParaRPr lang="en-US" sz="1500" dirty="0"/>
-          </a:p>
-        </p:txBody>
-      </p:sp>
-      <p:sp>
-        <p:nvSpPr>
-          <p:cNvPr id="16" name="Text 11"/>
-          <p:cNvSpPr txBox="1"/>
-          <p:nvPr/>
-        </p:nvSpPr>
-        <p:spPr>
-          <a:xfrm>
-            <a:off x="8823960" y="3575304"/>
-            <a:ext cx="2834640" cy="640080"/>
-          </a:xfrm>
-          <a:prstGeom prst="rect">
-            <a:avLst/>
-          </a:prstGeom>
-          <a:noFill/>
-          <a:ln/>
-        </p:spPr>
-        <p:txBody>
-          <a:bodyPr wrap="square" lIns="0" tIns="0" rIns="0" bIns="0" rtlCol="0" anchor="t"/>
-          <a:lstStyle/>
-          <a:p>
-            <a:pPr indent="0" marL="0">
-              <a:buNone/>
-            </a:pPr>
-            <a:r>
-              <a:rPr lang="en-US" sz="1300" dirty="0">
-                <a:solidFill>
-                  <a:schemeClr val="tx1"/>
-                </a:solidFill>
-              </a:rPr>
-              <a:t>See which studies turn into published evidence.</a:t>
-            </a:r>
-            <a:endParaRPr lang="en-US" sz="1300" dirty="0"/>
-          </a:p>
-        </p:txBody>
-      </p:sp>
-      <p:sp>
-        <p:nvSpPr>
-          <p:cNvPr id="17" name="Shape 12"/>
-          <p:cNvSpPr/>
-          <p:nvPr/>
-        </p:nvSpPr>
-        <p:spPr>
-          <a:xfrm>
-            <a:off x="8229600" y="4261104"/>
-            <a:ext cx="457200" cy="457200"/>
-          </a:xfrm>
-          <a:prstGeom prst="ellipse">
-            <a:avLst/>
-          </a:prstGeom>
-          <a:solidFill>
-            <a:srgbClr val="EFEAF8"/>
-          </a:solidFill>
-          <a:ln w="12700">
-            <a:solidFill>
-              <a:srgbClr val="EFEAF8"/>
-            </a:solidFill>
-            <a:prstDash val="solid"/>
-          </a:ln>
-        </p:spPr>
-      </p:sp>
-      <p:pic>
-        <p:nvPicPr>
-          <p:cNvPr id="18" name="Image 3" descr="preencoded.png">    </p:cNvPr>
-          <p:cNvPicPr>
-            <a:picLocks noChangeAspect="1"/>
-          </p:cNvPicPr>
-          <p:nvPr/>
-        </p:nvPicPr>
-        <p:blipFill>
-          <a:blip r:embed="rId4"/>
-          <a:stretch>
-            <a:fillRect/>
-          </a:stretch>
-        </p:blipFill>
-        <p:spPr>
-          <a:xfrm>
-            <a:off x="8339328" y="4370832"/>
-            <a:ext cx="237744" cy="237744"/>
-          </a:xfrm>
-          <a:prstGeom prst="rect">
-            <a:avLst/>
-          </a:prstGeom>
-        </p:spPr>
-      </p:pic>
-      <p:sp>
-        <p:nvSpPr>
-          <p:cNvPr id="19" name="Text 13"/>
-          <p:cNvSpPr txBox="1"/>
-          <p:nvPr/>
-        </p:nvSpPr>
-        <p:spPr>
-          <a:xfrm>
-            <a:off x="8823960" y="4242816"/>
-            <a:ext cx="2834640" cy="320040"/>
-          </a:xfrm>
-          <a:prstGeom prst="rect">
-            <a:avLst/>
-          </a:prstGeom>
-          <a:noFill/>
-          <a:ln/>
-        </p:spPr>
-        <p:txBody>
-          <a:bodyPr wrap="square" lIns="0" tIns="0" rIns="0" bIns="0" rtlCol="0" anchor="ctr"/>
-          <a:lstStyle/>
-          <a:p>
-            <a:pPr indent="0" marL="0">
-              <a:buNone/>
-            </a:pPr>
-            <a:r>
-              <a:rPr lang="en-US" sz="1500" b="1" dirty="0">
-                <a:solidFill>
-                  <a:schemeClr val="tx2"/>
-                </a:solidFill>
-              </a:rPr>
-              <a:t>Funding by source</a:t>
-            </a:r>
-            <a:endParaRPr lang="en-US" sz="1500" dirty="0"/>
-          </a:p>
-        </p:txBody>
-      </p:sp>
-      <p:sp>
-        <p:nvSpPr>
-          <p:cNvPr id="20" name="Text 14"/>
-          <p:cNvSpPr txBox="1"/>
-          <p:nvPr/>
-        </p:nvSpPr>
-        <p:spPr>
-          <a:xfrm>
-            <a:off x="8823960" y="4562856"/>
-            <a:ext cx="2834640" cy="640080"/>
-          </a:xfrm>
-          <a:prstGeom prst="rect">
-            <a:avLst/>
-          </a:prstGeom>
-          <a:noFill/>
-          <a:ln/>
-        </p:spPr>
-        <p:txBody>
-          <a:bodyPr wrap="square" lIns="0" tIns="0" rIns="0" bIns="0" rtlCol="0" anchor="t"/>
-          <a:lstStyle/>
-          <a:p>
-            <a:pPr indent="0" marL="0">
-              <a:buNone/>
-            </a:pPr>
-            <a:r>
-              <a:rPr lang="en-US" sz="1300" dirty="0">
-                <a:solidFill>
-                  <a:schemeClr val="tx1"/>
-                </a:solidFill>
-              </a:rPr>
-              <a:t>Track where research money comes from and what it delivers.</a:t>
-            </a:r>
-            <a:endParaRPr lang="en-US" sz="1300" dirty="0"/>
-          </a:p>
-        </p:txBody>
-      </p:sp>
-      <p:sp>
-        <p:nvSpPr>
-          <p:cNvPr id="21" name="Shape 15"/>
-          <p:cNvSpPr/>
-          <p:nvPr/>
-        </p:nvSpPr>
-        <p:spPr>
-          <a:xfrm>
-            <a:off x="8229600" y="5248656"/>
-            <a:ext cx="457200" cy="457200"/>
-          </a:xfrm>
-          <a:prstGeom prst="ellipse">
-            <a:avLst/>
-          </a:prstGeom>
-          <a:solidFill>
-            <a:srgbClr val="EFEAF8"/>
-          </a:solidFill>
-          <a:ln w="12700">
-            <a:solidFill>
-              <a:srgbClr val="EFEAF8"/>
-            </a:solidFill>
-            <a:prstDash val="solid"/>
-          </a:ln>
-        </p:spPr>
-      </p:sp>
-      <p:pic>
-        <p:nvPicPr>
-          <p:cNvPr id="22" name="Image 4" descr="preencoded.png">    </p:cNvPr>
-          <p:cNvPicPr>
-            <a:picLocks noChangeAspect="1"/>
-          </p:cNvPicPr>
-          <p:nvPr/>
-        </p:nvPicPr>
-        <p:blipFill>
-          <a:blip r:embed="rId5"/>
-          <a:stretch>
-            <a:fillRect/>
-          </a:stretch>
-        </p:blipFill>
-        <p:spPr>
-          <a:xfrm>
-            <a:off x="8339328" y="5358384"/>
-            <a:ext cx="237744" cy="237744"/>
-          </a:xfrm>
-          <a:prstGeom prst="rect">
-            <a:avLst/>
-          </a:prstGeom>
-        </p:spPr>
-      </p:pic>
-      <p:sp>
-        <p:nvSpPr>
-          <p:cNvPr id="23" name="Text 16"/>
-          <p:cNvSpPr txBox="1"/>
-          <p:nvPr/>
-        </p:nvSpPr>
-        <p:spPr>
-          <a:xfrm>
-            <a:off x="8823960" y="5230368"/>
-            <a:ext cx="2834640" cy="320040"/>
-          </a:xfrm>
-          <a:prstGeom prst="rect">
-            <a:avLst/>
-          </a:prstGeom>
-          <a:noFill/>
-          <a:ln/>
-        </p:spPr>
-        <p:txBody>
-          <a:bodyPr wrap="square" lIns="0" tIns="0" rIns="0" bIns="0" rtlCol="0" anchor="ctr"/>
-          <a:lstStyle/>
-          <a:p>
-            <a:pPr indent="0" marL="0">
-              <a:buNone/>
-            </a:pPr>
-            <a:r>
-              <a:rPr lang="en-US" sz="1500" b="1" dirty="0">
-                <a:solidFill>
-                  <a:schemeClr val="tx2"/>
-                </a:solidFill>
-              </a:rPr>
-              <a:t>Exportable reports</a:t>
-            </a:r>
-            <a:endParaRPr lang="en-US" sz="1500" dirty="0"/>
-          </a:p>
-        </p:txBody>
-      </p:sp>
-      <p:sp>
-        <p:nvSpPr>
-          <p:cNvPr id="24" name="Text 17"/>
-          <p:cNvSpPr txBox="1"/>
-          <p:nvPr/>
-        </p:nvSpPr>
-        <p:spPr>
-          <a:xfrm>
-            <a:off x="8823960" y="5550408"/>
-            <a:ext cx="2834640" cy="640080"/>
-          </a:xfrm>
-          <a:prstGeom prst="rect">
-            <a:avLst/>
-          </a:prstGeom>
-          <a:noFill/>
-          <a:ln/>
-        </p:spPr>
-        <p:txBody>
-          <a:bodyPr wrap="square" lIns="0" tIns="0" rIns="0" bIns="0" rtlCol="0" anchor="t"/>
-          <a:lstStyle/>
-          <a:p>
-            <a:pPr indent="0" marL="0">
-              <a:buNone/>
-            </a:pPr>
-            <a:r>
-              <a:rPr lang="en-US" sz="1300" dirty="0">
-                <a:solidFill>
-                  <a:schemeClr val="tx1"/>
-                </a:solidFill>
-              </a:rPr>
-              <a:t>Board-ready exports over any time range.</a:t>
-            </a:r>
-            <a:endParaRPr lang="en-US" sz="1300" dirty="0"/>
-          </a:p>
-        </p:txBody>
-      </p:sp>
-      <p:sp>
-        <p:nvSpPr>
-          <p:cNvPr id="25" name="Slide Number Placeholder 0"/>
-          <p:cNvSpPr>
-            <a:spLocks noGrp="1"/>
-          </p:cNvSpPr>
-          <p:nvPr>
-            <p:ph type="sldNum" sz="quarter" idx="4294967295"/>
-          </p:nvPr>
-        </p:nvSpPr>
-        <p:spPr>
-          <a:xfrm>
-            <a:off x="548640" y="6400800"/>
-            <a:ext cx="548640" cy="274320"/>
-          </a:xfrm>
-          <a:prstGeom prst="rect">
-            <a:avLst/>
-          </a:prstGeom>
-          <a:extLst>
-            <a:ext uri="{C572A759-6A51-4108-AA02-DFA0A04FC94B}">
-              <ma14:wrappingTextBoxFlag xmlns:ma14="http://schemas.microsoft.com/office/mac/drawingml/2011/main" val="0"/>
-            </a:ext>
-          </a:extLst>
-        </p:spPr>
-        <p:txBody>
-          <a:bodyPr/>
-          <a:lstStyle>
-            <a:lvl1pPr>
-              <a:defRPr sz="1000">
-                <a:solidFill>
-                  <a:srgbClr val="5E5C78"/>
-                </a:solidFill>
-              </a:defRPr>
-            </a:lvl1pPr>
-          </a:lstStyle>
-          <a:p>
-            <a:pPr algn="l"/>
-            <a:fld id="{F7021451-1387-4CA6-816F-3879F97B5CBC}" type="slidenum">
-              <a:rPr b="0" lang="en-US"/>
-              <a:t>18</a:t>
-            </a:fld>
-            <a:endParaRPr lang="en-US"/>
-          </a:p>
-        </p:txBody>
-      </p:sp>
-    </p:spTree>
-  </p:cSld>
-  <p:clrMapOvr>
-    <a:masterClrMapping/>
-  </p:clrMapOvr>
-</p:sld>
-</file>
-
-<file path=ppt/slides/slide19.xml><?xml version="1.0" encoding="utf-8"?>
-<p:sld xmlns:a="http://schemas.openxmlformats.org/drawingml/2006/main" xmlns:r="http://schemas.openxmlformats.org/officeDocument/2006/relationships" xmlns:p="http://schemas.openxmlformats.org/presentationml/2006/main">
-  <p:cSld name="Slide 19">
-    <p:spTree>
-      <p:nvGrpSpPr>
-        <p:cNvPr id="1" name=""/>
-        <p:cNvGrpSpPr/>
-        <p:nvPr/>
-      </p:nvGrpSpPr>
-      <p:grpSpPr>
-        <a:xfrm>
-          <a:off x="0" y="0"/>
-          <a:ext cx="0" cy="0"/>
-          <a:chOff x="0" y="0"/>
-          <a:chExt cx="0" cy="0"/>
-        </a:xfrm>
-      </p:grpSpPr>
-      <p:sp>
-        <p:nvSpPr>
-          <p:cNvPr id="2" name="Text 0"/>
-          <p:cNvSpPr/>
-          <p:nvPr>
-            <p:ph idx="101" type="title" hasCustomPrompt="1"/>
-          </p:nvPr>
-        </p:nvSpPr>
-        <p:spPr>
-          <a:xfrm>
-            <a:off x="548640" y="365760"/>
-            <a:ext cx="11064240" cy="822960"/>
-          </a:xfrm>
-          <a:prstGeom prst="rect">
-            <a:avLst/>
-          </a:prstGeom>
-          <a:noFill/>
-          <a:ln/>
-        </p:spPr>
-        <p:txBody>
-          <a:bodyPr wrap="square" lIns="0" tIns="0" rIns="0" bIns="0" rtlCol="0" anchor="t"/>
-          <a:lstStyle/>
-          <a:p>
-            <a:pPr algn="l" indent="0" marL="0">
-              <a:buNone/>
-            </a:pPr>
-            <a:r>
-              <a:rPr lang="en-US" sz="3200" b="1" dirty="0">
-                <a:solidFill>
-                  <a:schemeClr val="tx2"/>
-                </a:solidFill>
-              </a:rPr>
-              <a:t>Connected, secure and ready for your IT team</a:t>
-            </a:r>
-            <a:endParaRPr lang="en-US" sz="3200" dirty="0"/>
-          </a:p>
-        </p:txBody>
-      </p:sp>
-      <p:sp>
-        <p:nvSpPr>
-          <p:cNvPr id="3" name="Column Integrations"/>
-          <p:cNvSpPr/>
-          <p:nvPr/>
-        </p:nvSpPr>
-        <p:spPr>
-          <a:xfrm>
-            <a:off x="548640" y="1463040"/>
-            <a:ext cx="3566160" cy="4023360"/>
-          </a:xfrm>
-          <a:prstGeom prst="roundRect">
-            <a:avLst>
-              <a:gd name="adj" fmla="val 2564"/>
-            </a:avLst>
-          </a:prstGeom>
-          <a:solidFill>
-            <a:srgbClr val="F6F4FB"/>
-          </a:solidFill>
-          <a:ln w="9525">
-            <a:solidFill>
-              <a:srgbClr val="DDD8EC"/>
-            </a:solidFill>
-            <a:prstDash val="solid"/>
-          </a:ln>
-        </p:spPr>
-      </p:sp>
-      <p:sp>
-        <p:nvSpPr>
-          <p:cNvPr id="4" name="Shape 2"/>
-          <p:cNvSpPr/>
-          <p:nvPr/>
-        </p:nvSpPr>
-        <p:spPr>
-          <a:xfrm>
-            <a:off x="822960" y="1691640"/>
-            <a:ext cx="685800" cy="685800"/>
-          </a:xfrm>
-          <a:prstGeom prst="ellipse">
-            <a:avLst/>
-          </a:prstGeom>
-          <a:solidFill>
-            <a:srgbClr val="7E5BB5"/>
-          </a:solidFill>
-          <a:ln w="12700">
-            <a:solidFill>
-              <a:srgbClr val="7E5BB5"/>
-            </a:solidFill>
-            <a:prstDash val="solid"/>
-          </a:ln>
-        </p:spPr>
-      </p:sp>
-      <p:pic>
-        <p:nvPicPr>
-          <p:cNvPr id="5" name="Image 0" descr="preencoded.png">    </p:cNvPr>
-          <p:cNvPicPr>
-            <a:picLocks noChangeAspect="1"/>
-          </p:cNvPicPr>
-          <p:nvPr/>
-        </p:nvPicPr>
-        <p:blipFill>
-          <a:blip r:embed="rId1"/>
-          <a:stretch>
-            <a:fillRect/>
-          </a:stretch>
-        </p:blipFill>
-        <p:spPr>
-          <a:xfrm>
-            <a:off x="987552" y="1856232"/>
-            <a:ext cx="356616" cy="356616"/>
-          </a:xfrm>
-          <a:prstGeom prst="rect">
-            <a:avLst/>
-          </a:prstGeom>
-        </p:spPr>
-      </p:pic>
-      <p:sp>
-        <p:nvSpPr>
-          <p:cNvPr id="6" name="Text 3"/>
-          <p:cNvSpPr txBox="1"/>
-          <p:nvPr/>
-        </p:nvSpPr>
-        <p:spPr>
-          <a:xfrm>
-            <a:off x="1645920" y="1783080"/>
-            <a:ext cx="2286000" cy="457200"/>
-          </a:xfrm>
-          <a:prstGeom prst="rect">
-            <a:avLst/>
-          </a:prstGeom>
-          <a:noFill/>
-          <a:ln/>
-        </p:spPr>
-        <p:txBody>
-          <a:bodyPr wrap="square" lIns="0" tIns="0" rIns="0" bIns="0" rtlCol="0" anchor="ctr"/>
-          <a:lstStyle/>
-          <a:p>
-            <a:pPr indent="0" marL="0">
-              <a:buNone/>
-            </a:pPr>
-            <a:r>
-              <a:rPr lang="en-US" sz="1800" b="1" dirty="0">
-                <a:solidFill>
-                  <a:schemeClr val="tx2"/>
-                </a:solidFill>
-              </a:rPr>
-              <a:t>Integrations</a:t>
-            </a:r>
-            <a:endParaRPr lang="en-US" sz="1800" dirty="0"/>
-          </a:p>
-        </p:txBody>
-      </p:sp>
-      <p:sp>
-        <p:nvSpPr>
-          <p:cNvPr id="7" name="Text 4"/>
-          <p:cNvSpPr txBox="1"/>
-          <p:nvPr/>
-        </p:nvSpPr>
-        <p:spPr>
-          <a:xfrm>
-            <a:off x="822960" y="2606040"/>
-            <a:ext cx="3063240" cy="3200400"/>
-          </a:xfrm>
-          <a:prstGeom prst="rect">
-            <a:avLst/>
-          </a:prstGeom>
-          <a:noFill/>
-          <a:ln/>
-        </p:spPr>
-        <p:txBody>
-          <a:bodyPr wrap="square" lIns="0" tIns="0" rIns="0" bIns="0" rtlCol="0" anchor="t"/>
-          <a:lstStyle/>
-          <a:p>
-            <a:pPr marL="342900" indent="-342900">
-              <a:spcAft>
-                <a:spcPts val="800"/>
-              </a:spcAft>
-              <a:buSzPct val="100000"/>
-              <a:buChar char="•"/>
-            </a:pPr>
-            <a:r>
-              <a:rPr lang="en-US" sz="1400" dirty="0">
-                <a:solidFill>
-                  <a:schemeClr val="tx1"/>
-                </a:solidFill>
-              </a:rPr>
-              <a:t>ORCID sign-in and profiles</a:t>
-            </a:r>
-            <a:endParaRPr lang="en-US" sz="1400" dirty="0"/>
-          </a:p>
-          <a:p>
-            <a:pPr marL="342900" indent="-342900">
-              <a:spcAft>
-                <a:spcPts val="800"/>
-              </a:spcAft>
-              <a:buSzPct val="100000"/>
-              <a:buChar char="•"/>
-            </a:pPr>
-            <a:r>
-              <a:rPr lang="en-US" sz="1400" dirty="0">
-                <a:solidFill>
-                  <a:schemeClr val="tx1"/>
-                </a:solidFill>
-              </a:rPr>
-              <a:t>Crossref and DataCite identifiers</a:t>
-            </a:r>
-            <a:endParaRPr lang="en-US" sz="1400" dirty="0"/>
-          </a:p>
-          <a:p>
-            <a:pPr marL="342900" indent="-342900">
-              <a:spcAft>
-                <a:spcPts val="800"/>
-              </a:spcAft>
-              <a:buSzPct val="100000"/>
-              <a:buChar char="•"/>
-            </a:pPr>
-            <a:r>
-              <a:rPr lang="en-US" sz="1400" dirty="0">
-                <a:solidFill>
-                  <a:schemeClr val="tx1"/>
-                </a:solidFill>
-              </a:rPr>
-              <a:t>PubMed, OpenAlex, Research4Life</a:t>
-            </a:r>
-            <a:endParaRPr lang="en-US" sz="1400" dirty="0"/>
-          </a:p>
-          <a:p>
-            <a:pPr marL="342900" indent="-342900">
-              <a:spcAft>
-                <a:spcPts val="800"/>
-              </a:spcAft>
-              <a:buSzPct val="100000"/>
-              <a:buChar char="•"/>
-            </a:pPr>
-            <a:r>
-              <a:rPr lang="en-US" sz="1400" dirty="0">
-                <a:solidFill>
-                  <a:schemeClr val="tx1"/>
-                </a:solidFill>
-              </a:rPr>
-              <a:t>Zotero, Mendeley, EndNote, BibTeX</a:t>
-            </a:r>
-            <a:endParaRPr lang="en-US" sz="1400" dirty="0"/>
-          </a:p>
-          <a:p>
-            <a:pPr marL="342900" indent="-342900">
-              <a:spcAft>
-                <a:spcPts val="800"/>
-              </a:spcAft>
-              <a:buSzPct val="100000"/>
-              <a:buChar char="•"/>
-            </a:pPr>
-            <a:r>
-              <a:rPr lang="en-US" sz="1400" dirty="0">
-                <a:solidFill>
-                  <a:schemeClr val="tx1"/>
-                </a:solidFill>
-              </a:rPr>
-              <a:t>ClinicalTrials.gov, PACTR, WHO ICTRP</a:t>
-            </a:r>
-            <a:endParaRPr lang="en-US" sz="1400" dirty="0"/>
-          </a:p>
-          <a:p>
-            <a:pPr marL="342900" indent="-342900">
-              <a:spcAft>
-                <a:spcPts val="800"/>
-              </a:spcAft>
-              <a:buSzPct val="100000"/>
-              <a:buChar char="•"/>
-            </a:pPr>
-            <a:r>
-              <a:rPr lang="en-US" sz="1400" dirty="0">
-                <a:solidFill>
-                  <a:schemeClr val="tx1"/>
-                </a:solidFill>
-              </a:rPr>
-              <a:t>Google Gemini and OpenAI for AI features</a:t>
-            </a:r>
-            <a:endParaRPr lang="en-US" sz="1400" dirty="0"/>
-          </a:p>
-          <a:p>
-            <a:pPr marL="342900" indent="-342900">
-              <a:spcAft>
-                <a:spcPts val="800"/>
-              </a:spcAft>
-              <a:buSzPct val="100000"/>
-              <a:buChar char="•"/>
-            </a:pPr>
-            <a:r>
-              <a:rPr lang="en-US" sz="1400" dirty="0">
-                <a:solidFill>
-                  <a:schemeClr val="tx1"/>
-                </a:solidFill>
-              </a:rPr>
-              <a:t>ImaChek image integrity analysis</a:t>
-            </a:r>
-            <a:endParaRPr lang="en-US" sz="1400" dirty="0"/>
-          </a:p>
-        </p:txBody>
-      </p:sp>
-      <p:sp>
-        <p:nvSpPr>
-          <p:cNvPr id="8" name="Column Security &amp; governance"/>
-          <p:cNvSpPr/>
-          <p:nvPr/>
-        </p:nvSpPr>
-        <p:spPr>
-          <a:xfrm>
-            <a:off x="4297680" y="1463040"/>
-            <a:ext cx="3566160" cy="4023360"/>
-          </a:xfrm>
-          <a:prstGeom prst="roundRect">
-            <a:avLst>
-              <a:gd name="adj" fmla="val 2564"/>
-            </a:avLst>
-          </a:prstGeom>
-          <a:solidFill>
-            <a:srgbClr val="F6F4FB"/>
-          </a:solidFill>
-          <a:ln w="9525">
-            <a:solidFill>
-              <a:srgbClr val="DDD8EC"/>
-            </a:solidFill>
-            <a:prstDash val="solid"/>
-          </a:ln>
-        </p:spPr>
-      </p:sp>
-      <p:sp>
-        <p:nvSpPr>
-          <p:cNvPr id="9" name="Shape 6"/>
-          <p:cNvSpPr/>
-          <p:nvPr/>
-        </p:nvSpPr>
-        <p:spPr>
-          <a:xfrm>
-            <a:off x="4572000" y="1691640"/>
-            <a:ext cx="685800" cy="685800"/>
-          </a:xfrm>
-          <a:prstGeom prst="ellipse">
-            <a:avLst/>
-          </a:prstGeom>
-          <a:solidFill>
-            <a:srgbClr val="2A9DC0"/>
-          </a:solidFill>
-          <a:ln w="12700">
-            <a:solidFill>
-              <a:srgbClr val="2A9DC0"/>
-            </a:solidFill>
-            <a:prstDash val="solid"/>
-          </a:ln>
-        </p:spPr>
-      </p:sp>
-      <p:pic>
-        <p:nvPicPr>
-          <p:cNvPr id="10" name="Image 1" descr="preencoded.png">    </p:cNvPr>
-          <p:cNvPicPr>
-            <a:picLocks noChangeAspect="1"/>
-          </p:cNvPicPr>
-          <p:nvPr/>
-        </p:nvPicPr>
-        <p:blipFill>
-          <a:blip r:embed="rId2"/>
-          <a:stretch>
-            <a:fillRect/>
-          </a:stretch>
-        </p:blipFill>
-        <p:spPr>
-          <a:xfrm>
-            <a:off x="4736592" y="1856232"/>
-            <a:ext cx="356616" cy="356616"/>
-          </a:xfrm>
-          <a:prstGeom prst="rect">
-            <a:avLst/>
-          </a:prstGeom>
-        </p:spPr>
-      </p:pic>
-      <p:sp>
-        <p:nvSpPr>
-          <p:cNvPr id="11" name="Text 7"/>
-          <p:cNvSpPr txBox="1"/>
-          <p:nvPr/>
-        </p:nvSpPr>
-        <p:spPr>
-          <a:xfrm>
-            <a:off x="5394960" y="1783080"/>
-            <a:ext cx="2286000" cy="457200"/>
-          </a:xfrm>
-          <a:prstGeom prst="rect">
-            <a:avLst/>
-          </a:prstGeom>
-          <a:noFill/>
-          <a:ln/>
-        </p:spPr>
-        <p:txBody>
-          <a:bodyPr wrap="square" lIns="0" tIns="0" rIns="0" bIns="0" rtlCol="0" anchor="ctr"/>
-          <a:lstStyle/>
-          <a:p>
-            <a:pPr indent="0" marL="0">
-              <a:buNone/>
-            </a:pPr>
-            <a:r>
-              <a:rPr lang="en-US" sz="1800" b="1" dirty="0">
-                <a:solidFill>
-                  <a:schemeClr val="tx2"/>
-                </a:solidFill>
-              </a:rPr>
-              <a:t>Security &amp; governance</a:t>
-            </a:r>
-            <a:endParaRPr lang="en-US" sz="1800" dirty="0"/>
-          </a:p>
-        </p:txBody>
-      </p:sp>
-      <p:sp>
-        <p:nvSpPr>
-          <p:cNvPr id="12" name="Text 8"/>
-          <p:cNvSpPr txBox="1"/>
-          <p:nvPr/>
-        </p:nvSpPr>
-        <p:spPr>
-          <a:xfrm>
-            <a:off x="4572000" y="2606040"/>
-            <a:ext cx="3063240" cy="3200400"/>
-          </a:xfrm>
-          <a:prstGeom prst="rect">
-            <a:avLst/>
-          </a:prstGeom>
-          <a:noFill/>
-          <a:ln/>
-        </p:spPr>
-        <p:txBody>
-          <a:bodyPr wrap="square" lIns="0" tIns="0" rIns="0" bIns="0" rtlCol="0" anchor="t"/>
-          <a:lstStyle/>
-          <a:p>
-            <a:pPr marL="342900" indent="-342900">
-              <a:spcAft>
-                <a:spcPts val="800"/>
-              </a:spcAft>
-              <a:buSzPct val="100000"/>
-              <a:buChar char="•"/>
-            </a:pPr>
-            <a:r>
-              <a:rPr lang="en-US" sz="1400" dirty="0">
-                <a:solidFill>
-                  <a:schemeClr val="tx1"/>
-                </a:solidFill>
-              </a:rPr>
-              <a:t>Role-based access for every user type</a:t>
-            </a:r>
-            <a:endParaRPr lang="en-US" sz="1400" dirty="0"/>
-          </a:p>
-          <a:p>
-            <a:pPr marL="342900" indent="-342900">
-              <a:spcAft>
-                <a:spcPts val="800"/>
-              </a:spcAft>
-              <a:buSzPct val="100000"/>
-              <a:buChar char="•"/>
-            </a:pPr>
-            <a:r>
-              <a:rPr lang="en-US" sz="1400" dirty="0">
-                <a:solidFill>
-                  <a:schemeClr val="tx1"/>
-                </a:solidFill>
-              </a:rPr>
-              <a:t>Institution-verified email domains</a:t>
-            </a:r>
-            <a:endParaRPr lang="en-US" sz="1400" dirty="0"/>
-          </a:p>
-          <a:p>
-            <a:pPr marL="342900" indent="-342900">
-              <a:spcAft>
-                <a:spcPts val="800"/>
-              </a:spcAft>
-              <a:buSzPct val="100000"/>
-              <a:buChar char="•"/>
-            </a:pPr>
-            <a:r>
-              <a:rPr lang="en-US" sz="1400" dirty="0">
-                <a:solidFill>
-                  <a:schemeClr val="tx1"/>
-                </a:solidFill>
-              </a:rPr>
-              <a:t>Audit trails and activity logs</a:t>
-            </a:r>
-            <a:endParaRPr lang="en-US" sz="1400" dirty="0"/>
-          </a:p>
-          <a:p>
-            <a:pPr marL="342900" indent="-342900">
-              <a:spcAft>
-                <a:spcPts val="800"/>
-              </a:spcAft>
-              <a:buSzPct val="100000"/>
-              <a:buChar char="•"/>
-            </a:pPr>
-            <a:r>
-              <a:rPr lang="en-US" sz="1400" dirty="0">
-                <a:solidFill>
-                  <a:schemeClr val="tx1"/>
-                </a:solidFill>
-              </a:rPr>
-              <a:t>Admin consoles for security, users and data</a:t>
-            </a:r>
-            <a:endParaRPr lang="en-US" sz="1400" dirty="0"/>
-          </a:p>
-          <a:p>
-            <a:pPr marL="342900" indent="-342900">
-              <a:spcAft>
-                <a:spcPts val="800"/>
-              </a:spcAft>
-              <a:buSzPct val="100000"/>
-              <a:buChar char="•"/>
-            </a:pPr>
-            <a:r>
-              <a:rPr lang="en-US" sz="1400" dirty="0">
-                <a:solidFill>
-                  <a:schemeClr val="tx1"/>
-                </a:solidFill>
-              </a:rPr>
-              <a:t>Ethics and data-protection workflows</a:t>
-            </a:r>
-            <a:endParaRPr lang="en-US" sz="1400" dirty="0"/>
-          </a:p>
-        </p:txBody>
-      </p:sp>
-      <p:sp>
-        <p:nvSpPr>
-          <p:cNvPr id="13" name="Column Deployment &amp; access"/>
-          <p:cNvSpPr/>
-          <p:nvPr/>
-        </p:nvSpPr>
-        <p:spPr>
-          <a:xfrm>
-            <a:off x="8046720" y="1463040"/>
-            <a:ext cx="3566160" cy="4023360"/>
-          </a:xfrm>
-          <a:prstGeom prst="roundRect">
-            <a:avLst>
-              <a:gd name="adj" fmla="val 2564"/>
-            </a:avLst>
-          </a:prstGeom>
-          <a:solidFill>
-            <a:srgbClr val="F6F4FB"/>
-          </a:solidFill>
-          <a:ln w="9525">
-            <a:solidFill>
-              <a:srgbClr val="DDD8EC"/>
-            </a:solidFill>
-            <a:prstDash val="solid"/>
-          </a:ln>
-        </p:spPr>
-      </p:sp>
-      <p:sp>
-        <p:nvSpPr>
-          <p:cNvPr id="14" name="Shape 10"/>
-          <p:cNvSpPr/>
-          <p:nvPr/>
-        </p:nvSpPr>
-        <p:spPr>
-          <a:xfrm>
-            <a:off x="8321040" y="1691640"/>
-            <a:ext cx="685800" cy="685800"/>
-          </a:xfrm>
-          <a:prstGeom prst="ellipse">
-            <a:avLst/>
-          </a:prstGeom>
-          <a:solidFill>
-            <a:srgbClr val="7E5BB5"/>
-          </a:solidFill>
-          <a:ln w="12700">
-            <a:solidFill>
-              <a:srgbClr val="7E5BB5"/>
-            </a:solidFill>
-            <a:prstDash val="solid"/>
-          </a:ln>
-        </p:spPr>
-      </p:sp>
-      <p:pic>
-        <p:nvPicPr>
-          <p:cNvPr id="15" name="Image 2" descr="preencoded.png">    </p:cNvPr>
-          <p:cNvPicPr>
-            <a:picLocks noChangeAspect="1"/>
-          </p:cNvPicPr>
-          <p:nvPr/>
-        </p:nvPicPr>
-        <p:blipFill>
-          <a:blip r:embed="rId3"/>
-          <a:stretch>
-            <a:fillRect/>
-          </a:stretch>
-        </p:blipFill>
-        <p:spPr>
-          <a:xfrm>
-            <a:off x="8485632" y="1856232"/>
-            <a:ext cx="356616" cy="356616"/>
-          </a:xfrm>
-          <a:prstGeom prst="rect">
-            <a:avLst/>
-          </a:prstGeom>
-        </p:spPr>
-      </p:pic>
-      <p:sp>
-        <p:nvSpPr>
-          <p:cNvPr id="16" name="Text 11"/>
-          <p:cNvSpPr txBox="1"/>
-          <p:nvPr/>
-        </p:nvSpPr>
-        <p:spPr>
-          <a:xfrm>
-            <a:off x="9144000" y="1783080"/>
-            <a:ext cx="2286000" cy="457200"/>
-          </a:xfrm>
-          <a:prstGeom prst="rect">
-            <a:avLst/>
-          </a:prstGeom>
-          <a:noFill/>
-          <a:ln/>
-        </p:spPr>
-        <p:txBody>
-          <a:bodyPr wrap="square" lIns="0" tIns="0" rIns="0" bIns="0" rtlCol="0" anchor="ctr"/>
-          <a:lstStyle/>
-          <a:p>
-            <a:pPr indent="0" marL="0">
-              <a:buNone/>
-            </a:pPr>
-            <a:r>
-              <a:rPr lang="en-US" sz="1800" b="1" dirty="0">
-                <a:solidFill>
-                  <a:schemeClr val="tx2"/>
-                </a:solidFill>
-              </a:rPr>
-              <a:t>Deployment &amp; access</a:t>
-            </a:r>
-            <a:endParaRPr lang="en-US" sz="1800" dirty="0"/>
-          </a:p>
-        </p:txBody>
-      </p:sp>
-      <p:sp>
-        <p:nvSpPr>
-          <p:cNvPr id="17" name="Text 12"/>
-          <p:cNvSpPr txBox="1"/>
-          <p:nvPr/>
-        </p:nvSpPr>
-        <p:spPr>
-          <a:xfrm>
-            <a:off x="8321040" y="2606040"/>
-            <a:ext cx="3063240" cy="3200400"/>
-          </a:xfrm>
-          <a:prstGeom prst="rect">
-            <a:avLst/>
-          </a:prstGeom>
-          <a:noFill/>
-          <a:ln/>
-        </p:spPr>
-        <p:txBody>
-          <a:bodyPr wrap="square" lIns="0" tIns="0" rIns="0" bIns="0" rtlCol="0" anchor="t"/>
-          <a:lstStyle/>
-          <a:p>
-            <a:pPr marL="342900" indent="-342900">
-              <a:spcAft>
-                <a:spcPts val="800"/>
-              </a:spcAft>
-              <a:buSzPct val="100000"/>
-              <a:buChar char="•"/>
-            </a:pPr>
-            <a:r>
-              <a:rPr lang="en-US" sz="1400" dirty="0">
-                <a:solidFill>
-                  <a:schemeClr val="tx1"/>
-                </a:solidFill>
-              </a:rPr>
-              <a:t>Hosted, or on your own servers via Docker</a:t>
-            </a:r>
-            <a:endParaRPr lang="en-US" sz="1400" dirty="0"/>
-          </a:p>
-          <a:p>
-            <a:pPr marL="342900" indent="-342900">
-              <a:spcAft>
-                <a:spcPts val="800"/>
-              </a:spcAft>
-              <a:buSzPct val="100000"/>
-              <a:buChar char="•"/>
-            </a:pPr>
-            <a:r>
-              <a:rPr lang="en-US" sz="1400" dirty="0">
-                <a:solidFill>
-                  <a:schemeClr val="tx1"/>
-                </a:solidFill>
-              </a:rPr>
-              <a:t>Multi-institution setup with central admin</a:t>
-            </a:r>
-            <a:endParaRPr lang="en-US" sz="1400" dirty="0"/>
-          </a:p>
-          <a:p>
-            <a:pPr marL="342900" indent="-342900">
-              <a:spcAft>
-                <a:spcPts val="800"/>
-              </a:spcAft>
-              <a:buSzPct val="100000"/>
-              <a:buChar char="•"/>
-            </a:pPr>
-            <a:r>
-              <a:rPr lang="en-US" sz="1400" dirty="0">
-                <a:solidFill>
-                  <a:schemeClr val="tx1"/>
-                </a:solidFill>
-              </a:rPr>
-              <a:t>19 interface languages</a:t>
-            </a:r>
-            <a:endParaRPr lang="en-US" sz="1400" dirty="0"/>
-          </a:p>
-          <a:p>
-            <a:pPr marL="342900" indent="-342900">
-              <a:spcAft>
-                <a:spcPts val="800"/>
-              </a:spcAft>
-              <a:buSzPct val="100000"/>
-              <a:buChar char="•"/>
-            </a:pPr>
-            <a:r>
-              <a:rPr lang="en-US" sz="1400" dirty="0">
-                <a:solidFill>
-                  <a:schemeClr val="tx1"/>
-                </a:solidFill>
-              </a:rPr>
-              <a:t>Light and dark modes, adjustable text size</a:t>
-            </a:r>
-            <a:endParaRPr lang="en-US" sz="1400" dirty="0"/>
-          </a:p>
-          <a:p>
-            <a:pPr marL="342900" indent="-342900">
-              <a:spcAft>
-                <a:spcPts val="800"/>
-              </a:spcAft>
-              <a:buSzPct val="100000"/>
-              <a:buChar char="•"/>
-            </a:pPr>
-            <a:r>
-              <a:rPr lang="en-US" sz="1400" dirty="0">
-                <a:solidFill>
-                  <a:schemeClr val="tx1"/>
-                </a:solidFill>
-              </a:rPr>
-              <a:t>Open, interoperable PID-based design</a:t>
-            </a:r>
-            <a:endParaRPr lang="en-US" sz="1400" dirty="0"/>
-          </a:p>
-        </p:txBody>
-      </p:sp>
-      <p:sp>
-        <p:nvSpPr>
-          <p:cNvPr id="25" name="Slide Number Placeholder 0"/>
-          <p:cNvSpPr>
-            <a:spLocks noGrp="1"/>
-          </p:cNvSpPr>
-          <p:nvPr>
-            <p:ph type="sldNum" sz="quarter" idx="4294967295"/>
-          </p:nvPr>
-        </p:nvSpPr>
-        <p:spPr>
-          <a:xfrm>
-            <a:off x="548640" y="6400800"/>
-            <a:ext cx="548640" cy="274320"/>
-          </a:xfrm>
-          <a:prstGeom prst="rect">
-            <a:avLst/>
-          </a:prstGeom>
-          <a:extLst>
-            <a:ext uri="{C572A759-6A51-4108-AA02-DFA0A04FC94B}">
-              <ma14:wrappingTextBoxFlag xmlns:ma14="http://schemas.microsoft.com/office/mac/drawingml/2011/main" val="0"/>
-            </a:ext>
-          </a:extLst>
-        </p:spPr>
-        <p:txBody>
-          <a:bodyPr/>
-          <a:lstStyle>
-            <a:lvl1pPr>
-              <a:defRPr sz="1000">
-                <a:solidFill>
-                  <a:srgbClr val="5E5C78"/>
-                </a:solidFill>
-              </a:defRPr>
-            </a:lvl1pPr>
-          </a:lstStyle>
-          <a:p>
-            <a:pPr algn="l"/>
-            <a:fld id="{F7021451-1387-4CA6-816F-3879F97B5CBC}" type="slidenum">
-              <a:rPr b="0" lang="en-US"/>
-              <a:t>19</a:t>
-            </a:fld>
-            <a:endParaRPr lang="en-US"/>
-          </a:p>
-        </p:txBody>
-      </p:sp>
-    </p:spTree>
-  </p:cSld>
-  <p:clrMapOvr>
-    <a:masterClrMapping/>
-  </p:clrMapOvr>
-</p:sld>
-</file>
-
-<file path=ppt/slides/slide2.xml><?xml version="1.0" encoding="utf-8"?>
-<p:sld xmlns:a="http://schemas.openxmlformats.org/drawingml/2006/main" xmlns:r="http://schemas.openxmlformats.org/officeDocument/2006/relationships" xmlns:p="http://schemas.openxmlformats.org/presentationml/2006/main">
-  <p:cSld name="Slide 2">
-    <p:spTree>
-      <p:nvGrpSpPr>
-        <p:cNvPr id="1" name=""/>
-        <p:cNvGrpSpPr/>
-        <p:nvPr/>
-      </p:nvGrpSpPr>
-      <p:grpSpPr>
-        <a:xfrm>
-          <a:off x="0" y="0"/>
-          <a:ext cx="0" cy="0"/>
-          <a:chOff x="0" y="0"/>
-          <a:chExt cx="0" cy="0"/>
-        </a:xfrm>
-      </p:grpSpPr>
-      <p:sp>
-        <p:nvSpPr>
-          <p:cNvPr id="2" name="Text 0"/>
-          <p:cNvSpPr/>
-          <p:nvPr>
-            <p:ph idx="101" type="title" hasCustomPrompt="1"/>
-          </p:nvPr>
-        </p:nvSpPr>
-        <p:spPr>
-          <a:xfrm>
-            <a:off x="548640" y="365760"/>
-            <a:ext cx="11064240" cy="822960"/>
-          </a:xfrm>
-          <a:prstGeom prst="rect">
-            <a:avLst/>
-          </a:prstGeom>
-          <a:noFill/>
-          <a:ln/>
-        </p:spPr>
-        <p:txBody>
-          <a:bodyPr wrap="square" lIns="0" tIns="0" rIns="0" bIns="0" rtlCol="0" anchor="t"/>
-          <a:lstStyle/>
-          <a:p>
-            <a:pPr algn="l" indent="0" marL="0">
-              <a:buNone/>
-            </a:pPr>
-            <a:r>
-              <a:rPr lang="en-US" sz="3200" b="1" dirty="0">
-                <a:solidFill>
-                  <a:schemeClr val="tx2"/>
-                </a:solidFill>
-              </a:rPr>
-              <a:t>What we will cover</a:t>
-            </a:r>
-            <a:endParaRPr lang="en-US" sz="3200" dirty="0"/>
-          </a:p>
-        </p:txBody>
-      </p:sp>
-      <p:sp>
-        <p:nvSpPr>
-          <p:cNvPr id="3" name="Agenda 01"/>
-          <p:cNvSpPr/>
-          <p:nvPr/>
-        </p:nvSpPr>
-        <p:spPr>
-          <a:xfrm>
-            <a:off x="548640" y="1463040"/>
-            <a:ext cx="5440680" cy="1325880"/>
-          </a:xfrm>
-          <a:prstGeom prst="roundRect">
-            <a:avLst>
-              <a:gd name="adj" fmla="val 6897"/>
-            </a:avLst>
-          </a:prstGeom>
-          <a:solidFill>
-            <a:srgbClr val="F6F4FB"/>
-          </a:solidFill>
-          <a:ln w="9525">
-            <a:solidFill>
-              <a:srgbClr val="DDD8EC"/>
-            </a:solidFill>
-            <a:prstDash val="solid"/>
-          </a:ln>
-        </p:spPr>
-      </p:sp>
-      <p:sp>
-        <p:nvSpPr>
-          <p:cNvPr id="4" name="Text 2"/>
-          <p:cNvSpPr txBox="1"/>
-          <p:nvPr/>
-        </p:nvSpPr>
-        <p:spPr>
-          <a:xfrm>
-            <a:off x="822960" y="1691640"/>
-            <a:ext cx="914400" cy="822960"/>
-          </a:xfrm>
-          <a:prstGeom prst="rect">
-            <a:avLst/>
-          </a:prstGeom>
-          <a:noFill/>
-          <a:ln/>
-        </p:spPr>
-        <p:txBody>
-          <a:bodyPr wrap="square" lIns="0" tIns="0" rIns="0" bIns="0" rtlCol="0" anchor="ctr"/>
-          <a:lstStyle/>
-          <a:p>
-            <a:pPr indent="0" marL="0">
-              <a:buNone/>
-            </a:pPr>
-            <a:r>
-              <a:rPr lang="en-US" sz="3600" b="1" dirty="0">
-                <a:solidFill>
-                  <a:srgbClr val="7E5BB5"/>
-                </a:solidFill>
-                <a:latin typeface="Arial" pitchFamily="34" charset="0"/>
-                <a:ea typeface="Arial" pitchFamily="34" charset="-122"/>
-                <a:cs typeface="Arial" pitchFamily="34" charset="-120"/>
-              </a:rPr>
-              <a:t>01</a:t>
-            </a:r>
-            <a:endParaRPr lang="en-US" sz="3600" dirty="0"/>
-          </a:p>
-        </p:txBody>
-      </p:sp>
-      <p:sp>
-        <p:nvSpPr>
-          <p:cNvPr id="5" name="Text 3"/>
-          <p:cNvSpPr txBox="1"/>
-          <p:nvPr/>
-        </p:nvSpPr>
-        <p:spPr>
-          <a:xfrm>
-            <a:off x="1874520" y="1664208"/>
-            <a:ext cx="3931920" cy="384048"/>
-          </a:xfrm>
-          <a:prstGeom prst="rect">
-            <a:avLst/>
-          </a:prstGeom>
-          <a:noFill/>
-          <a:ln/>
-        </p:spPr>
-        <p:txBody>
-          <a:bodyPr wrap="square" lIns="0" tIns="0" rIns="0" bIns="0" rtlCol="0" anchor="ctr"/>
-          <a:lstStyle/>
-          <a:p>
-            <a:pPr indent="0" marL="0">
-              <a:buNone/>
-            </a:pPr>
-            <a:r>
-              <a:rPr lang="en-US" sz="1800" b="1" dirty="0">
-                <a:solidFill>
-                  <a:schemeClr val="tx2"/>
-                </a:solidFill>
-              </a:rPr>
-              <a:t>The challenge</a:t>
-            </a:r>
-            <a:endParaRPr lang="en-US" sz="1800" dirty="0"/>
-          </a:p>
-        </p:txBody>
-      </p:sp>
-      <p:sp>
-        <p:nvSpPr>
-          <p:cNvPr id="6" name="Text 4"/>
-          <p:cNvSpPr txBox="1"/>
-          <p:nvPr/>
-        </p:nvSpPr>
-        <p:spPr>
-          <a:xfrm>
-            <a:off x="1874520" y="2066544"/>
-            <a:ext cx="3931920" cy="594360"/>
-          </a:xfrm>
-          <a:prstGeom prst="rect">
-            <a:avLst/>
-          </a:prstGeom>
-          <a:noFill/>
-          <a:ln/>
-        </p:spPr>
-        <p:txBody>
-          <a:bodyPr wrap="square" lIns="0" tIns="0" rIns="0" bIns="0" rtlCol="0" anchor="t"/>
-          <a:lstStyle/>
-          <a:p>
-            <a:pPr indent="0" marL="0">
-              <a:buNone/>
-            </a:pPr>
-            <a:r>
-              <a:rPr lang="en-US" sz="1400" dirty="0">
-                <a:solidFill>
-                  <a:schemeClr val="tx1"/>
-                </a:solidFill>
-              </a:rPr>
-              <a:t>Why health research is hard to see, fund and govern today</a:t>
-            </a:r>
-            <a:endParaRPr lang="en-US" sz="1400" dirty="0"/>
-          </a:p>
-        </p:txBody>
-      </p:sp>
-      <p:sp>
-        <p:nvSpPr>
-          <p:cNvPr id="7" name="Agenda 02"/>
-          <p:cNvSpPr/>
-          <p:nvPr/>
-        </p:nvSpPr>
-        <p:spPr>
-          <a:xfrm>
-            <a:off x="6172200" y="1463040"/>
-            <a:ext cx="5440680" cy="1325880"/>
-          </a:xfrm>
-          <a:prstGeom prst="roundRect">
-            <a:avLst>
-              <a:gd name="adj" fmla="val 6897"/>
-            </a:avLst>
-          </a:prstGeom>
-          <a:solidFill>
-            <a:srgbClr val="F6F4FB"/>
-          </a:solidFill>
-          <a:ln w="9525">
-            <a:solidFill>
-              <a:srgbClr val="DDD8EC"/>
-            </a:solidFill>
-            <a:prstDash val="solid"/>
-          </a:ln>
-        </p:spPr>
-      </p:sp>
-      <p:sp>
-        <p:nvSpPr>
-          <p:cNvPr id="8" name="Text 6"/>
-          <p:cNvSpPr txBox="1"/>
-          <p:nvPr/>
-        </p:nvSpPr>
-        <p:spPr>
-          <a:xfrm>
-            <a:off x="6446520" y="1691640"/>
-            <a:ext cx="914400" cy="822960"/>
-          </a:xfrm>
-          <a:prstGeom prst="rect">
-            <a:avLst/>
-          </a:prstGeom>
-          <a:noFill/>
-          <a:ln/>
-        </p:spPr>
-        <p:txBody>
-          <a:bodyPr wrap="square" lIns="0" tIns="0" rIns="0" bIns="0" rtlCol="0" anchor="ctr"/>
-          <a:lstStyle/>
-          <a:p>
-            <a:pPr indent="0" marL="0">
-              <a:buNone/>
-            </a:pPr>
-            <a:r>
-              <a:rPr lang="en-US" sz="3600" b="1" dirty="0">
-                <a:solidFill>
-                  <a:srgbClr val="2A9DC0"/>
-                </a:solidFill>
-                <a:latin typeface="Arial" pitchFamily="34" charset="0"/>
-                <a:ea typeface="Arial" pitchFamily="34" charset="-122"/>
-                <a:cs typeface="Arial" pitchFamily="34" charset="-120"/>
-              </a:rPr>
-              <a:t>02</a:t>
-            </a:r>
-            <a:endParaRPr lang="en-US" sz="3600" dirty="0"/>
-          </a:p>
-        </p:txBody>
-      </p:sp>
-      <p:sp>
-        <p:nvSpPr>
-          <p:cNvPr id="9" name="Text 7"/>
-          <p:cNvSpPr txBox="1"/>
-          <p:nvPr/>
-        </p:nvSpPr>
-        <p:spPr>
-          <a:xfrm>
-            <a:off x="7498080" y="1664208"/>
-            <a:ext cx="3931920" cy="384048"/>
-          </a:xfrm>
-          <a:prstGeom prst="rect">
-            <a:avLst/>
-          </a:prstGeom>
-          <a:noFill/>
-          <a:ln/>
-        </p:spPr>
-        <p:txBody>
-          <a:bodyPr wrap="square" lIns="0" tIns="0" rIns="0" bIns="0" rtlCol="0" anchor="ctr"/>
-          <a:lstStyle/>
-          <a:p>
-            <a:pPr indent="0" marL="0">
-              <a:buNone/>
-            </a:pPr>
-            <a:r>
-              <a:rPr lang="en-US" sz="1800" b="1" dirty="0">
-                <a:solidFill>
-                  <a:schemeClr val="tx2"/>
-                </a:solidFill>
-              </a:rPr>
-              <a:t>Our value proposition</a:t>
-            </a:r>
-            <a:endParaRPr lang="en-US" sz="1800" dirty="0"/>
-          </a:p>
-        </p:txBody>
-      </p:sp>
-      <p:sp>
-        <p:nvSpPr>
-          <p:cNvPr id="10" name="Text 8"/>
-          <p:cNvSpPr txBox="1"/>
-          <p:nvPr/>
-        </p:nvSpPr>
-        <p:spPr>
-          <a:xfrm>
-            <a:off x="7498080" y="2066544"/>
-            <a:ext cx="3931920" cy="594360"/>
-          </a:xfrm>
-          <a:prstGeom prst="rect">
-            <a:avLst/>
-          </a:prstGeom>
-          <a:noFill/>
-          <a:ln/>
-        </p:spPr>
-        <p:txBody>
-          <a:bodyPr wrap="square" lIns="0" tIns="0" rIns="0" bIns="0" rtlCol="0" anchor="t"/>
-          <a:lstStyle/>
-          <a:p>
-            <a:pPr indent="0" marL="0">
-              <a:buNone/>
-            </a:pPr>
-            <a:r>
-              <a:rPr lang="en-US" sz="1400" dirty="0">
-                <a:solidFill>
-                  <a:schemeClr val="tx1"/>
-                </a:solidFill>
-              </a:rPr>
-              <a:t>One platform for the full research lifecycle, built for four audiences</a:t>
-            </a:r>
-            <a:endParaRPr lang="en-US" sz="1400" dirty="0"/>
-          </a:p>
-        </p:txBody>
-      </p:sp>
-      <p:sp>
-        <p:nvSpPr>
-          <p:cNvPr id="11" name="Agenda 03"/>
-          <p:cNvSpPr/>
-          <p:nvPr/>
-        </p:nvSpPr>
-        <p:spPr>
-          <a:xfrm>
-            <a:off x="548640" y="3017520"/>
-            <a:ext cx="5440680" cy="1325880"/>
-          </a:xfrm>
-          <a:prstGeom prst="roundRect">
-            <a:avLst>
-              <a:gd name="adj" fmla="val 6897"/>
-            </a:avLst>
-          </a:prstGeom>
-          <a:solidFill>
-            <a:srgbClr val="F6F4FB"/>
-          </a:solidFill>
-          <a:ln w="9525">
-            <a:solidFill>
-              <a:srgbClr val="DDD8EC"/>
-            </a:solidFill>
-            <a:prstDash val="solid"/>
-          </a:ln>
-        </p:spPr>
-      </p:sp>
-      <p:sp>
-        <p:nvSpPr>
-          <p:cNvPr id="12" name="Text 10"/>
-          <p:cNvSpPr txBox="1"/>
-          <p:nvPr/>
-        </p:nvSpPr>
-        <p:spPr>
-          <a:xfrm>
-            <a:off x="822960" y="3246120"/>
-            <a:ext cx="914400" cy="822960"/>
-          </a:xfrm>
-          <a:prstGeom prst="rect">
-            <a:avLst/>
-          </a:prstGeom>
-          <a:noFill/>
-          <a:ln/>
-        </p:spPr>
-        <p:txBody>
-          <a:bodyPr wrap="square" lIns="0" tIns="0" rIns="0" bIns="0" rtlCol="0" anchor="ctr"/>
-          <a:lstStyle/>
-          <a:p>
-            <a:pPr indent="0" marL="0">
-              <a:buNone/>
-            </a:pPr>
-            <a:r>
-              <a:rPr lang="en-US" sz="3600" b="1" dirty="0">
-                <a:solidFill>
-                  <a:srgbClr val="7E5BB5"/>
-                </a:solidFill>
-                <a:latin typeface="Arial" pitchFamily="34" charset="0"/>
-                <a:ea typeface="Arial" pitchFamily="34" charset="-122"/>
-                <a:cs typeface="Arial" pitchFamily="34" charset="-120"/>
-              </a:rPr>
-              <a:t>03</a:t>
-            </a:r>
-            <a:endParaRPr lang="en-US" sz="3600" dirty="0"/>
-          </a:p>
-        </p:txBody>
-      </p:sp>
-      <p:sp>
-        <p:nvSpPr>
-          <p:cNvPr id="13" name="Text 11"/>
-          <p:cNvSpPr txBox="1"/>
-          <p:nvPr/>
-        </p:nvSpPr>
-        <p:spPr>
-          <a:xfrm>
-            <a:off x="1874520" y="3218688"/>
-            <a:ext cx="3931920" cy="384048"/>
-          </a:xfrm>
-          <a:prstGeom prst="rect">
-            <a:avLst/>
-          </a:prstGeom>
-          <a:noFill/>
-          <a:ln/>
-        </p:spPr>
-        <p:txBody>
-          <a:bodyPr wrap="square" lIns="0" tIns="0" rIns="0" bIns="0" rtlCol="0" anchor="ctr"/>
-          <a:lstStyle/>
-          <a:p>
-            <a:pPr indent="0" marL="0">
-              <a:buNone/>
-            </a:pPr>
-            <a:r>
-              <a:rPr lang="en-US" sz="1800" b="1" dirty="0">
-                <a:solidFill>
-                  <a:schemeClr val="tx2"/>
-                </a:solidFill>
-              </a:rPr>
-              <a:t>Product tour</a:t>
-            </a:r>
-            <a:endParaRPr lang="en-US" sz="1800" dirty="0"/>
-          </a:p>
-        </p:txBody>
-      </p:sp>
-      <p:sp>
-        <p:nvSpPr>
-          <p:cNvPr id="14" name="Text 12"/>
-          <p:cNvSpPr txBox="1"/>
-          <p:nvPr/>
-        </p:nvSpPr>
-        <p:spPr>
-          <a:xfrm>
-            <a:off x="1874520" y="3621024"/>
-            <a:ext cx="3931920" cy="594360"/>
-          </a:xfrm>
-          <a:prstGeom prst="rect">
-            <a:avLst/>
-          </a:prstGeom>
-          <a:noFill/>
-          <a:ln/>
-        </p:spPr>
-        <p:txBody>
-          <a:bodyPr wrap="square" lIns="0" tIns="0" rIns="0" bIns="0" rtlCol="0" anchor="t"/>
-          <a:lstStyle/>
-          <a:p>
-            <a:pPr indent="0" marL="0">
-              <a:buNone/>
-            </a:pPr>
-            <a:r>
-              <a:rPr lang="en-US" sz="1400" dirty="0">
-                <a:solidFill>
-                  <a:schemeClr val="tx1"/>
-                </a:solidFill>
-              </a:rPr>
-              <a:t>Real screens: dashboards, publications, manuscripts, proposals, ethics and trials</a:t>
-            </a:r>
-            <a:endParaRPr lang="en-US" sz="1400" dirty="0"/>
-          </a:p>
-        </p:txBody>
-      </p:sp>
-      <p:sp>
-        <p:nvSpPr>
-          <p:cNvPr id="15" name="Agenda 04"/>
-          <p:cNvSpPr/>
-          <p:nvPr/>
-        </p:nvSpPr>
-        <p:spPr>
-          <a:xfrm>
-            <a:off x="6172200" y="3017520"/>
-            <a:ext cx="5440680" cy="1325880"/>
-          </a:xfrm>
-          <a:prstGeom prst="roundRect">
-            <a:avLst>
-              <a:gd name="adj" fmla="val 6897"/>
-            </a:avLst>
-          </a:prstGeom>
-          <a:solidFill>
-            <a:srgbClr val="EFEAF8"/>
-          </a:solidFill>
-          <a:ln w="9525">
-            <a:solidFill>
-              <a:srgbClr val="C9B9E8"/>
-            </a:solidFill>
-            <a:prstDash val="solid"/>
-          </a:ln>
-        </p:spPr>
-      </p:sp>
-      <p:sp>
-        <p:nvSpPr>
-          <p:cNvPr id="16" name="Text 14"/>
-          <p:cNvSpPr txBox="1"/>
-          <p:nvPr/>
-        </p:nvSpPr>
-        <p:spPr>
-          <a:xfrm>
-            <a:off x="6446520" y="3246120"/>
-            <a:ext cx="914400" cy="822960"/>
-          </a:xfrm>
-          <a:prstGeom prst="rect">
-            <a:avLst/>
-          </a:prstGeom>
-          <a:noFill/>
-          <a:ln/>
-        </p:spPr>
-        <p:txBody>
-          <a:bodyPr wrap="square" lIns="0" tIns="0" rIns="0" bIns="0" rtlCol="0" anchor="ctr"/>
-          <a:lstStyle/>
-          <a:p>
-            <a:pPr indent="0" marL="0">
-              <a:buNone/>
-            </a:pPr>
-            <a:r>
-              <a:rPr lang="en-US" sz="3600" b="1" dirty="0">
-                <a:solidFill>
-                  <a:srgbClr val="2A9DC0"/>
-                </a:solidFill>
-                <a:latin typeface="Arial" pitchFamily="34" charset="0"/>
-                <a:ea typeface="Arial" pitchFamily="34" charset="-122"/>
-                <a:cs typeface="Arial" pitchFamily="34" charset="-120"/>
-              </a:rPr>
-              <a:t>04</a:t>
-            </a:r>
-            <a:endParaRPr lang="en-US" sz="3600" dirty="0"/>
-          </a:p>
-        </p:txBody>
-      </p:sp>
-      <p:sp>
-        <p:nvSpPr>
-          <p:cNvPr id="17" name="Text 15"/>
-          <p:cNvSpPr txBox="1"/>
-          <p:nvPr/>
-        </p:nvSpPr>
-        <p:spPr>
-          <a:xfrm>
-            <a:off x="7498080" y="3218688"/>
-            <a:ext cx="3931920" cy="384048"/>
-          </a:xfrm>
-          <a:prstGeom prst="rect">
-            <a:avLst/>
-          </a:prstGeom>
-          <a:noFill/>
-          <a:ln/>
-        </p:spPr>
-        <p:txBody>
-          <a:bodyPr wrap="square" lIns="0" tIns="0" rIns="0" bIns="0" rtlCol="0" anchor="ctr"/>
-          <a:lstStyle/>
-          <a:p>
-            <a:pPr indent="0" marL="0">
-              <a:buNone/>
-            </a:pPr>
-            <a:r>
-              <a:rPr lang="en-US" sz="1800" b="1" dirty="0">
-                <a:solidFill>
-                  <a:schemeClr val="tx2"/>
-                </a:solidFill>
-              </a:rPr>
-              <a:t>AI integration</a:t>
-            </a:r>
-            <a:endParaRPr lang="en-US" sz="1800" dirty="0"/>
-          </a:p>
-        </p:txBody>
-      </p:sp>
-      <p:sp>
-        <p:nvSpPr>
-          <p:cNvPr id="18" name="Text 16"/>
-          <p:cNvSpPr txBox="1"/>
-          <p:nvPr/>
-        </p:nvSpPr>
-        <p:spPr>
-          <a:xfrm>
-            <a:off x="7498080" y="3621024"/>
-            <a:ext cx="3931920" cy="594360"/>
-          </a:xfrm>
-          <a:prstGeom prst="rect">
-            <a:avLst/>
-          </a:prstGeom>
-          <a:noFill/>
-          <a:ln/>
-        </p:spPr>
-        <p:txBody>
-          <a:bodyPr wrap="square" lIns="0" tIns="0" rIns="0" bIns="0" rtlCol="0" anchor="t"/>
-          <a:lstStyle/>
-          <a:p>
-            <a:pPr indent="0" marL="0">
-              <a:buNone/>
-            </a:pPr>
-            <a:r>
-              <a:rPr lang="en-US" sz="1400" dirty="0">
-                <a:solidFill>
-                  <a:schemeClr val="tx1"/>
-                </a:solidFill>
-              </a:rPr>
-              <a:t>What the built-in AI does today, how it is governed, and what comes next</a:t>
-            </a:r>
-            <a:endParaRPr lang="en-US" sz="1400" dirty="0"/>
-          </a:p>
-        </p:txBody>
-      </p:sp>
-      <p:sp>
-        <p:nvSpPr>
-          <p:cNvPr id="19" name="Agenda 05"/>
-          <p:cNvSpPr/>
-          <p:nvPr/>
-        </p:nvSpPr>
-        <p:spPr>
-          <a:xfrm>
-            <a:off x="548640" y="4572000"/>
-            <a:ext cx="5440680" cy="1325880"/>
-          </a:xfrm>
-          <a:prstGeom prst="roundRect">
-            <a:avLst>
-              <a:gd name="adj" fmla="val 6897"/>
-            </a:avLst>
-          </a:prstGeom>
-          <a:solidFill>
-            <a:srgbClr val="F6F4FB"/>
-          </a:solidFill>
-          <a:ln w="9525">
-            <a:solidFill>
-              <a:srgbClr val="DDD8EC"/>
-            </a:solidFill>
-            <a:prstDash val="solid"/>
-          </a:ln>
-        </p:spPr>
-      </p:sp>
-      <p:sp>
-        <p:nvSpPr>
-          <p:cNvPr id="20" name="Text 18"/>
-          <p:cNvSpPr txBox="1"/>
-          <p:nvPr/>
-        </p:nvSpPr>
-        <p:spPr>
-          <a:xfrm>
-            <a:off x="822960" y="4800600"/>
-            <a:ext cx="914400" cy="822960"/>
-          </a:xfrm>
-          <a:prstGeom prst="rect">
-            <a:avLst/>
-          </a:prstGeom>
-          <a:noFill/>
-          <a:ln/>
-        </p:spPr>
-        <p:txBody>
-          <a:bodyPr wrap="square" lIns="0" tIns="0" rIns="0" bIns="0" rtlCol="0" anchor="ctr"/>
-          <a:lstStyle/>
-          <a:p>
-            <a:pPr indent="0" marL="0">
-              <a:buNone/>
-            </a:pPr>
-            <a:r>
-              <a:rPr lang="en-US" sz="3600" b="1" dirty="0">
-                <a:solidFill>
-                  <a:srgbClr val="7E5BB5"/>
-                </a:solidFill>
-                <a:latin typeface="Arial" pitchFamily="34" charset="0"/>
-                <a:ea typeface="Arial" pitchFamily="34" charset="-122"/>
-                <a:cs typeface="Arial" pitchFamily="34" charset="-120"/>
-              </a:rPr>
-              <a:t>05</a:t>
-            </a:r>
-            <a:endParaRPr lang="en-US" sz="3600" dirty="0"/>
-          </a:p>
-        </p:txBody>
-      </p:sp>
-      <p:sp>
-        <p:nvSpPr>
-          <p:cNvPr id="21" name="Text 19"/>
-          <p:cNvSpPr txBox="1"/>
-          <p:nvPr/>
-        </p:nvSpPr>
-        <p:spPr>
-          <a:xfrm>
-            <a:off x="1874520" y="4773168"/>
-            <a:ext cx="3931920" cy="384048"/>
-          </a:xfrm>
-          <a:prstGeom prst="rect">
-            <a:avLst/>
-          </a:prstGeom>
-          <a:noFill/>
-          <a:ln/>
-        </p:spPr>
-        <p:txBody>
-          <a:bodyPr wrap="square" lIns="0" tIns="0" rIns="0" bIns="0" rtlCol="0" anchor="ctr"/>
-          <a:lstStyle/>
-          <a:p>
-            <a:pPr indent="0" marL="0">
-              <a:buNone/>
-            </a:pPr>
-            <a:r>
-              <a:rPr lang="en-US" sz="1800" b="1" dirty="0">
-                <a:solidFill>
-                  <a:schemeClr val="tx2"/>
-                </a:solidFill>
-              </a:rPr>
-              <a:t>Trust &amp; deployment</a:t>
-            </a:r>
-            <a:endParaRPr lang="en-US" sz="1800" dirty="0"/>
-          </a:p>
-        </p:txBody>
-      </p:sp>
-      <p:sp>
-        <p:nvSpPr>
-          <p:cNvPr id="22" name="Text 20"/>
-          <p:cNvSpPr txBox="1"/>
-          <p:nvPr/>
-        </p:nvSpPr>
-        <p:spPr>
-          <a:xfrm>
-            <a:off x="1874520" y="5175504"/>
-            <a:ext cx="3931920" cy="594360"/>
-          </a:xfrm>
-          <a:prstGeom prst="rect">
-            <a:avLst/>
-          </a:prstGeom>
-          <a:noFill/>
-          <a:ln/>
-        </p:spPr>
-        <p:txBody>
-          <a:bodyPr wrap="square" lIns="0" tIns="0" rIns="0" bIns="0" rtlCol="0" anchor="t"/>
-          <a:lstStyle/>
-          <a:p>
-            <a:pPr indent="0" marL="0">
-              <a:buNone/>
-            </a:pPr>
-            <a:r>
-              <a:rPr lang="en-US" sz="1400" dirty="0">
-                <a:solidFill>
-                  <a:schemeClr val="tx1"/>
-                </a:solidFill>
-              </a:rPr>
-              <a:t>Integrations, security, hosting options and the change for your institution</a:t>
-            </a:r>
-            <a:endParaRPr lang="en-US" sz="1400" dirty="0"/>
-          </a:p>
-        </p:txBody>
-      </p:sp>
-      <p:sp>
-        <p:nvSpPr>
-          <p:cNvPr id="23" name="Agenda 06"/>
-          <p:cNvSpPr/>
-          <p:nvPr/>
-        </p:nvSpPr>
-        <p:spPr>
-          <a:xfrm>
-            <a:off x="6172200" y="4572000"/>
-            <a:ext cx="5440680" cy="1325880"/>
-          </a:xfrm>
-          <a:prstGeom prst="roundRect">
-            <a:avLst>
-              <a:gd name="adj" fmla="val 6897"/>
-            </a:avLst>
-          </a:prstGeom>
-          <a:solidFill>
-            <a:srgbClr val="F6F4FB"/>
-          </a:solidFill>
-          <a:ln w="9525">
-            <a:solidFill>
-              <a:srgbClr val="DDD8EC"/>
-            </a:solidFill>
-            <a:prstDash val="solid"/>
-          </a:ln>
-        </p:spPr>
-      </p:sp>
-      <p:sp>
-        <p:nvSpPr>
-          <p:cNvPr id="24" name="Text 22"/>
-          <p:cNvSpPr txBox="1"/>
-          <p:nvPr/>
-        </p:nvSpPr>
-        <p:spPr>
-          <a:xfrm>
-            <a:off x="6446520" y="4800600"/>
-            <a:ext cx="914400" cy="822960"/>
-          </a:xfrm>
-          <a:prstGeom prst="rect">
-            <a:avLst/>
-          </a:prstGeom>
-          <a:noFill/>
-          <a:ln/>
-        </p:spPr>
-        <p:txBody>
-          <a:bodyPr wrap="square" lIns="0" tIns="0" rIns="0" bIns="0" rtlCol="0" anchor="ctr"/>
-          <a:lstStyle/>
-          <a:p>
-            <a:pPr indent="0" marL="0">
-              <a:buNone/>
-            </a:pPr>
-            <a:r>
-              <a:rPr lang="en-US" sz="3600" b="1" dirty="0">
-                <a:solidFill>
-                  <a:srgbClr val="2A9DC0"/>
-                </a:solidFill>
-                <a:latin typeface="Arial" pitchFamily="34" charset="0"/>
-                <a:ea typeface="Arial" pitchFamily="34" charset="-122"/>
-                <a:cs typeface="Arial" pitchFamily="34" charset="-120"/>
-              </a:rPr>
-              <a:t>06</a:t>
-            </a:r>
-            <a:endParaRPr lang="en-US" sz="3600" dirty="0"/>
-          </a:p>
-        </p:txBody>
-      </p:sp>
-      <p:sp>
-        <p:nvSpPr>
-          <p:cNvPr id="25" name="Text 23"/>
-          <p:cNvSpPr txBox="1"/>
-          <p:nvPr/>
-        </p:nvSpPr>
-        <p:spPr>
-          <a:xfrm>
-            <a:off x="7498080" y="4773168"/>
-            <a:ext cx="3931920" cy="384048"/>
-          </a:xfrm>
-          <a:prstGeom prst="rect">
-            <a:avLst/>
-          </a:prstGeom>
-          <a:noFill/>
-          <a:ln/>
-        </p:spPr>
-        <p:txBody>
-          <a:bodyPr wrap="square" lIns="0" tIns="0" rIns="0" bIns="0" rtlCol="0" anchor="ctr"/>
-          <a:lstStyle/>
-          <a:p>
-            <a:pPr indent="0" marL="0">
-              <a:buNone/>
-            </a:pPr>
-            <a:r>
-              <a:rPr lang="en-US" sz="1800" b="1" dirty="0">
-                <a:solidFill>
-                  <a:schemeClr val="tx2"/>
-                </a:solidFill>
-              </a:rPr>
-              <a:t>Getting started</a:t>
-            </a:r>
-            <a:endParaRPr lang="en-US" sz="1800" dirty="0"/>
-          </a:p>
-        </p:txBody>
-      </p:sp>
-      <p:sp>
-        <p:nvSpPr>
-          <p:cNvPr id="26" name="Text 24"/>
-          <p:cNvSpPr txBox="1"/>
-          <p:nvPr/>
-        </p:nvSpPr>
-        <p:spPr>
-          <a:xfrm>
-            <a:off x="7498080" y="5175504"/>
-            <a:ext cx="3931920" cy="594360"/>
-          </a:xfrm>
-          <a:prstGeom prst="rect">
-            <a:avLst/>
-          </a:prstGeom>
-          <a:noFill/>
-          <a:ln/>
-        </p:spPr>
-        <p:txBody>
-          <a:bodyPr wrap="square" lIns="0" tIns="0" rIns="0" bIns="0" rtlCol="0" anchor="t"/>
-          <a:lstStyle/>
-          <a:p>
-            <a:pPr indent="0" marL="0">
-              <a:buNone/>
-            </a:pPr>
-            <a:r>
-              <a:rPr lang="en-US" sz="1400" dirty="0">
-                <a:solidFill>
-                  <a:schemeClr val="tx1"/>
-                </a:solidFill>
-              </a:rPr>
-              <a:t>Onboarding plan and next steps toward a pilot</a:t>
-            </a:r>
-            <a:endParaRPr lang="en-US" sz="1400" dirty="0"/>
-          </a:p>
-        </p:txBody>
-      </p:sp>
-      <p:sp>
-        <p:nvSpPr>
-          <p:cNvPr id="25" name="Slide Number Placeholder 0"/>
-          <p:cNvSpPr>
-            <a:spLocks noGrp="1"/>
-          </p:cNvSpPr>
-          <p:nvPr>
-            <p:ph type="sldNum" sz="quarter" idx="4294967295"/>
-          </p:nvPr>
-        </p:nvSpPr>
-        <p:spPr>
-          <a:xfrm>
-            <a:off x="548640" y="6400800"/>
-            <a:ext cx="548640" cy="274320"/>
-          </a:xfrm>
-          <a:prstGeom prst="rect">
-            <a:avLst/>
-          </a:prstGeom>
-          <a:extLst>
-            <a:ext uri="{C572A759-6A51-4108-AA02-DFA0A04FC94B}">
-              <ma14:wrappingTextBoxFlag xmlns:ma14="http://schemas.microsoft.com/office/mac/drawingml/2011/main" val="0"/>
-            </a:ext>
-          </a:extLst>
-        </p:spPr>
-        <p:txBody>
-          <a:bodyPr/>
-          <a:lstStyle>
-            <a:lvl1pPr>
-              <a:defRPr sz="1000">
-                <a:solidFill>
-                  <a:srgbClr val="5E5C78"/>
-                </a:solidFill>
-              </a:defRPr>
-            </a:lvl1pPr>
-          </a:lstStyle>
-          <a:p>
-            <a:pPr algn="l"/>
-            <a:fld id="{F7021451-1387-4CA6-816F-3879F97B5CBC}" type="slidenum">
-              <a:rPr b="0" lang="en-US"/>
-              <a:t>2</a:t>
-            </a:fld>
-            <a:endParaRPr lang="en-US"/>
-          </a:p>
-        </p:txBody>
-      </p:sp>
-    </p:spTree>
-  </p:cSld>
-  <p:clrMapOvr>
-    <a:masterClrMapping/>
-  </p:clrMapOvr>
-</p:sld>
-</file>
-
-<file path=ppt/slides/slide20.xml><?xml version="1.0" encoding="utf-8"?>
-<p:sld xmlns:a="http://schemas.openxmlformats.org/drawingml/2006/main" xmlns:r="http://schemas.openxmlformats.org/officeDocument/2006/relationships" xmlns:p="http://schemas.openxmlformats.org/presentationml/2006/main">
-  <p:cSld name="Slide 20">
-    <p:spTree>
-      <p:nvGrpSpPr>
-        <p:cNvPr id="1" name=""/>
-        <p:cNvGrpSpPr/>
-        <p:nvPr/>
-      </p:nvGrpSpPr>
-      <p:grpSpPr>
-        <a:xfrm>
-          <a:off x="0" y="0"/>
-          <a:ext cx="0" cy="0"/>
-          <a:chOff x="0" y="0"/>
-          <a:chExt cx="0" cy="0"/>
-        </a:xfrm>
-      </p:grpSpPr>
-      <p:sp>
-        <p:nvSpPr>
-          <p:cNvPr id="2" name="Text 0"/>
-          <p:cNvSpPr/>
-          <p:nvPr>
-            <p:ph idx="101" type="title" hasCustomPrompt="1"/>
-          </p:nvPr>
-        </p:nvSpPr>
-        <p:spPr>
-          <a:xfrm>
-            <a:off x="548640" y="365760"/>
-            <a:ext cx="11064240" cy="822960"/>
-          </a:xfrm>
-          <a:prstGeom prst="rect">
-            <a:avLst/>
-          </a:prstGeom>
-          <a:noFill/>
-          <a:ln/>
-        </p:spPr>
-        <p:txBody>
-          <a:bodyPr wrap="square" lIns="0" tIns="0" rIns="0" bIns="0" rtlCol="0" anchor="t"/>
-          <a:lstStyle/>
-          <a:p>
-            <a:pPr algn="l" indent="0" marL="0">
-              <a:buNone/>
-            </a:pPr>
-            <a:r>
-              <a:rPr lang="en-US" sz="3200" b="1" dirty="0">
-                <a:solidFill>
-                  <a:schemeClr val="tx2"/>
-                </a:solidFill>
-              </a:rPr>
               <a:t>What changes for your institution</a:t>
             </a:r>
             <a:endParaRPr lang="en-US" sz="3200" dirty="0"/>
@@ -12632,7 +9405,7 @@
       </p:sp>
       <p:graphicFrame>
         <p:nvGraphicFramePr>
-          <p:cNvPr id="21" name="Before and after"/>
+          <p:cNvPr id="19" name="Before and after"/>
           <p:cNvGraphicFramePr>
             <a:graphicFrameLocks noGrp="1"/>
           </p:cNvGraphicFramePr>
@@ -14295,7 +11068,7 @@
             <a:pPr algn="l"/>
             <a:fld id="{F7021451-1387-4CA6-816F-3879F97B5CBC}" type="slidenum">
               <a:rPr b="0" lang="en-US"/>
-              <a:t>20</a:t>
+              <a:t>18</a:t>
             </a:fld>
             <a:endParaRPr lang="en-US"/>
           </a:p>
@@ -14309,9 +11082,9 @@
 </p:sld>
 </file>
 
-<file path=ppt/slides/slide21.xml><?xml version="1.0" encoding="utf-8"?>
+<file path=ppt/slides/slide19.xml><?xml version="1.0" encoding="utf-8"?>
 <p:sld xmlns:a="http://schemas.openxmlformats.org/drawingml/2006/main" xmlns:r="http://schemas.openxmlformats.org/officeDocument/2006/relationships" xmlns:p="http://schemas.openxmlformats.org/presentationml/2006/main">
-  <p:cSld name="Slide 21">
+  <p:cSld name="Slide 19">
     <p:spTree>
       <p:nvGrpSpPr>
         <p:cNvPr id="1" name=""/>
@@ -15321,7 +12094,7 @@
             <a:pPr algn="l"/>
             <a:fld id="{F7021451-1387-4CA6-816F-3879F97B5CBC}" type="slidenum">
               <a:rPr b="0" lang="en-US"/>
-              <a:t>21</a:t>
+              <a:t>19</a:t>
             </a:fld>
             <a:endParaRPr lang="en-US"/>
           </a:p>
@@ -15335,9 +12108,945 @@
 </p:sld>
 </file>
 
-<file path=ppt/slides/slide22.xml><?xml version="1.0" encoding="utf-8"?>
+<file path=ppt/slides/slide2.xml><?xml version="1.0" encoding="utf-8"?>
 <p:sld xmlns:a="http://schemas.openxmlformats.org/drawingml/2006/main" xmlns:r="http://schemas.openxmlformats.org/officeDocument/2006/relationships" xmlns:p="http://schemas.openxmlformats.org/presentationml/2006/main">
-  <p:cSld name="Slide 22">
+  <p:cSld name="Slide 2">
+    <p:spTree>
+      <p:nvGrpSpPr>
+        <p:cNvPr id="1" name=""/>
+        <p:cNvGrpSpPr/>
+        <p:nvPr/>
+      </p:nvGrpSpPr>
+      <p:grpSpPr>
+        <a:xfrm>
+          <a:off x="0" y="0"/>
+          <a:ext cx="0" cy="0"/>
+          <a:chOff x="0" y="0"/>
+          <a:chExt cx="0" cy="0"/>
+        </a:xfrm>
+      </p:grpSpPr>
+      <p:sp>
+        <p:nvSpPr>
+          <p:cNvPr id="2" name="Text 0"/>
+          <p:cNvSpPr/>
+          <p:nvPr>
+            <p:ph idx="101" type="title" hasCustomPrompt="1"/>
+          </p:nvPr>
+        </p:nvSpPr>
+        <p:spPr>
+          <a:xfrm>
+            <a:off x="548640" y="365760"/>
+            <a:ext cx="11064240" cy="822960"/>
+          </a:xfrm>
+          <a:prstGeom prst="rect">
+            <a:avLst/>
+          </a:prstGeom>
+          <a:noFill/>
+          <a:ln/>
+        </p:spPr>
+        <p:txBody>
+          <a:bodyPr wrap="square" lIns="0" tIns="0" rIns="0" bIns="0" rtlCol="0" anchor="t"/>
+          <a:lstStyle/>
+          <a:p>
+            <a:pPr algn="l" indent="0" marL="0">
+              <a:buNone/>
+            </a:pPr>
+            <a:r>
+              <a:rPr lang="en-US" sz="3200" b="1" dirty="0">
+                <a:solidFill>
+                  <a:schemeClr val="tx2"/>
+                </a:solidFill>
+              </a:rPr>
+              <a:t>What we will cover</a:t>
+            </a:r>
+            <a:endParaRPr lang="en-US" sz="3200" dirty="0"/>
+          </a:p>
+        </p:txBody>
+      </p:sp>
+      <p:sp>
+        <p:nvSpPr>
+          <p:cNvPr id="3" name="Agenda 01"/>
+          <p:cNvSpPr/>
+          <p:nvPr/>
+        </p:nvSpPr>
+        <p:spPr>
+          <a:xfrm>
+            <a:off x="548640" y="1463040"/>
+            <a:ext cx="5440680" cy="1325880"/>
+          </a:xfrm>
+          <a:prstGeom prst="roundRect">
+            <a:avLst>
+              <a:gd name="adj" fmla="val 6897"/>
+            </a:avLst>
+          </a:prstGeom>
+          <a:solidFill>
+            <a:srgbClr val="F6F4FB"/>
+          </a:solidFill>
+          <a:ln w="9525">
+            <a:solidFill>
+              <a:srgbClr val="DDD8EC"/>
+            </a:solidFill>
+            <a:prstDash val="solid"/>
+          </a:ln>
+        </p:spPr>
+      </p:sp>
+      <p:sp>
+        <p:nvSpPr>
+          <p:cNvPr id="4" name="Text 2"/>
+          <p:cNvSpPr txBox="1"/>
+          <p:nvPr/>
+        </p:nvSpPr>
+        <p:spPr>
+          <a:xfrm>
+            <a:off x="822960" y="1691640"/>
+            <a:ext cx="914400" cy="822960"/>
+          </a:xfrm>
+          <a:prstGeom prst="rect">
+            <a:avLst/>
+          </a:prstGeom>
+          <a:noFill/>
+          <a:ln/>
+        </p:spPr>
+        <p:txBody>
+          <a:bodyPr wrap="square" lIns="0" tIns="0" rIns="0" bIns="0" rtlCol="0" anchor="ctr"/>
+          <a:lstStyle/>
+          <a:p>
+            <a:pPr indent="0" marL="0">
+              <a:buNone/>
+            </a:pPr>
+            <a:r>
+              <a:rPr lang="en-US" sz="3600" b="1" dirty="0">
+                <a:solidFill>
+                  <a:srgbClr val="7E5BB5"/>
+                </a:solidFill>
+                <a:latin typeface="Arial" pitchFamily="34" charset="0"/>
+                <a:ea typeface="Arial" pitchFamily="34" charset="-122"/>
+                <a:cs typeface="Arial" pitchFamily="34" charset="-120"/>
+              </a:rPr>
+              <a:t>01</a:t>
+            </a:r>
+            <a:endParaRPr lang="en-US" sz="3600" dirty="0"/>
+          </a:p>
+        </p:txBody>
+      </p:sp>
+      <p:sp>
+        <p:nvSpPr>
+          <p:cNvPr id="5" name="Text 3"/>
+          <p:cNvSpPr txBox="1"/>
+          <p:nvPr/>
+        </p:nvSpPr>
+        <p:spPr>
+          <a:xfrm>
+            <a:off x="1874520" y="1664208"/>
+            <a:ext cx="3931920" cy="384048"/>
+          </a:xfrm>
+          <a:prstGeom prst="rect">
+            <a:avLst/>
+          </a:prstGeom>
+          <a:noFill/>
+          <a:ln/>
+        </p:spPr>
+        <p:txBody>
+          <a:bodyPr wrap="square" lIns="0" tIns="0" rIns="0" bIns="0" rtlCol="0" anchor="ctr"/>
+          <a:lstStyle/>
+          <a:p>
+            <a:pPr indent="0" marL="0">
+              <a:buNone/>
+            </a:pPr>
+            <a:r>
+              <a:rPr lang="en-US" sz="1800" b="1" dirty="0">
+                <a:solidFill>
+                  <a:schemeClr val="tx2"/>
+                </a:solidFill>
+              </a:rPr>
+              <a:t>The challenge</a:t>
+            </a:r>
+            <a:endParaRPr lang="en-US" sz="1800" dirty="0"/>
+          </a:p>
+        </p:txBody>
+      </p:sp>
+      <p:sp>
+        <p:nvSpPr>
+          <p:cNvPr id="6" name="Text 4"/>
+          <p:cNvSpPr txBox="1"/>
+          <p:nvPr/>
+        </p:nvSpPr>
+        <p:spPr>
+          <a:xfrm>
+            <a:off x="1874520" y="2066544"/>
+            <a:ext cx="3931920" cy="594360"/>
+          </a:xfrm>
+          <a:prstGeom prst="rect">
+            <a:avLst/>
+          </a:prstGeom>
+          <a:noFill/>
+          <a:ln/>
+        </p:spPr>
+        <p:txBody>
+          <a:bodyPr wrap="square" lIns="0" tIns="0" rIns="0" bIns="0" rtlCol="0" anchor="t"/>
+          <a:lstStyle/>
+          <a:p>
+            <a:pPr indent="0" marL="0">
+              <a:buNone/>
+            </a:pPr>
+            <a:r>
+              <a:rPr lang="en-US" sz="1400" dirty="0">
+                <a:solidFill>
+                  <a:schemeClr val="tx1"/>
+                </a:solidFill>
+              </a:rPr>
+              <a:t>Why health research is hard to see, fund and govern today</a:t>
+            </a:r>
+            <a:endParaRPr lang="en-US" sz="1400" dirty="0"/>
+          </a:p>
+        </p:txBody>
+      </p:sp>
+      <p:sp>
+        <p:nvSpPr>
+          <p:cNvPr id="7" name="Agenda 02"/>
+          <p:cNvSpPr/>
+          <p:nvPr/>
+        </p:nvSpPr>
+        <p:spPr>
+          <a:xfrm>
+            <a:off x="6172200" y="1463040"/>
+            <a:ext cx="5440680" cy="1325880"/>
+          </a:xfrm>
+          <a:prstGeom prst="roundRect">
+            <a:avLst>
+              <a:gd name="adj" fmla="val 6897"/>
+            </a:avLst>
+          </a:prstGeom>
+          <a:solidFill>
+            <a:srgbClr val="F6F4FB"/>
+          </a:solidFill>
+          <a:ln w="9525">
+            <a:solidFill>
+              <a:srgbClr val="DDD8EC"/>
+            </a:solidFill>
+            <a:prstDash val="solid"/>
+          </a:ln>
+        </p:spPr>
+      </p:sp>
+      <p:sp>
+        <p:nvSpPr>
+          <p:cNvPr id="8" name="Text 6"/>
+          <p:cNvSpPr txBox="1"/>
+          <p:nvPr/>
+        </p:nvSpPr>
+        <p:spPr>
+          <a:xfrm>
+            <a:off x="6446520" y="1691640"/>
+            <a:ext cx="914400" cy="822960"/>
+          </a:xfrm>
+          <a:prstGeom prst="rect">
+            <a:avLst/>
+          </a:prstGeom>
+          <a:noFill/>
+          <a:ln/>
+        </p:spPr>
+        <p:txBody>
+          <a:bodyPr wrap="square" lIns="0" tIns="0" rIns="0" bIns="0" rtlCol="0" anchor="ctr"/>
+          <a:lstStyle/>
+          <a:p>
+            <a:pPr indent="0" marL="0">
+              <a:buNone/>
+            </a:pPr>
+            <a:r>
+              <a:rPr lang="en-US" sz="3600" b="1" dirty="0">
+                <a:solidFill>
+                  <a:srgbClr val="2A9DC0"/>
+                </a:solidFill>
+                <a:latin typeface="Arial" pitchFamily="34" charset="0"/>
+                <a:ea typeface="Arial" pitchFamily="34" charset="-122"/>
+                <a:cs typeface="Arial" pitchFamily="34" charset="-120"/>
+              </a:rPr>
+              <a:t>02</a:t>
+            </a:r>
+            <a:endParaRPr lang="en-US" sz="3600" dirty="0"/>
+          </a:p>
+        </p:txBody>
+      </p:sp>
+      <p:sp>
+        <p:nvSpPr>
+          <p:cNvPr id="9" name="Text 7"/>
+          <p:cNvSpPr txBox="1"/>
+          <p:nvPr/>
+        </p:nvSpPr>
+        <p:spPr>
+          <a:xfrm>
+            <a:off x="7498080" y="1664208"/>
+            <a:ext cx="3931920" cy="384048"/>
+          </a:xfrm>
+          <a:prstGeom prst="rect">
+            <a:avLst/>
+          </a:prstGeom>
+          <a:noFill/>
+          <a:ln/>
+        </p:spPr>
+        <p:txBody>
+          <a:bodyPr wrap="square" lIns="0" tIns="0" rIns="0" bIns="0" rtlCol="0" anchor="ctr"/>
+          <a:lstStyle/>
+          <a:p>
+            <a:pPr indent="0" marL="0">
+              <a:buNone/>
+            </a:pPr>
+            <a:r>
+              <a:rPr lang="en-US" sz="1800" b="1" dirty="0">
+                <a:solidFill>
+                  <a:schemeClr val="tx2"/>
+                </a:solidFill>
+              </a:rPr>
+              <a:t>Our value proposition</a:t>
+            </a:r>
+            <a:endParaRPr lang="en-US" sz="1800" dirty="0"/>
+          </a:p>
+        </p:txBody>
+      </p:sp>
+      <p:sp>
+        <p:nvSpPr>
+          <p:cNvPr id="10" name="Text 8"/>
+          <p:cNvSpPr txBox="1"/>
+          <p:nvPr/>
+        </p:nvSpPr>
+        <p:spPr>
+          <a:xfrm>
+            <a:off x="7498080" y="2066544"/>
+            <a:ext cx="3931920" cy="594360"/>
+          </a:xfrm>
+          <a:prstGeom prst="rect">
+            <a:avLst/>
+          </a:prstGeom>
+          <a:noFill/>
+          <a:ln/>
+        </p:spPr>
+        <p:txBody>
+          <a:bodyPr wrap="square" lIns="0" tIns="0" rIns="0" bIns="0" rtlCol="0" anchor="t"/>
+          <a:lstStyle/>
+          <a:p>
+            <a:pPr indent="0" marL="0">
+              <a:buNone/>
+            </a:pPr>
+            <a:r>
+              <a:rPr lang="en-US" sz="1400" dirty="0">
+                <a:solidFill>
+                  <a:schemeClr val="tx1"/>
+                </a:solidFill>
+              </a:rPr>
+              <a:t>One platform for the full research lifecycle, built for every type of health research institution</a:t>
+            </a:r>
+            <a:endParaRPr lang="en-US" sz="1400" dirty="0"/>
+          </a:p>
+        </p:txBody>
+      </p:sp>
+      <p:sp>
+        <p:nvSpPr>
+          <p:cNvPr id="11" name="Agenda 03"/>
+          <p:cNvSpPr/>
+          <p:nvPr/>
+        </p:nvSpPr>
+        <p:spPr>
+          <a:xfrm>
+            <a:off x="548640" y="3017520"/>
+            <a:ext cx="5440680" cy="1325880"/>
+          </a:xfrm>
+          <a:prstGeom prst="roundRect">
+            <a:avLst>
+              <a:gd name="adj" fmla="val 6897"/>
+            </a:avLst>
+          </a:prstGeom>
+          <a:solidFill>
+            <a:srgbClr val="F6F4FB"/>
+          </a:solidFill>
+          <a:ln w="9525">
+            <a:solidFill>
+              <a:srgbClr val="DDD8EC"/>
+            </a:solidFill>
+            <a:prstDash val="solid"/>
+          </a:ln>
+        </p:spPr>
+      </p:sp>
+      <p:sp>
+        <p:nvSpPr>
+          <p:cNvPr id="12" name="Text 10"/>
+          <p:cNvSpPr txBox="1"/>
+          <p:nvPr/>
+        </p:nvSpPr>
+        <p:spPr>
+          <a:xfrm>
+            <a:off x="822960" y="3246120"/>
+            <a:ext cx="914400" cy="822960"/>
+          </a:xfrm>
+          <a:prstGeom prst="rect">
+            <a:avLst/>
+          </a:prstGeom>
+          <a:noFill/>
+          <a:ln/>
+        </p:spPr>
+        <p:txBody>
+          <a:bodyPr wrap="square" lIns="0" tIns="0" rIns="0" bIns="0" rtlCol="0" anchor="ctr"/>
+          <a:lstStyle/>
+          <a:p>
+            <a:pPr indent="0" marL="0">
+              <a:buNone/>
+            </a:pPr>
+            <a:r>
+              <a:rPr lang="en-US" sz="3600" b="1" dirty="0">
+                <a:solidFill>
+                  <a:srgbClr val="7E5BB5"/>
+                </a:solidFill>
+                <a:latin typeface="Arial" pitchFamily="34" charset="0"/>
+                <a:ea typeface="Arial" pitchFamily="34" charset="-122"/>
+                <a:cs typeface="Arial" pitchFamily="34" charset="-120"/>
+              </a:rPr>
+              <a:t>03</a:t>
+            </a:r>
+            <a:endParaRPr lang="en-US" sz="3600" dirty="0"/>
+          </a:p>
+        </p:txBody>
+      </p:sp>
+      <p:sp>
+        <p:nvSpPr>
+          <p:cNvPr id="13" name="Text 11"/>
+          <p:cNvSpPr txBox="1"/>
+          <p:nvPr/>
+        </p:nvSpPr>
+        <p:spPr>
+          <a:xfrm>
+            <a:off x="1874520" y="3218688"/>
+            <a:ext cx="3931920" cy="384048"/>
+          </a:xfrm>
+          <a:prstGeom prst="rect">
+            <a:avLst/>
+          </a:prstGeom>
+          <a:noFill/>
+          <a:ln/>
+        </p:spPr>
+        <p:txBody>
+          <a:bodyPr wrap="square" lIns="0" tIns="0" rIns="0" bIns="0" rtlCol="0" anchor="ctr"/>
+          <a:lstStyle/>
+          <a:p>
+            <a:pPr indent="0" marL="0">
+              <a:buNone/>
+            </a:pPr>
+            <a:r>
+              <a:rPr lang="en-US" sz="1800" b="1" dirty="0">
+                <a:solidFill>
+                  <a:schemeClr val="tx2"/>
+                </a:solidFill>
+              </a:rPr>
+              <a:t>Product tour</a:t>
+            </a:r>
+            <a:endParaRPr lang="en-US" sz="1800" dirty="0"/>
+          </a:p>
+        </p:txBody>
+      </p:sp>
+      <p:sp>
+        <p:nvSpPr>
+          <p:cNvPr id="14" name="Text 12"/>
+          <p:cNvSpPr txBox="1"/>
+          <p:nvPr/>
+        </p:nvSpPr>
+        <p:spPr>
+          <a:xfrm>
+            <a:off x="1874520" y="3621024"/>
+            <a:ext cx="3931920" cy="594360"/>
+          </a:xfrm>
+          <a:prstGeom prst="rect">
+            <a:avLst/>
+          </a:prstGeom>
+          <a:noFill/>
+          <a:ln/>
+        </p:spPr>
+        <p:txBody>
+          <a:bodyPr wrap="square" lIns="0" tIns="0" rIns="0" bIns="0" rtlCol="0" anchor="t"/>
+          <a:lstStyle/>
+          <a:p>
+            <a:pPr indent="0" marL="0">
+              <a:buNone/>
+            </a:pPr>
+            <a:r>
+              <a:rPr lang="en-US" sz="1400" dirty="0">
+                <a:solidFill>
+                  <a:schemeClr val="tx1"/>
+                </a:solidFill>
+              </a:rPr>
+              <a:t>Real screens: dashboards, publications, manuscripts, proposals, ethics and trials</a:t>
+            </a:r>
+            <a:endParaRPr lang="en-US" sz="1400" dirty="0"/>
+          </a:p>
+        </p:txBody>
+      </p:sp>
+      <p:sp>
+        <p:nvSpPr>
+          <p:cNvPr id="15" name="Agenda 04"/>
+          <p:cNvSpPr/>
+          <p:nvPr/>
+        </p:nvSpPr>
+        <p:spPr>
+          <a:xfrm>
+            <a:off x="6172200" y="3017520"/>
+            <a:ext cx="5440680" cy="1325880"/>
+          </a:xfrm>
+          <a:prstGeom prst="roundRect">
+            <a:avLst>
+              <a:gd name="adj" fmla="val 6897"/>
+            </a:avLst>
+          </a:prstGeom>
+          <a:solidFill>
+            <a:srgbClr val="EFEAF8"/>
+          </a:solidFill>
+          <a:ln w="9525">
+            <a:solidFill>
+              <a:srgbClr val="C9B9E8"/>
+            </a:solidFill>
+            <a:prstDash val="solid"/>
+          </a:ln>
+        </p:spPr>
+      </p:sp>
+      <p:sp>
+        <p:nvSpPr>
+          <p:cNvPr id="16" name="Text 14"/>
+          <p:cNvSpPr txBox="1"/>
+          <p:nvPr/>
+        </p:nvSpPr>
+        <p:spPr>
+          <a:xfrm>
+            <a:off x="6446520" y="3246120"/>
+            <a:ext cx="914400" cy="822960"/>
+          </a:xfrm>
+          <a:prstGeom prst="rect">
+            <a:avLst/>
+          </a:prstGeom>
+          <a:noFill/>
+          <a:ln/>
+        </p:spPr>
+        <p:txBody>
+          <a:bodyPr wrap="square" lIns="0" tIns="0" rIns="0" bIns="0" rtlCol="0" anchor="ctr"/>
+          <a:lstStyle/>
+          <a:p>
+            <a:pPr indent="0" marL="0">
+              <a:buNone/>
+            </a:pPr>
+            <a:r>
+              <a:rPr lang="en-US" sz="3600" b="1" dirty="0">
+                <a:solidFill>
+                  <a:srgbClr val="2A9DC0"/>
+                </a:solidFill>
+                <a:latin typeface="Arial" pitchFamily="34" charset="0"/>
+                <a:ea typeface="Arial" pitchFamily="34" charset="-122"/>
+                <a:cs typeface="Arial" pitchFamily="34" charset="-120"/>
+              </a:rPr>
+              <a:t>04</a:t>
+            </a:r>
+            <a:endParaRPr lang="en-US" sz="3600" dirty="0"/>
+          </a:p>
+        </p:txBody>
+      </p:sp>
+      <p:sp>
+        <p:nvSpPr>
+          <p:cNvPr id="17" name="Text 15"/>
+          <p:cNvSpPr txBox="1"/>
+          <p:nvPr/>
+        </p:nvSpPr>
+        <p:spPr>
+          <a:xfrm>
+            <a:off x="7498080" y="3218688"/>
+            <a:ext cx="3931920" cy="384048"/>
+          </a:xfrm>
+          <a:prstGeom prst="rect">
+            <a:avLst/>
+          </a:prstGeom>
+          <a:noFill/>
+          <a:ln/>
+        </p:spPr>
+        <p:txBody>
+          <a:bodyPr wrap="square" lIns="0" tIns="0" rIns="0" bIns="0" rtlCol="0" anchor="ctr"/>
+          <a:lstStyle/>
+          <a:p>
+            <a:pPr indent="0" marL="0">
+              <a:buNone/>
+            </a:pPr>
+            <a:r>
+              <a:rPr lang="en-US" sz="1800" b="1" dirty="0">
+                <a:solidFill>
+                  <a:schemeClr val="tx2"/>
+                </a:solidFill>
+              </a:rPr>
+              <a:t>AI integration</a:t>
+            </a:r>
+            <a:endParaRPr lang="en-US" sz="1800" dirty="0"/>
+          </a:p>
+        </p:txBody>
+      </p:sp>
+      <p:sp>
+        <p:nvSpPr>
+          <p:cNvPr id="18" name="Text 16"/>
+          <p:cNvSpPr txBox="1"/>
+          <p:nvPr/>
+        </p:nvSpPr>
+        <p:spPr>
+          <a:xfrm>
+            <a:off x="7498080" y="3621024"/>
+            <a:ext cx="3931920" cy="594360"/>
+          </a:xfrm>
+          <a:prstGeom prst="rect">
+            <a:avLst/>
+          </a:prstGeom>
+          <a:noFill/>
+          <a:ln/>
+        </p:spPr>
+        <p:txBody>
+          <a:bodyPr wrap="square" lIns="0" tIns="0" rIns="0" bIns="0" rtlCol="0" anchor="t"/>
+          <a:lstStyle/>
+          <a:p>
+            <a:pPr indent="0" marL="0">
+              <a:buNone/>
+            </a:pPr>
+            <a:r>
+              <a:rPr lang="en-US" sz="1400" dirty="0">
+                <a:solidFill>
+                  <a:schemeClr val="tx1"/>
+                </a:solidFill>
+              </a:rPr>
+              <a:t>What the built-in AI does today and how it helps every role</a:t>
+            </a:r>
+            <a:endParaRPr lang="en-US" sz="1400" dirty="0"/>
+          </a:p>
+        </p:txBody>
+      </p:sp>
+      <p:sp>
+        <p:nvSpPr>
+          <p:cNvPr id="19" name="Agenda 05"/>
+          <p:cNvSpPr/>
+          <p:nvPr/>
+        </p:nvSpPr>
+        <p:spPr>
+          <a:xfrm>
+            <a:off x="548640" y="4572000"/>
+            <a:ext cx="5440680" cy="1325880"/>
+          </a:xfrm>
+          <a:prstGeom prst="roundRect">
+            <a:avLst>
+              <a:gd name="adj" fmla="val 6897"/>
+            </a:avLst>
+          </a:prstGeom>
+          <a:solidFill>
+            <a:srgbClr val="F6F4FB"/>
+          </a:solidFill>
+          <a:ln w="9525">
+            <a:solidFill>
+              <a:srgbClr val="DDD8EC"/>
+            </a:solidFill>
+            <a:prstDash val="solid"/>
+          </a:ln>
+        </p:spPr>
+      </p:sp>
+      <p:sp>
+        <p:nvSpPr>
+          <p:cNvPr id="20" name="Text 18"/>
+          <p:cNvSpPr txBox="1"/>
+          <p:nvPr/>
+        </p:nvSpPr>
+        <p:spPr>
+          <a:xfrm>
+            <a:off x="822960" y="4800600"/>
+            <a:ext cx="914400" cy="822960"/>
+          </a:xfrm>
+          <a:prstGeom prst="rect">
+            <a:avLst/>
+          </a:prstGeom>
+          <a:noFill/>
+          <a:ln/>
+        </p:spPr>
+        <p:txBody>
+          <a:bodyPr wrap="square" lIns="0" tIns="0" rIns="0" bIns="0" rtlCol="0" anchor="ctr"/>
+          <a:lstStyle/>
+          <a:p>
+            <a:pPr indent="0" marL="0">
+              <a:buNone/>
+            </a:pPr>
+            <a:r>
+              <a:rPr lang="en-US" sz="3600" b="1" dirty="0">
+                <a:solidFill>
+                  <a:srgbClr val="7E5BB5"/>
+                </a:solidFill>
+                <a:latin typeface="Arial" pitchFamily="34" charset="0"/>
+                <a:ea typeface="Arial" pitchFamily="34" charset="-122"/>
+                <a:cs typeface="Arial" pitchFamily="34" charset="-120"/>
+              </a:rPr>
+              <a:t>05</a:t>
+            </a:r>
+            <a:endParaRPr lang="en-US" sz="3600" dirty="0"/>
+          </a:p>
+        </p:txBody>
+      </p:sp>
+      <p:sp>
+        <p:nvSpPr>
+          <p:cNvPr id="21" name="Text 19"/>
+          <p:cNvSpPr txBox="1"/>
+          <p:nvPr/>
+        </p:nvSpPr>
+        <p:spPr>
+          <a:xfrm>
+            <a:off x="1874520" y="4773168"/>
+            <a:ext cx="3931920" cy="384048"/>
+          </a:xfrm>
+          <a:prstGeom prst="rect">
+            <a:avLst/>
+          </a:prstGeom>
+          <a:noFill/>
+          <a:ln/>
+        </p:spPr>
+        <p:txBody>
+          <a:bodyPr wrap="square" lIns="0" tIns="0" rIns="0" bIns="0" rtlCol="0" anchor="ctr"/>
+          <a:lstStyle/>
+          <a:p>
+            <a:pPr indent="0" marL="0">
+              <a:buNone/>
+            </a:pPr>
+            <a:r>
+              <a:rPr lang="en-US" sz="1800" b="1" dirty="0">
+                <a:solidFill>
+                  <a:schemeClr val="tx2"/>
+                </a:solidFill>
+              </a:rPr>
+              <a:t>Trust &amp; deployment</a:t>
+            </a:r>
+            <a:endParaRPr lang="en-US" sz="1800" dirty="0"/>
+          </a:p>
+        </p:txBody>
+      </p:sp>
+      <p:sp>
+        <p:nvSpPr>
+          <p:cNvPr id="22" name="Text 20"/>
+          <p:cNvSpPr txBox="1"/>
+          <p:nvPr/>
+        </p:nvSpPr>
+        <p:spPr>
+          <a:xfrm>
+            <a:off x="1874520" y="5175504"/>
+            <a:ext cx="3931920" cy="594360"/>
+          </a:xfrm>
+          <a:prstGeom prst="rect">
+            <a:avLst/>
+          </a:prstGeom>
+          <a:noFill/>
+          <a:ln/>
+        </p:spPr>
+        <p:txBody>
+          <a:bodyPr wrap="square" lIns="0" tIns="0" rIns="0" bIns="0" rtlCol="0" anchor="t"/>
+          <a:lstStyle/>
+          <a:p>
+            <a:pPr indent="0" marL="0">
+              <a:buNone/>
+            </a:pPr>
+            <a:r>
+              <a:rPr lang="en-US" sz="1400" dirty="0">
+                <a:solidFill>
+                  <a:schemeClr val="tx1"/>
+                </a:solidFill>
+              </a:rPr>
+              <a:t>Integrations, security, hosting options and the change for your institution</a:t>
+            </a:r>
+            <a:endParaRPr lang="en-US" sz="1400" dirty="0"/>
+          </a:p>
+        </p:txBody>
+      </p:sp>
+      <p:sp>
+        <p:nvSpPr>
+          <p:cNvPr id="23" name="Agenda 06"/>
+          <p:cNvSpPr/>
+          <p:nvPr/>
+        </p:nvSpPr>
+        <p:spPr>
+          <a:xfrm>
+            <a:off x="6172200" y="4572000"/>
+            <a:ext cx="5440680" cy="1325880"/>
+          </a:xfrm>
+          <a:prstGeom prst="roundRect">
+            <a:avLst>
+              <a:gd name="adj" fmla="val 6897"/>
+            </a:avLst>
+          </a:prstGeom>
+          <a:solidFill>
+            <a:srgbClr val="F6F4FB"/>
+          </a:solidFill>
+          <a:ln w="9525">
+            <a:solidFill>
+              <a:srgbClr val="DDD8EC"/>
+            </a:solidFill>
+            <a:prstDash val="solid"/>
+          </a:ln>
+        </p:spPr>
+      </p:sp>
+      <p:sp>
+        <p:nvSpPr>
+          <p:cNvPr id="24" name="Text 22"/>
+          <p:cNvSpPr txBox="1"/>
+          <p:nvPr/>
+        </p:nvSpPr>
+        <p:spPr>
+          <a:xfrm>
+            <a:off x="6446520" y="4800600"/>
+            <a:ext cx="914400" cy="822960"/>
+          </a:xfrm>
+          <a:prstGeom prst="rect">
+            <a:avLst/>
+          </a:prstGeom>
+          <a:noFill/>
+          <a:ln/>
+        </p:spPr>
+        <p:txBody>
+          <a:bodyPr wrap="square" lIns="0" tIns="0" rIns="0" bIns="0" rtlCol="0" anchor="ctr"/>
+          <a:lstStyle/>
+          <a:p>
+            <a:pPr indent="0" marL="0">
+              <a:buNone/>
+            </a:pPr>
+            <a:r>
+              <a:rPr lang="en-US" sz="3600" b="1" dirty="0">
+                <a:solidFill>
+                  <a:srgbClr val="2A9DC0"/>
+                </a:solidFill>
+                <a:latin typeface="Arial" pitchFamily="34" charset="0"/>
+                <a:ea typeface="Arial" pitchFamily="34" charset="-122"/>
+                <a:cs typeface="Arial" pitchFamily="34" charset="-120"/>
+              </a:rPr>
+              <a:t>06</a:t>
+            </a:r>
+            <a:endParaRPr lang="en-US" sz="3600" dirty="0"/>
+          </a:p>
+        </p:txBody>
+      </p:sp>
+      <p:sp>
+        <p:nvSpPr>
+          <p:cNvPr id="25" name="Text 23"/>
+          <p:cNvSpPr txBox="1"/>
+          <p:nvPr/>
+        </p:nvSpPr>
+        <p:spPr>
+          <a:xfrm>
+            <a:off x="7498080" y="4773168"/>
+            <a:ext cx="3931920" cy="384048"/>
+          </a:xfrm>
+          <a:prstGeom prst="rect">
+            <a:avLst/>
+          </a:prstGeom>
+          <a:noFill/>
+          <a:ln/>
+        </p:spPr>
+        <p:txBody>
+          <a:bodyPr wrap="square" lIns="0" tIns="0" rIns="0" bIns="0" rtlCol="0" anchor="ctr"/>
+          <a:lstStyle/>
+          <a:p>
+            <a:pPr indent="0" marL="0">
+              <a:buNone/>
+            </a:pPr>
+            <a:r>
+              <a:rPr lang="en-US" sz="1800" b="1" dirty="0">
+                <a:solidFill>
+                  <a:schemeClr val="tx2"/>
+                </a:solidFill>
+              </a:rPr>
+              <a:t>Getting started</a:t>
+            </a:r>
+            <a:endParaRPr lang="en-US" sz="1800" dirty="0"/>
+          </a:p>
+        </p:txBody>
+      </p:sp>
+      <p:sp>
+        <p:nvSpPr>
+          <p:cNvPr id="26" name="Text 24"/>
+          <p:cNvSpPr txBox="1"/>
+          <p:nvPr/>
+        </p:nvSpPr>
+        <p:spPr>
+          <a:xfrm>
+            <a:off x="7498080" y="5175504"/>
+            <a:ext cx="3931920" cy="594360"/>
+          </a:xfrm>
+          <a:prstGeom prst="rect">
+            <a:avLst/>
+          </a:prstGeom>
+          <a:noFill/>
+          <a:ln/>
+        </p:spPr>
+        <p:txBody>
+          <a:bodyPr wrap="square" lIns="0" tIns="0" rIns="0" bIns="0" rtlCol="0" anchor="t"/>
+          <a:lstStyle/>
+          <a:p>
+            <a:pPr indent="0" marL="0">
+              <a:buNone/>
+            </a:pPr>
+            <a:r>
+              <a:rPr lang="en-US" sz="1400" dirty="0">
+                <a:solidFill>
+                  <a:schemeClr val="tx1"/>
+                </a:solidFill>
+              </a:rPr>
+              <a:t>Onboarding plan and next steps toward a pilot</a:t>
+            </a:r>
+            <a:endParaRPr lang="en-US" sz="1400" dirty="0"/>
+          </a:p>
+        </p:txBody>
+      </p:sp>
+      <p:sp>
+        <p:nvSpPr>
+          <p:cNvPr id="25" name="Slide Number Placeholder 0"/>
+          <p:cNvSpPr>
+            <a:spLocks noGrp="1"/>
+          </p:cNvSpPr>
+          <p:nvPr>
+            <p:ph type="sldNum" sz="quarter" idx="4294967295"/>
+          </p:nvPr>
+        </p:nvSpPr>
+        <p:spPr>
+          <a:xfrm>
+            <a:off x="548640" y="6400800"/>
+            <a:ext cx="548640" cy="274320"/>
+          </a:xfrm>
+          <a:prstGeom prst="rect">
+            <a:avLst/>
+          </a:prstGeom>
+          <a:extLst>
+            <a:ext uri="{C572A759-6A51-4108-AA02-DFA0A04FC94B}">
+              <ma14:wrappingTextBoxFlag xmlns:ma14="http://schemas.microsoft.com/office/mac/drawingml/2011/main" val="0"/>
+            </a:ext>
+          </a:extLst>
+        </p:spPr>
+        <p:txBody>
+          <a:bodyPr/>
+          <a:lstStyle>
+            <a:lvl1pPr>
+              <a:defRPr sz="1000">
+                <a:solidFill>
+                  <a:srgbClr val="5E5C78"/>
+                </a:solidFill>
+              </a:defRPr>
+            </a:lvl1pPr>
+          </a:lstStyle>
+          <a:p>
+            <a:pPr algn="l"/>
+            <a:fld id="{F7021451-1387-4CA6-816F-3879F97B5CBC}" type="slidenum">
+              <a:rPr b="0" lang="en-US"/>
+              <a:t>2</a:t>
+            </a:fld>
+            <a:endParaRPr lang="en-US"/>
+          </a:p>
+        </p:txBody>
+      </p:sp>
+    </p:spTree>
+  </p:cSld>
+  <p:clrMapOvr>
+    <a:masterClrMapping/>
+  </p:clrMapOvr>
+</p:sld>
+</file>
+
+<file path=ppt/slides/slide20.xml><?xml version="1.0" encoding="utf-8"?>
+<p:sld xmlns:a="http://schemas.openxmlformats.org/drawingml/2006/main" xmlns:r="http://schemas.openxmlformats.org/officeDocument/2006/relationships" xmlns:p="http://schemas.openxmlformats.org/presentationml/2006/main">
+  <p:cSld name="Slide 20">
     <p:spTree>
       <p:nvGrpSpPr>
         <p:cNvPr id="1" name=""/>
@@ -17977,7 +15686,7 @@
                   <a:schemeClr val="tx2"/>
                 </a:solidFill>
               </a:rPr>
-              <a:t>Built for everyone in the research ecosystem</a:t>
+              <a:t>Who uses HospitiumRIS?</a:t>
             </a:r>
             <a:endParaRPr lang="en-US" sz="3200" dirty="0"/>
           </a:p>
@@ -18013,7 +15722,7 @@
                   <a:schemeClr val="tx1"/>
                 </a:solidFill>
               </a:rPr>
-              <a:t>Each role gets its own workspace on the same shared data.</a:t>
+              <a:t>Built for the full spectrum of health research institutions — from small research units to national referral hospitals.</a:t>
             </a:r>
             <a:endParaRPr lang="en-US" sz="1600" dirty="0"/>
           </a:p>
@@ -18021,18 +15730,18 @@
       </p:sp>
       <p:sp>
         <p:nvSpPr>
-          <p:cNvPr id="4" name="Audience 1"/>
+          <p:cNvPr id="4" name="University Teaching Hospitals"/>
           <p:cNvSpPr/>
           <p:nvPr/>
         </p:nvSpPr>
         <p:spPr>
           <a:xfrm>
-            <a:off x="548640" y="1828800"/>
-            <a:ext cx="5440680" cy="1920240"/>
+            <a:off x="548640" y="1783080"/>
+            <a:ext cx="2628900" cy="2103120"/>
           </a:xfrm>
           <a:prstGeom prst="roundRect">
             <a:avLst>
-              <a:gd name="adj" fmla="val 4762"/>
+              <a:gd name="adj" fmla="val 4348"/>
             </a:avLst>
           </a:prstGeom>
           <a:solidFill>
@@ -18054,8 +15763,8 @@
         </p:nvSpPr>
         <p:spPr>
           <a:xfrm>
-            <a:off x="822960" y="2148840"/>
-            <a:ext cx="822960" cy="822960"/>
+            <a:off x="777240" y="2011680"/>
+            <a:ext cx="640080" cy="640080"/>
           </a:xfrm>
           <a:prstGeom prst="ellipse">
             <a:avLst/>
@@ -18087,8 +15796,8 @@
         </p:blipFill>
         <p:spPr>
           <a:xfrm>
-            <a:off x="1020470" y="2346350"/>
-            <a:ext cx="427939" cy="427939"/>
+            <a:off x="930859" y="2165299"/>
+            <a:ext cx="332842" cy="332842"/>
           </a:xfrm>
           <a:prstGeom prst="rect">
             <a:avLst/>
@@ -18103,31 +15812,31 @@
         </p:nvSpPr>
         <p:spPr>
           <a:xfrm>
-            <a:off x="1874520" y="2103120"/>
-            <a:ext cx="3886200" cy="411480"/>
-          </a:xfrm>
-          <a:prstGeom prst="rect">
-            <a:avLst/>
-          </a:prstGeom>
-          <a:noFill/>
-          <a:ln/>
-        </p:spPr>
-        <p:txBody>
-          <a:bodyPr wrap="square" lIns="0" tIns="0" rIns="0" bIns="0" rtlCol="0" anchor="ctr"/>
+            <a:off x="777240" y="2743200"/>
+            <a:ext cx="2217420" cy="548640"/>
+          </a:xfrm>
+          <a:prstGeom prst="rect">
+            <a:avLst/>
+          </a:prstGeom>
+          <a:noFill/>
+          <a:ln/>
+        </p:spPr>
+        <p:txBody>
+          <a:bodyPr wrap="square" lIns="0" tIns="0" rIns="0" bIns="0" rtlCol="0" anchor="t"/>
           <a:lstStyle/>
           <a:p>
             <a:pPr indent="0" marL="0">
               <a:buNone/>
             </a:pPr>
             <a:r>
-              <a:rPr lang="en-US" sz="1800" b="1" dirty="0">
+              <a:rPr lang="en-US" sz="1500" b="1" dirty="0">
                 <a:solidFill>
                   <a:schemeClr val="tx2"/>
                 </a:solidFill>
               </a:rPr>
-              <a:t>Universities &amp; research offices</a:t>
-            </a:r>
-            <a:endParaRPr lang="en-US" sz="1800" dirty="0"/>
+              <a:t>University Teaching Hospitals</a:t>
+            </a:r>
+            <a:endParaRPr lang="en-US" sz="1500" dirty="0"/>
           </a:p>
         </p:txBody>
       </p:sp>
@@ -18139,8 +15848,8 @@
         </p:nvSpPr>
         <p:spPr>
           <a:xfrm>
-            <a:off x="1874520" y="2560320"/>
-            <a:ext cx="3886200" cy="1005840"/>
+            <a:off x="777240" y="3355848"/>
+            <a:ext cx="2217420" cy="457200"/>
           </a:xfrm>
           <a:prstGeom prst="rect">
             <a:avLst/>
@@ -18156,31 +15865,31 @@
               <a:buNone/>
             </a:pPr>
             <a:r>
-              <a:rPr lang="en-US" sz="1400" dirty="0">
+              <a:rPr lang="en-US" sz="1250" dirty="0">
                 <a:solidFill>
                   <a:schemeClr val="tx1"/>
                 </a:solidFill>
               </a:rPr>
-              <a:t>Oversee proposals, ethics and outputs across faculties; report to leadership in minutes, not weeks.</a:t>
-            </a:r>
-            <a:endParaRPr lang="en-US" sz="1400" dirty="0"/>
-          </a:p>
-        </p:txBody>
-      </p:sp>
-      <p:sp>
-        <p:nvSpPr>
-          <p:cNvPr id="9" name="Audience 2"/>
+              <a:t>Run research, ethics and trials alongside clinical care.</a:t>
+            </a:r>
+            <a:endParaRPr lang="en-US" sz="1250" dirty="0"/>
+          </a:p>
+        </p:txBody>
+      </p:sp>
+      <p:sp>
+        <p:nvSpPr>
+          <p:cNvPr id="9" name="Medical Schools"/>
           <p:cNvSpPr/>
           <p:nvPr/>
         </p:nvSpPr>
         <p:spPr>
           <a:xfrm>
-            <a:off x="6172200" y="1828800"/>
-            <a:ext cx="5440680" cy="1920240"/>
+            <a:off x="3360420" y="1783080"/>
+            <a:ext cx="2628900" cy="2103120"/>
           </a:xfrm>
           <a:prstGeom prst="roundRect">
             <a:avLst>
-              <a:gd name="adj" fmla="val 4762"/>
+              <a:gd name="adj" fmla="val 4348"/>
             </a:avLst>
           </a:prstGeom>
           <a:solidFill>
@@ -18202,8 +15911,8 @@
         </p:nvSpPr>
         <p:spPr>
           <a:xfrm>
-            <a:off x="6446520" y="2148840"/>
-            <a:ext cx="822960" cy="822960"/>
+            <a:off x="3589020" y="2011680"/>
+            <a:ext cx="640080" cy="640080"/>
           </a:xfrm>
           <a:prstGeom prst="ellipse">
             <a:avLst/>
@@ -18235,8 +15944,8 @@
         </p:blipFill>
         <p:spPr>
           <a:xfrm>
-            <a:off x="6644030" y="2346350"/>
-            <a:ext cx="427939" cy="427939"/>
+            <a:off x="3742639" y="2165299"/>
+            <a:ext cx="332842" cy="332842"/>
           </a:xfrm>
           <a:prstGeom prst="rect">
             <a:avLst/>
@@ -18251,31 +15960,31 @@
         </p:nvSpPr>
         <p:spPr>
           <a:xfrm>
-            <a:off x="7498080" y="2103120"/>
-            <a:ext cx="3886200" cy="411480"/>
-          </a:xfrm>
-          <a:prstGeom prst="rect">
-            <a:avLst/>
-          </a:prstGeom>
-          <a:noFill/>
-          <a:ln/>
-        </p:spPr>
-        <p:txBody>
-          <a:bodyPr wrap="square" lIns="0" tIns="0" rIns="0" bIns="0" rtlCol="0" anchor="ctr"/>
+            <a:off x="3589020" y="2743200"/>
+            <a:ext cx="2217420" cy="548640"/>
+          </a:xfrm>
+          <a:prstGeom prst="rect">
+            <a:avLst/>
+          </a:prstGeom>
+          <a:noFill/>
+          <a:ln/>
+        </p:spPr>
+        <p:txBody>
+          <a:bodyPr wrap="square" lIns="0" tIns="0" rIns="0" bIns="0" rtlCol="0" anchor="t"/>
           <a:lstStyle/>
           <a:p>
             <a:pPr indent="0" marL="0">
               <a:buNone/>
             </a:pPr>
             <a:r>
-              <a:rPr lang="en-US" sz="1800" b="1" dirty="0">
+              <a:rPr lang="en-US" sz="1500" b="1" dirty="0">
                 <a:solidFill>
                   <a:schemeClr val="tx2"/>
                 </a:solidFill>
               </a:rPr>
-              <a:t>Hospitals &amp; clinical research units</a:t>
-            </a:r>
-            <a:endParaRPr lang="en-US" sz="1800" dirty="0"/>
+              <a:t>Medical Schools</a:t>
+            </a:r>
+            <a:endParaRPr lang="en-US" sz="1500" dirty="0"/>
           </a:p>
         </p:txBody>
       </p:sp>
@@ -18287,8 +15996,8 @@
         </p:nvSpPr>
         <p:spPr>
           <a:xfrm>
-            <a:off x="7498080" y="2560320"/>
-            <a:ext cx="3886200" cy="1005840"/>
+            <a:off x="3589020" y="3355848"/>
+            <a:ext cx="2217420" cy="457200"/>
           </a:xfrm>
           <a:prstGeom prst="rect">
             <a:avLst/>
@@ -18304,31 +16013,31 @@
               <a:buNone/>
             </a:pPr>
             <a:r>
-              <a:rPr lang="en-US" sz="1400" dirty="0">
+              <a:rPr lang="en-US" sz="1250" dirty="0">
                 <a:solidFill>
                   <a:schemeClr val="tx1"/>
                 </a:solidFill>
               </a:rPr>
-              <a:t>Govern clinical trials, ethics approvals and safety reporting with registry-ready exports and audit trails.</a:t>
-            </a:r>
-            <a:endParaRPr lang="en-US" sz="1400" dirty="0"/>
-          </a:p>
-        </p:txBody>
-      </p:sp>
-      <p:sp>
-        <p:nvSpPr>
-          <p:cNvPr id="14" name="Audience 3"/>
+              <a:t>Track faculty output, proposals and student research.</a:t>
+            </a:r>
+            <a:endParaRPr lang="en-US" sz="1250" dirty="0"/>
+          </a:p>
+        </p:txBody>
+      </p:sp>
+      <p:sp>
+        <p:nvSpPr>
+          <p:cNvPr id="14" name="Clinical Trial Centres"/>
           <p:cNvSpPr/>
           <p:nvPr/>
         </p:nvSpPr>
         <p:spPr>
           <a:xfrm>
-            <a:off x="548640" y="3977640"/>
-            <a:ext cx="5440680" cy="1920240"/>
+            <a:off x="6172200" y="1783080"/>
+            <a:ext cx="2628900" cy="2103120"/>
           </a:xfrm>
           <a:prstGeom prst="roundRect">
             <a:avLst>
-              <a:gd name="adj" fmla="val 4762"/>
+              <a:gd name="adj" fmla="val 4348"/>
             </a:avLst>
           </a:prstGeom>
           <a:solidFill>
@@ -18350,8 +16059,8 @@
         </p:nvSpPr>
         <p:spPr>
           <a:xfrm>
-            <a:off x="822960" y="4297680"/>
-            <a:ext cx="822960" cy="822960"/>
+            <a:off x="6400800" y="2011680"/>
+            <a:ext cx="640080" cy="640080"/>
           </a:xfrm>
           <a:prstGeom prst="ellipse">
             <a:avLst/>
@@ -18383,8 +16092,8 @@
         </p:blipFill>
         <p:spPr>
           <a:xfrm>
-            <a:off x="1020470" y="4495190"/>
-            <a:ext cx="427939" cy="427939"/>
+            <a:off x="6554419" y="2165299"/>
+            <a:ext cx="332842" cy="332842"/>
           </a:xfrm>
           <a:prstGeom prst="rect">
             <a:avLst/>
@@ -18399,31 +16108,31 @@
         </p:nvSpPr>
         <p:spPr>
           <a:xfrm>
-            <a:off x="1874520" y="4251960"/>
-            <a:ext cx="3886200" cy="411480"/>
-          </a:xfrm>
-          <a:prstGeom prst="rect">
-            <a:avLst/>
-          </a:prstGeom>
-          <a:noFill/>
-          <a:ln/>
-        </p:spPr>
-        <p:txBody>
-          <a:bodyPr wrap="square" lIns="0" tIns="0" rIns="0" bIns="0" rtlCol="0" anchor="ctr"/>
+            <a:off x="6400800" y="2743200"/>
+            <a:ext cx="2217420" cy="548640"/>
+          </a:xfrm>
+          <a:prstGeom prst="rect">
+            <a:avLst/>
+          </a:prstGeom>
+          <a:noFill/>
+          <a:ln/>
+        </p:spPr>
+        <p:txBody>
+          <a:bodyPr wrap="square" lIns="0" tIns="0" rIns="0" bIns="0" rtlCol="0" anchor="t"/>
           <a:lstStyle/>
           <a:p>
             <a:pPr indent="0" marL="0">
               <a:buNone/>
             </a:pPr>
             <a:r>
-              <a:rPr lang="en-US" sz="1800" b="1" dirty="0">
+              <a:rPr lang="en-US" sz="1500" b="1" dirty="0">
                 <a:solidFill>
                   <a:schemeClr val="tx2"/>
                 </a:solidFill>
               </a:rPr>
-              <a:t>Funding foundations</a:t>
-            </a:r>
-            <a:endParaRPr lang="en-US" sz="1800" dirty="0"/>
+              <a:t>Clinical Trial Centres</a:t>
+            </a:r>
+            <a:endParaRPr lang="en-US" sz="1500" dirty="0"/>
           </a:p>
         </p:txBody>
       </p:sp>
@@ -18435,8 +16144,8 @@
         </p:nvSpPr>
         <p:spPr>
           <a:xfrm>
-            <a:off x="1874520" y="4709160"/>
-            <a:ext cx="3886200" cy="1005840"/>
+            <a:off x="6400800" y="3355848"/>
+            <a:ext cx="2217420" cy="457200"/>
           </a:xfrm>
           <a:prstGeom prst="rect">
             <a:avLst/>
@@ -18452,31 +16161,31 @@
               <a:buNone/>
             </a:pPr>
             <a:r>
-              <a:rPr lang="en-US" sz="1400" dirty="0">
+              <a:rPr lang="en-US" sz="1250" dirty="0">
                 <a:solidFill>
                   <a:schemeClr val="tx1"/>
                 </a:solidFill>
               </a:rPr>
-              <a:t>Run grant calls, internal funding requests, campaigns and donors, and track what every grant delivered.</a:t>
-            </a:r>
-            <a:endParaRPr lang="en-US" sz="1400" dirty="0"/>
-          </a:p>
-        </p:txBody>
-      </p:sp>
-      <p:sp>
-        <p:nvSpPr>
-          <p:cNvPr id="19" name="Audience 4"/>
+              <a:t>Registry-ready trials, recruitment and safety reporting.</a:t>
+            </a:r>
+            <a:endParaRPr lang="en-US" sz="1250" dirty="0"/>
+          </a:p>
+        </p:txBody>
+      </p:sp>
+      <p:sp>
+        <p:nvSpPr>
+          <p:cNvPr id="19" name="Ethics Review Boards"/>
           <p:cNvSpPr/>
           <p:nvPr/>
         </p:nvSpPr>
         <p:spPr>
           <a:xfrm>
-            <a:off x="6172200" y="3977640"/>
-            <a:ext cx="5440680" cy="1920240"/>
+            <a:off x="8983980" y="1783080"/>
+            <a:ext cx="2628900" cy="2103120"/>
           </a:xfrm>
           <a:prstGeom prst="roundRect">
             <a:avLst>
-              <a:gd name="adj" fmla="val 4762"/>
+              <a:gd name="adj" fmla="val 4348"/>
             </a:avLst>
           </a:prstGeom>
           <a:solidFill>
@@ -18498,8 +16207,8 @@
         </p:nvSpPr>
         <p:spPr>
           <a:xfrm>
-            <a:off x="6446520" y="4297680"/>
-            <a:ext cx="822960" cy="822960"/>
+            <a:off x="9212580" y="2011680"/>
+            <a:ext cx="640080" cy="640080"/>
           </a:xfrm>
           <a:prstGeom prst="ellipse">
             <a:avLst/>
@@ -18531,8 +16240,8 @@
         </p:blipFill>
         <p:spPr>
           <a:xfrm>
-            <a:off x="6644030" y="4495190"/>
-            <a:ext cx="427939" cy="427939"/>
+            <a:off x="9366199" y="2165299"/>
+            <a:ext cx="332842" cy="332842"/>
           </a:xfrm>
           <a:prstGeom prst="rect">
             <a:avLst/>
@@ -18547,31 +16256,31 @@
         </p:nvSpPr>
         <p:spPr>
           <a:xfrm>
-            <a:off x="7498080" y="4251960"/>
-            <a:ext cx="3886200" cy="411480"/>
-          </a:xfrm>
-          <a:prstGeom prst="rect">
-            <a:avLst/>
-          </a:prstGeom>
-          <a:noFill/>
-          <a:ln/>
-        </p:spPr>
-        <p:txBody>
-          <a:bodyPr wrap="square" lIns="0" tIns="0" rIns="0" bIns="0" rtlCol="0" anchor="ctr"/>
+            <a:off x="9212580" y="2743200"/>
+            <a:ext cx="2217420" cy="548640"/>
+          </a:xfrm>
+          <a:prstGeom prst="rect">
+            <a:avLst/>
+          </a:prstGeom>
+          <a:noFill/>
+          <a:ln/>
+        </p:spPr>
+        <p:txBody>
+          <a:bodyPr wrap="square" lIns="0" tIns="0" rIns="0" bIns="0" rtlCol="0" anchor="t"/>
           <a:lstStyle/>
           <a:p>
             <a:pPr indent="0" marL="0">
               <a:buNone/>
             </a:pPr>
             <a:r>
-              <a:rPr lang="en-US" sz="1800" b="1" dirty="0">
+              <a:rPr lang="en-US" sz="1500" b="1" dirty="0">
                 <a:solidFill>
                   <a:schemeClr val="tx2"/>
                 </a:solidFill>
               </a:rPr>
-              <a:t>Researchers &amp; labs</a:t>
-            </a:r>
-            <a:endParaRPr lang="en-US" sz="1800" dirty="0"/>
+              <a:t>Ethics Review Boards</a:t>
+            </a:r>
+            <a:endParaRPr lang="en-US" sz="1500" dirty="0"/>
           </a:p>
         </p:txBody>
       </p:sp>
@@ -18583,8 +16292,8 @@
         </p:nvSpPr>
         <p:spPr>
           <a:xfrm>
-            <a:off x="7498080" y="4709160"/>
-            <a:ext cx="3886200" cy="1005840"/>
+            <a:off x="9212580" y="3355848"/>
+            <a:ext cx="2217420" cy="457200"/>
           </a:xfrm>
           <a:prstGeom prst="rect">
             <a:avLst/>
@@ -18600,14 +16309,606 @@
               <a:buNone/>
             </a:pPr>
             <a:r>
-              <a:rPr lang="en-US" sz="1400" dirty="0">
+              <a:rPr lang="en-US" sz="1250" dirty="0">
                 <a:solidFill>
                   <a:schemeClr val="tx1"/>
                 </a:solidFill>
               </a:rPr>
-              <a:t>Import publications, co-write manuscripts, submit proposals and track impact from one dashboard.</a:t>
-            </a:r>
-            <a:endParaRPr lang="en-US" sz="1400" dirty="0"/>
+              <a:t>Online applications, committee review and approval tracking.</a:t>
+            </a:r>
+            <a:endParaRPr lang="en-US" sz="1250" dirty="0"/>
+          </a:p>
+        </p:txBody>
+      </p:sp>
+      <p:sp>
+        <p:nvSpPr>
+          <p:cNvPr id="24" name="Health Research Institutes"/>
+          <p:cNvSpPr/>
+          <p:nvPr/>
+        </p:nvSpPr>
+        <p:spPr>
+          <a:xfrm>
+            <a:off x="548640" y="4069080"/>
+            <a:ext cx="2628900" cy="2103120"/>
+          </a:xfrm>
+          <a:prstGeom prst="roundRect">
+            <a:avLst>
+              <a:gd name="adj" fmla="val 4348"/>
+            </a:avLst>
+          </a:prstGeom>
+          <a:solidFill>
+            <a:srgbClr val="F6F4FB"/>
+          </a:solidFill>
+          <a:ln w="9525">
+            <a:solidFill>
+              <a:srgbClr val="DDD8EC"/>
+            </a:solidFill>
+            <a:prstDash val="solid"/>
+          </a:ln>
+        </p:spPr>
+      </p:sp>
+      <p:sp>
+        <p:nvSpPr>
+          <p:cNvPr id="25" name="Shape 19"/>
+          <p:cNvSpPr/>
+          <p:nvPr/>
+        </p:nvSpPr>
+        <p:spPr>
+          <a:xfrm>
+            <a:off x="777240" y="4297680"/>
+            <a:ext cx="640080" cy="640080"/>
+          </a:xfrm>
+          <a:prstGeom prst="ellipse">
+            <a:avLst/>
+          </a:prstGeom>
+          <a:solidFill>
+            <a:srgbClr val="2A9DC0"/>
+          </a:solidFill>
+          <a:ln w="12700">
+            <a:solidFill>
+              <a:srgbClr val="2A9DC0"/>
+            </a:solidFill>
+            <a:prstDash val="solid"/>
+          </a:ln>
+        </p:spPr>
+      </p:sp>
+      <p:pic>
+        <p:nvPicPr>
+          <p:cNvPr id="26" name="Image 4" descr="preencoded.png">    </p:cNvPr>
+          <p:cNvPicPr>
+            <a:picLocks noChangeAspect="1"/>
+          </p:cNvPicPr>
+          <p:nvPr/>
+        </p:nvPicPr>
+        <p:blipFill>
+          <a:blip r:embed="rId5"/>
+          <a:stretch>
+            <a:fillRect/>
+          </a:stretch>
+        </p:blipFill>
+        <p:spPr>
+          <a:xfrm>
+            <a:off x="930859" y="4451299"/>
+            <a:ext cx="332842" cy="332842"/>
+          </a:xfrm>
+          <a:prstGeom prst="rect">
+            <a:avLst/>
+          </a:prstGeom>
+        </p:spPr>
+      </p:pic>
+      <p:sp>
+        <p:nvSpPr>
+          <p:cNvPr id="27" name="Text 20"/>
+          <p:cNvSpPr txBox="1"/>
+          <p:nvPr/>
+        </p:nvSpPr>
+        <p:spPr>
+          <a:xfrm>
+            <a:off x="777240" y="5029200"/>
+            <a:ext cx="2217420" cy="548640"/>
+          </a:xfrm>
+          <a:prstGeom prst="rect">
+            <a:avLst/>
+          </a:prstGeom>
+          <a:noFill/>
+          <a:ln/>
+        </p:spPr>
+        <p:txBody>
+          <a:bodyPr wrap="square" lIns="0" tIns="0" rIns="0" bIns="0" rtlCol="0" anchor="t"/>
+          <a:lstStyle/>
+          <a:p>
+            <a:pPr indent="0" marL="0">
+              <a:buNone/>
+            </a:pPr>
+            <a:r>
+              <a:rPr lang="en-US" sz="1500" b="1" dirty="0">
+                <a:solidFill>
+                  <a:schemeClr val="tx2"/>
+                </a:solidFill>
+              </a:rPr>
+              <a:t>Health Research Institutes</a:t>
+            </a:r>
+            <a:endParaRPr lang="en-US" sz="1500" dirty="0"/>
+          </a:p>
+        </p:txBody>
+      </p:sp>
+      <p:sp>
+        <p:nvSpPr>
+          <p:cNvPr id="28" name="Text 21"/>
+          <p:cNvSpPr txBox="1"/>
+          <p:nvPr/>
+        </p:nvSpPr>
+        <p:spPr>
+          <a:xfrm>
+            <a:off x="777240" y="5641848"/>
+            <a:ext cx="2217420" cy="457200"/>
+          </a:xfrm>
+          <a:prstGeom prst="rect">
+            <a:avLst/>
+          </a:prstGeom>
+          <a:noFill/>
+          <a:ln/>
+        </p:spPr>
+        <p:txBody>
+          <a:bodyPr wrap="square" lIns="0" tIns="0" rIns="0" bIns="0" rtlCol="0" anchor="t"/>
+          <a:lstStyle/>
+          <a:p>
+            <a:pPr indent="0" marL="0">
+              <a:buNone/>
+            </a:pPr>
+            <a:r>
+              <a:rPr lang="en-US" sz="1250" dirty="0">
+                <a:solidFill>
+                  <a:schemeClr val="tx1"/>
+                </a:solidFill>
+              </a:rPr>
+              <a:t>Manage projects, grants, datasets and publications.</a:t>
+            </a:r>
+            <a:endParaRPr lang="en-US" sz="1250" dirty="0"/>
+          </a:p>
+        </p:txBody>
+      </p:sp>
+      <p:sp>
+        <p:nvSpPr>
+          <p:cNvPr id="29" name="Health Ministries"/>
+          <p:cNvSpPr/>
+          <p:nvPr/>
+        </p:nvSpPr>
+        <p:spPr>
+          <a:xfrm>
+            <a:off x="3360420" y="4069080"/>
+            <a:ext cx="2628900" cy="2103120"/>
+          </a:xfrm>
+          <a:prstGeom prst="roundRect">
+            <a:avLst>
+              <a:gd name="adj" fmla="val 4348"/>
+            </a:avLst>
+          </a:prstGeom>
+          <a:solidFill>
+            <a:srgbClr val="F6F4FB"/>
+          </a:solidFill>
+          <a:ln w="9525">
+            <a:solidFill>
+              <a:srgbClr val="DDD8EC"/>
+            </a:solidFill>
+            <a:prstDash val="solid"/>
+          </a:ln>
+        </p:spPr>
+      </p:sp>
+      <p:sp>
+        <p:nvSpPr>
+          <p:cNvPr id="30" name="Shape 23"/>
+          <p:cNvSpPr/>
+          <p:nvPr/>
+        </p:nvSpPr>
+        <p:spPr>
+          <a:xfrm>
+            <a:off x="3589020" y="4297680"/>
+            <a:ext cx="640080" cy="640080"/>
+          </a:xfrm>
+          <a:prstGeom prst="ellipse">
+            <a:avLst/>
+          </a:prstGeom>
+          <a:solidFill>
+            <a:srgbClr val="7E5BB5"/>
+          </a:solidFill>
+          <a:ln w="12700">
+            <a:solidFill>
+              <a:srgbClr val="7E5BB5"/>
+            </a:solidFill>
+            <a:prstDash val="solid"/>
+          </a:ln>
+        </p:spPr>
+      </p:sp>
+      <p:pic>
+        <p:nvPicPr>
+          <p:cNvPr id="31" name="Image 5" descr="preencoded.png">    </p:cNvPr>
+          <p:cNvPicPr>
+            <a:picLocks noChangeAspect="1"/>
+          </p:cNvPicPr>
+          <p:nvPr/>
+        </p:nvPicPr>
+        <p:blipFill>
+          <a:blip r:embed="rId6"/>
+          <a:stretch>
+            <a:fillRect/>
+          </a:stretch>
+        </p:blipFill>
+        <p:spPr>
+          <a:xfrm>
+            <a:off x="3742639" y="4451299"/>
+            <a:ext cx="332842" cy="332842"/>
+          </a:xfrm>
+          <a:prstGeom prst="rect">
+            <a:avLst/>
+          </a:prstGeom>
+        </p:spPr>
+      </p:pic>
+      <p:sp>
+        <p:nvSpPr>
+          <p:cNvPr id="32" name="Text 24"/>
+          <p:cNvSpPr txBox="1"/>
+          <p:nvPr/>
+        </p:nvSpPr>
+        <p:spPr>
+          <a:xfrm>
+            <a:off x="3589020" y="5029200"/>
+            <a:ext cx="2217420" cy="548640"/>
+          </a:xfrm>
+          <a:prstGeom prst="rect">
+            <a:avLst/>
+          </a:prstGeom>
+          <a:noFill/>
+          <a:ln/>
+        </p:spPr>
+        <p:txBody>
+          <a:bodyPr wrap="square" lIns="0" tIns="0" rIns="0" bIns="0" rtlCol="0" anchor="t"/>
+          <a:lstStyle/>
+          <a:p>
+            <a:pPr indent="0" marL="0">
+              <a:buNone/>
+            </a:pPr>
+            <a:r>
+              <a:rPr lang="en-US" sz="1500" b="1" dirty="0">
+                <a:solidFill>
+                  <a:schemeClr val="tx2"/>
+                </a:solidFill>
+              </a:rPr>
+              <a:t>Health Ministries</a:t>
+            </a:r>
+            <a:endParaRPr lang="en-US" sz="1500" dirty="0"/>
+          </a:p>
+        </p:txBody>
+      </p:sp>
+      <p:sp>
+        <p:nvSpPr>
+          <p:cNvPr id="33" name="Text 25"/>
+          <p:cNvSpPr txBox="1"/>
+          <p:nvPr/>
+        </p:nvSpPr>
+        <p:spPr>
+          <a:xfrm>
+            <a:off x="3589020" y="5641848"/>
+            <a:ext cx="2217420" cy="457200"/>
+          </a:xfrm>
+          <a:prstGeom prst="rect">
+            <a:avLst/>
+          </a:prstGeom>
+          <a:noFill/>
+          <a:ln/>
+        </p:spPr>
+        <p:txBody>
+          <a:bodyPr wrap="square" lIns="0" tIns="0" rIns="0" bIns="0" rtlCol="0" anchor="t"/>
+          <a:lstStyle/>
+          <a:p>
+            <a:pPr indent="0" marL="0">
+              <a:buNone/>
+            </a:pPr>
+            <a:r>
+              <a:rPr lang="en-US" sz="1250" dirty="0">
+                <a:solidFill>
+                  <a:schemeClr val="tx1"/>
+                </a:solidFill>
+              </a:rPr>
+              <a:t>National view of research activity, compliance and impact.</a:t>
+            </a:r>
+            <a:endParaRPr lang="en-US" sz="1250" dirty="0"/>
+          </a:p>
+        </p:txBody>
+      </p:sp>
+      <p:sp>
+        <p:nvSpPr>
+          <p:cNvPr id="34" name="Research Support Offices"/>
+          <p:cNvSpPr/>
+          <p:nvPr/>
+        </p:nvSpPr>
+        <p:spPr>
+          <a:xfrm>
+            <a:off x="6172200" y="4069080"/>
+            <a:ext cx="2628900" cy="2103120"/>
+          </a:xfrm>
+          <a:prstGeom prst="roundRect">
+            <a:avLst>
+              <a:gd name="adj" fmla="val 4348"/>
+            </a:avLst>
+          </a:prstGeom>
+          <a:solidFill>
+            <a:srgbClr val="F6F4FB"/>
+          </a:solidFill>
+          <a:ln w="9525">
+            <a:solidFill>
+              <a:srgbClr val="DDD8EC"/>
+            </a:solidFill>
+            <a:prstDash val="solid"/>
+          </a:ln>
+        </p:spPr>
+      </p:sp>
+      <p:sp>
+        <p:nvSpPr>
+          <p:cNvPr id="35" name="Shape 27"/>
+          <p:cNvSpPr/>
+          <p:nvPr/>
+        </p:nvSpPr>
+        <p:spPr>
+          <a:xfrm>
+            <a:off x="6400800" y="4297680"/>
+            <a:ext cx="640080" cy="640080"/>
+          </a:xfrm>
+          <a:prstGeom prst="ellipse">
+            <a:avLst/>
+          </a:prstGeom>
+          <a:solidFill>
+            <a:srgbClr val="2A9DC0"/>
+          </a:solidFill>
+          <a:ln w="12700">
+            <a:solidFill>
+              <a:srgbClr val="2A9DC0"/>
+            </a:solidFill>
+            <a:prstDash val="solid"/>
+          </a:ln>
+        </p:spPr>
+      </p:sp>
+      <p:pic>
+        <p:nvPicPr>
+          <p:cNvPr id="36" name="Image 6" descr="preencoded.png">    </p:cNvPr>
+          <p:cNvPicPr>
+            <a:picLocks noChangeAspect="1"/>
+          </p:cNvPicPr>
+          <p:nvPr/>
+        </p:nvPicPr>
+        <p:blipFill>
+          <a:blip r:embed="rId7"/>
+          <a:stretch>
+            <a:fillRect/>
+          </a:stretch>
+        </p:blipFill>
+        <p:spPr>
+          <a:xfrm>
+            <a:off x="6554419" y="4451299"/>
+            <a:ext cx="332842" cy="332842"/>
+          </a:xfrm>
+          <a:prstGeom prst="rect">
+            <a:avLst/>
+          </a:prstGeom>
+        </p:spPr>
+      </p:pic>
+      <p:sp>
+        <p:nvSpPr>
+          <p:cNvPr id="37" name="Text 28"/>
+          <p:cNvSpPr txBox="1"/>
+          <p:nvPr/>
+        </p:nvSpPr>
+        <p:spPr>
+          <a:xfrm>
+            <a:off x="6400800" y="5029200"/>
+            <a:ext cx="2217420" cy="548640"/>
+          </a:xfrm>
+          <a:prstGeom prst="rect">
+            <a:avLst/>
+          </a:prstGeom>
+          <a:noFill/>
+          <a:ln/>
+        </p:spPr>
+        <p:txBody>
+          <a:bodyPr wrap="square" lIns="0" tIns="0" rIns="0" bIns="0" rtlCol="0" anchor="t"/>
+          <a:lstStyle/>
+          <a:p>
+            <a:pPr indent="0" marL="0">
+              <a:buNone/>
+            </a:pPr>
+            <a:r>
+              <a:rPr lang="en-US" sz="1500" b="1" dirty="0">
+                <a:solidFill>
+                  <a:schemeClr val="tx2"/>
+                </a:solidFill>
+              </a:rPr>
+              <a:t>Research Support Offices</a:t>
+            </a:r>
+            <a:endParaRPr lang="en-US" sz="1500" dirty="0"/>
+          </a:p>
+        </p:txBody>
+      </p:sp>
+      <p:sp>
+        <p:nvSpPr>
+          <p:cNvPr id="38" name="Text 29"/>
+          <p:cNvSpPr txBox="1"/>
+          <p:nvPr/>
+        </p:nvSpPr>
+        <p:spPr>
+          <a:xfrm>
+            <a:off x="6400800" y="5641848"/>
+            <a:ext cx="2217420" cy="457200"/>
+          </a:xfrm>
+          <a:prstGeom prst="rect">
+            <a:avLst/>
+          </a:prstGeom>
+          <a:noFill/>
+          <a:ln/>
+        </p:spPr>
+        <p:txBody>
+          <a:bodyPr wrap="square" lIns="0" tIns="0" rIns="0" bIns="0" rtlCol="0" anchor="t"/>
+          <a:lstStyle/>
+          <a:p>
+            <a:pPr indent="0" marL="0">
+              <a:buNone/>
+            </a:pPr>
+            <a:r>
+              <a:rPr lang="en-US" sz="1250" dirty="0">
+                <a:solidFill>
+                  <a:schemeClr val="tx1"/>
+                </a:solidFill>
+              </a:rPr>
+              <a:t>Review pipelines, grant tracking and reporting on demand.</a:t>
+            </a:r>
+            <a:endParaRPr lang="en-US" sz="1250" dirty="0"/>
+          </a:p>
+        </p:txBody>
+      </p:sp>
+      <p:sp>
+        <p:nvSpPr>
+          <p:cNvPr id="39" name="International Research Partners"/>
+          <p:cNvSpPr/>
+          <p:nvPr/>
+        </p:nvSpPr>
+        <p:spPr>
+          <a:xfrm>
+            <a:off x="8983980" y="4069080"/>
+            <a:ext cx="2628900" cy="2103120"/>
+          </a:xfrm>
+          <a:prstGeom prst="roundRect">
+            <a:avLst>
+              <a:gd name="adj" fmla="val 4348"/>
+            </a:avLst>
+          </a:prstGeom>
+          <a:solidFill>
+            <a:srgbClr val="F6F4FB"/>
+          </a:solidFill>
+          <a:ln w="9525">
+            <a:solidFill>
+              <a:srgbClr val="DDD8EC"/>
+            </a:solidFill>
+            <a:prstDash val="solid"/>
+          </a:ln>
+        </p:spPr>
+      </p:sp>
+      <p:sp>
+        <p:nvSpPr>
+          <p:cNvPr id="40" name="Shape 31"/>
+          <p:cNvSpPr/>
+          <p:nvPr/>
+        </p:nvSpPr>
+        <p:spPr>
+          <a:xfrm>
+            <a:off x="9212580" y="4297680"/>
+            <a:ext cx="640080" cy="640080"/>
+          </a:xfrm>
+          <a:prstGeom prst="ellipse">
+            <a:avLst/>
+          </a:prstGeom>
+          <a:solidFill>
+            <a:srgbClr val="7E5BB5"/>
+          </a:solidFill>
+          <a:ln w="12700">
+            <a:solidFill>
+              <a:srgbClr val="7E5BB5"/>
+            </a:solidFill>
+            <a:prstDash val="solid"/>
+          </a:ln>
+        </p:spPr>
+      </p:sp>
+      <p:pic>
+        <p:nvPicPr>
+          <p:cNvPr id="41" name="Image 7" descr="preencoded.png">    </p:cNvPr>
+          <p:cNvPicPr>
+            <a:picLocks noChangeAspect="1"/>
+          </p:cNvPicPr>
+          <p:nvPr/>
+        </p:nvPicPr>
+        <p:blipFill>
+          <a:blip r:embed="rId8"/>
+          <a:stretch>
+            <a:fillRect/>
+          </a:stretch>
+        </p:blipFill>
+        <p:spPr>
+          <a:xfrm>
+            <a:off x="9366199" y="4451299"/>
+            <a:ext cx="332842" cy="332842"/>
+          </a:xfrm>
+          <a:prstGeom prst="rect">
+            <a:avLst/>
+          </a:prstGeom>
+        </p:spPr>
+      </p:pic>
+      <p:sp>
+        <p:nvSpPr>
+          <p:cNvPr id="42" name="Text 32"/>
+          <p:cNvSpPr txBox="1"/>
+          <p:nvPr/>
+        </p:nvSpPr>
+        <p:spPr>
+          <a:xfrm>
+            <a:off x="9212580" y="5029200"/>
+            <a:ext cx="2217420" cy="548640"/>
+          </a:xfrm>
+          <a:prstGeom prst="rect">
+            <a:avLst/>
+          </a:prstGeom>
+          <a:noFill/>
+          <a:ln/>
+        </p:spPr>
+        <p:txBody>
+          <a:bodyPr wrap="square" lIns="0" tIns="0" rIns="0" bIns="0" rtlCol="0" anchor="t"/>
+          <a:lstStyle/>
+          <a:p>
+            <a:pPr indent="0" marL="0">
+              <a:buNone/>
+            </a:pPr>
+            <a:r>
+              <a:rPr lang="en-US" sz="1500" b="1" dirty="0">
+                <a:solidFill>
+                  <a:schemeClr val="tx2"/>
+                </a:solidFill>
+              </a:rPr>
+              <a:t>International Research Partners</a:t>
+            </a:r>
+            <a:endParaRPr lang="en-US" sz="1500" dirty="0"/>
+          </a:p>
+        </p:txBody>
+      </p:sp>
+      <p:sp>
+        <p:nvSpPr>
+          <p:cNvPr id="43" name="Text 33"/>
+          <p:cNvSpPr txBox="1"/>
+          <p:nvPr/>
+        </p:nvSpPr>
+        <p:spPr>
+          <a:xfrm>
+            <a:off x="9212580" y="5641848"/>
+            <a:ext cx="2217420" cy="457200"/>
+          </a:xfrm>
+          <a:prstGeom prst="rect">
+            <a:avLst/>
+          </a:prstGeom>
+          <a:noFill/>
+          <a:ln/>
+        </p:spPr>
+        <p:txBody>
+          <a:bodyPr wrap="square" lIns="0" tIns="0" rIns="0" bIns="0" rtlCol="0" anchor="t"/>
+          <a:lstStyle/>
+          <a:p>
+            <a:pPr indent="0" marL="0">
+              <a:buNone/>
+            </a:pPr>
+            <a:r>
+              <a:rPr lang="en-US" sz="1250" dirty="0">
+                <a:solidFill>
+                  <a:schemeClr val="tx1"/>
+                </a:solidFill>
+              </a:rPr>
+              <a:t>Collaborate across institutions on shared projects and outputs.</a:t>
+            </a:r>
+            <a:endParaRPr lang="en-US" sz="1250" dirty="0"/>
           </a:p>
         </p:txBody>
       </p:sp>
